--- a/docs/submissions/stage-b/poster/GhostHouses_Poster.pptx
+++ b/docs/submissions/stage-b/poster/GhostHouses_Poster.pptx
@@ -1,19 +1,637 @@
 
 <file path=ppt/presentation.xml><?xml version="1.0" encoding="utf-8"?>
-<p:presentation xmlns:a="http://schemas.openxmlformats.org/drawingml/2006/main" xmlns:p="http://schemas.openxmlformats.org/presentationml/2006/main" xmlns:r="http://schemas.openxmlformats.org/officeDocument/2006/relationships" xmlns:p14="http://schemas.microsoft.com/office/powerpoint/2010/main" xmlns:p15="http://schemas.microsoft.com/office/powerpoint/2012/main" xmlns:mc="http://schemas.openxmlformats.org/markup-compatibility/2006">
+<p:presentation xmlns:a="http://schemas.openxmlformats.org/drawingml/2006/main" xmlns:r="http://schemas.openxmlformats.org/officeDocument/2006/relationships" xmlns:p="http://schemas.openxmlformats.org/presentationml/2006/main">
   <p:sldMasterIdLst>
-    <p:sldMasterId id="2147483648" r:id="rId2"/>
+    <p:sldMasterId id="2147483648" r:id="rId1"/>
   </p:sldMasterIdLst>
+  <p:notesMasterIdLst>
+    <p:notesMasterId r:id="rId3"/>
+  </p:notesMasterIdLst>
   <p:sldIdLst>
-    <p:sldId id="256" r:id="rId3"/>
+    <p:sldId id="256" r:id="rId2"/>
   </p:sldIdLst>
-  <p:sldSz cx="24120475" cy="34920237"/>
-  <p:notesSz cx="7559675" cy="10691812"/>
+  <p:sldSz cx="24120475" cy="34920238"/>
+  <p:notesSz cx="7559675" cy="10691813"/>
+  <p:defaultTextStyle>
+    <a:defPPr>
+      <a:defRPr lang="en-IL"/>
+    </a:defPPr>
+    <a:lvl1pPr marL="0" algn="l" defTabSz="914400" rtl="0" eaLnBrk="1" latinLnBrk="0" hangingPunct="1">
+      <a:defRPr sz="1800" kern="1200">
+        <a:solidFill>
+          <a:schemeClr val="tx1"/>
+        </a:solidFill>
+        <a:latin typeface="+mn-lt"/>
+        <a:ea typeface="+mn-ea"/>
+        <a:cs typeface="+mn-cs"/>
+      </a:defRPr>
+    </a:lvl1pPr>
+    <a:lvl2pPr marL="457200" algn="l" defTabSz="914400" rtl="0" eaLnBrk="1" latinLnBrk="0" hangingPunct="1">
+      <a:defRPr sz="1800" kern="1200">
+        <a:solidFill>
+          <a:schemeClr val="tx1"/>
+        </a:solidFill>
+        <a:latin typeface="+mn-lt"/>
+        <a:ea typeface="+mn-ea"/>
+        <a:cs typeface="+mn-cs"/>
+      </a:defRPr>
+    </a:lvl2pPr>
+    <a:lvl3pPr marL="914400" algn="l" defTabSz="914400" rtl="0" eaLnBrk="1" latinLnBrk="0" hangingPunct="1">
+      <a:defRPr sz="1800" kern="1200">
+        <a:solidFill>
+          <a:schemeClr val="tx1"/>
+        </a:solidFill>
+        <a:latin typeface="+mn-lt"/>
+        <a:ea typeface="+mn-ea"/>
+        <a:cs typeface="+mn-cs"/>
+      </a:defRPr>
+    </a:lvl3pPr>
+    <a:lvl4pPr marL="1371600" algn="l" defTabSz="914400" rtl="0" eaLnBrk="1" latinLnBrk="0" hangingPunct="1">
+      <a:defRPr sz="1800" kern="1200">
+        <a:solidFill>
+          <a:schemeClr val="tx1"/>
+        </a:solidFill>
+        <a:latin typeface="+mn-lt"/>
+        <a:ea typeface="+mn-ea"/>
+        <a:cs typeface="+mn-cs"/>
+      </a:defRPr>
+    </a:lvl4pPr>
+    <a:lvl5pPr marL="1828800" algn="l" defTabSz="914400" rtl="0" eaLnBrk="1" latinLnBrk="0" hangingPunct="1">
+      <a:defRPr sz="1800" kern="1200">
+        <a:solidFill>
+          <a:schemeClr val="tx1"/>
+        </a:solidFill>
+        <a:latin typeface="+mn-lt"/>
+        <a:ea typeface="+mn-ea"/>
+        <a:cs typeface="+mn-cs"/>
+      </a:defRPr>
+    </a:lvl5pPr>
+    <a:lvl6pPr marL="2286000" algn="l" defTabSz="914400" rtl="0" eaLnBrk="1" latinLnBrk="0" hangingPunct="1">
+      <a:defRPr sz="1800" kern="1200">
+        <a:solidFill>
+          <a:schemeClr val="tx1"/>
+        </a:solidFill>
+        <a:latin typeface="+mn-lt"/>
+        <a:ea typeface="+mn-ea"/>
+        <a:cs typeface="+mn-cs"/>
+      </a:defRPr>
+    </a:lvl6pPr>
+    <a:lvl7pPr marL="2743200" algn="l" defTabSz="914400" rtl="0" eaLnBrk="1" latinLnBrk="0" hangingPunct="1">
+      <a:defRPr sz="1800" kern="1200">
+        <a:solidFill>
+          <a:schemeClr val="tx1"/>
+        </a:solidFill>
+        <a:latin typeface="+mn-lt"/>
+        <a:ea typeface="+mn-ea"/>
+        <a:cs typeface="+mn-cs"/>
+      </a:defRPr>
+    </a:lvl7pPr>
+    <a:lvl8pPr marL="3200400" algn="l" defTabSz="914400" rtl="0" eaLnBrk="1" latinLnBrk="0" hangingPunct="1">
+      <a:defRPr sz="1800" kern="1200">
+        <a:solidFill>
+          <a:schemeClr val="tx1"/>
+        </a:solidFill>
+        <a:latin typeface="+mn-lt"/>
+        <a:ea typeface="+mn-ea"/>
+        <a:cs typeface="+mn-cs"/>
+      </a:defRPr>
+    </a:lvl8pPr>
+    <a:lvl9pPr marL="3657600" algn="l" defTabSz="914400" rtl="0" eaLnBrk="1" latinLnBrk="0" hangingPunct="1">
+      <a:defRPr sz="1800" kern="1200">
+        <a:solidFill>
+          <a:schemeClr val="tx1"/>
+        </a:solidFill>
+        <a:latin typeface="+mn-lt"/>
+        <a:ea typeface="+mn-ea"/>
+        <a:cs typeface="+mn-cs"/>
+      </a:defRPr>
+    </a:lvl9pPr>
+  </p:defaultTextStyle>
+  <p:extLst>
+    <p:ext uri="{EFAFB233-063F-42B5-8137-9DF3F51BA10A}">
+      <p15:sldGuideLst xmlns:p15="http://schemas.microsoft.com/office/powerpoint/2012/main"/>
+    </p:ext>
+  </p:extLst>
 </p:presentation>
 </file>
 
+<file path=ppt/revisionInfo.xml><?xml version="1.0" encoding="utf-8"?>
+<p1510:revInfo xmlns:a="http://schemas.openxmlformats.org/drawingml/2006/main" xmlns:r="http://schemas.openxmlformats.org/officeDocument/2006/relationships" xmlns:p1510="http://schemas.microsoft.com/office/powerpoint/2015/10/main">
+  <p1510:revLst>
+    <p1510:client id="{44282468-0EAF-40B0-9489-C826880ECD18}" v="1" dt="2026-06-28T10:27:00.012"/>
+  </p1510:revLst>
+</p1510:revInfo>
+</file>
+
+<file path=ppt/changesInfos/changesInfo1.xml><?xml version="1.0" encoding="utf-8"?>
+<pc:chgInfo xmlns:a="http://schemas.openxmlformats.org/drawingml/2006/main" xmlns:r="http://schemas.openxmlformats.org/officeDocument/2006/relationships" xmlns:ac="http://schemas.microsoft.com/office/drawing/2013/main/command" xmlns:pc="http://schemas.microsoft.com/office/powerpoint/2013/main/command">
+  <pc:docChgLst>
+    <pc:chgData name="Kareem Araide" userId="de348250dbb8bac6" providerId="LiveId" clId="{65F28107-F77A-404E-ADBF-4CBF28DF91CB}"/>
+    <pc:docChg chg="undo custSel modSld">
+      <pc:chgData name="Kareem Araide" userId="de348250dbb8bac6" providerId="LiveId" clId="{65F28107-F77A-404E-ADBF-4CBF28DF91CB}" dt="2026-06-28T10:50:16.525" v="20" actId="14100"/>
+      <pc:docMkLst>
+        <pc:docMk/>
+      </pc:docMkLst>
+      <pc:sldChg chg="delSp modSp mod modNotesTx">
+        <pc:chgData name="Kareem Araide" userId="de348250dbb8bac6" providerId="LiveId" clId="{65F28107-F77A-404E-ADBF-4CBF28DF91CB}" dt="2026-06-28T10:50:16.525" v="20" actId="14100"/>
+        <pc:sldMkLst>
+          <pc:docMk/>
+          <pc:sldMk cId="0" sldId="256"/>
+        </pc:sldMkLst>
+        <pc:spChg chg="mod">
+          <ac:chgData name="Kareem Araide" userId="de348250dbb8bac6" providerId="LiveId" clId="{65F28107-F77A-404E-ADBF-4CBF28DF91CB}" dt="2026-06-28T10:50:16.525" v="20" actId="14100"/>
+          <ac:spMkLst>
+            <pc:docMk/>
+            <pc:sldMk cId="0" sldId="256"/>
+            <ac:spMk id="107" creationId="{00000000-0000-0000-0000-000000000000}"/>
+          </ac:spMkLst>
+        </pc:spChg>
+        <pc:spChg chg="mod">
+          <ac:chgData name="Kareem Araide" userId="de348250dbb8bac6" providerId="LiveId" clId="{65F28107-F77A-404E-ADBF-4CBF28DF91CB}" dt="2026-06-28T10:46:01.807" v="17" actId="404"/>
+          <ac:spMkLst>
+            <pc:docMk/>
+            <pc:sldMk cId="0" sldId="256"/>
+            <ac:spMk id="108" creationId="{00000000-0000-0000-0000-000000000000}"/>
+          </ac:spMkLst>
+        </pc:spChg>
+        <pc:spChg chg="del">
+          <ac:chgData name="Kareem Araide" userId="de348250dbb8bac6" providerId="LiveId" clId="{65F28107-F77A-404E-ADBF-4CBF28DF91CB}" dt="2026-06-28T10:26:56.318" v="0" actId="478"/>
+          <ac:spMkLst>
+            <pc:docMk/>
+            <pc:sldMk cId="0" sldId="256"/>
+            <ac:spMk id="109" creationId="{00000000-0000-0000-0000-000000000000}"/>
+          </ac:spMkLst>
+        </pc:spChg>
+      </pc:sldChg>
+    </pc:docChg>
+  </pc:docChgLst>
+</pc:chgInfo>
+</file>
+
+<file path=ppt/notesMasters/notesMaster1.xml><?xml version="1.0" encoding="utf-8"?>
+<p:notesMaster xmlns:a="http://schemas.openxmlformats.org/drawingml/2006/main" xmlns:r="http://schemas.openxmlformats.org/officeDocument/2006/relationships" xmlns:p="http://schemas.openxmlformats.org/presentationml/2006/main">
+  <p:cSld>
+    <p:bg>
+      <p:bgRef idx="1001">
+        <a:schemeClr val="bg1"/>
+      </p:bgRef>
+    </p:bg>
+    <p:spTree>
+      <p:nvGrpSpPr>
+        <p:cNvPr id="1" name=""/>
+        <p:cNvGrpSpPr/>
+        <p:nvPr/>
+      </p:nvGrpSpPr>
+      <p:grpSpPr>
+        <a:xfrm>
+          <a:off x="0" y="0"/>
+          <a:ext cx="0" cy="0"/>
+          <a:chOff x="0" y="0"/>
+          <a:chExt cx="0" cy="0"/>
+        </a:xfrm>
+      </p:grpSpPr>
+      <p:sp>
+        <p:nvSpPr>
+          <p:cNvPr id="2" name="Header Placeholder 1"/>
+          <p:cNvSpPr>
+            <a:spLocks noGrp="1"/>
+          </p:cNvSpPr>
+          <p:nvPr>
+            <p:ph type="hdr" sz="quarter"/>
+          </p:nvPr>
+        </p:nvSpPr>
+        <p:spPr>
+          <a:xfrm>
+            <a:off x="0" y="0"/>
+            <a:ext cx="3276600" cy="536575"/>
+          </a:xfrm>
+          <a:prstGeom prst="rect">
+            <a:avLst/>
+          </a:prstGeom>
+        </p:spPr>
+        <p:txBody>
+          <a:bodyPr vert="horz" lIns="91440" tIns="45720" rIns="91440" bIns="45720" rtlCol="0"/>
+          <a:lstStyle>
+            <a:lvl1pPr algn="l">
+              <a:defRPr sz="1200"/>
+            </a:lvl1pPr>
+          </a:lstStyle>
+          <a:p>
+            <a:endParaRPr lang="en-IL"/>
+          </a:p>
+        </p:txBody>
+      </p:sp>
+      <p:sp>
+        <p:nvSpPr>
+          <p:cNvPr id="3" name="Date Placeholder 2"/>
+          <p:cNvSpPr>
+            <a:spLocks noGrp="1"/>
+          </p:cNvSpPr>
+          <p:nvPr>
+            <p:ph type="dt" idx="1"/>
+          </p:nvPr>
+        </p:nvSpPr>
+        <p:spPr>
+          <a:xfrm>
+            <a:off x="4281488" y="0"/>
+            <a:ext cx="3276600" cy="536575"/>
+          </a:xfrm>
+          <a:prstGeom prst="rect">
+            <a:avLst/>
+          </a:prstGeom>
+        </p:spPr>
+        <p:txBody>
+          <a:bodyPr vert="horz" lIns="91440" tIns="45720" rIns="91440" bIns="45720" rtlCol="0"/>
+          <a:lstStyle>
+            <a:lvl1pPr algn="r">
+              <a:defRPr sz="1200"/>
+            </a:lvl1pPr>
+          </a:lstStyle>
+          <a:p>
+            <a:fld id="{55C2335D-0E1B-46D8-8611-766E5E2BCE0B}" type="datetimeFigureOut">
+              <a:rPr lang="en-IL" smtClean="0"/>
+              <a:t>28/06/2026</a:t>
+            </a:fld>
+            <a:endParaRPr lang="en-IL"/>
+          </a:p>
+        </p:txBody>
+      </p:sp>
+      <p:sp>
+        <p:nvSpPr>
+          <p:cNvPr id="4" name="Slide Image Placeholder 3"/>
+          <p:cNvSpPr>
+            <a:spLocks noGrp="1" noRot="1" noChangeAspect="1"/>
+          </p:cNvSpPr>
+          <p:nvPr>
+            <p:ph type="sldImg" idx="2"/>
+          </p:nvPr>
+        </p:nvSpPr>
+        <p:spPr>
+          <a:xfrm>
+            <a:off x="2533650" y="1336675"/>
+            <a:ext cx="2492375" cy="3608388"/>
+          </a:xfrm>
+          <a:prstGeom prst="rect">
+            <a:avLst/>
+          </a:prstGeom>
+          <a:noFill/>
+          <a:ln w="12700">
+            <a:solidFill>
+              <a:prstClr val="black"/>
+            </a:solidFill>
+          </a:ln>
+        </p:spPr>
+        <p:txBody>
+          <a:bodyPr vert="horz" lIns="91440" tIns="45720" rIns="91440" bIns="45720" rtlCol="0" anchor="ctr"/>
+          <a:lstStyle/>
+          <a:p>
+            <a:endParaRPr lang="en-IL"/>
+          </a:p>
+        </p:txBody>
+      </p:sp>
+      <p:sp>
+        <p:nvSpPr>
+          <p:cNvPr id="5" name="Notes Placeholder 4"/>
+          <p:cNvSpPr>
+            <a:spLocks noGrp="1"/>
+          </p:cNvSpPr>
+          <p:nvPr>
+            <p:ph type="body" sz="quarter" idx="3"/>
+          </p:nvPr>
+        </p:nvSpPr>
+        <p:spPr>
+          <a:xfrm>
+            <a:off x="755650" y="5145088"/>
+            <a:ext cx="6048375" cy="4210050"/>
+          </a:xfrm>
+          <a:prstGeom prst="rect">
+            <a:avLst/>
+          </a:prstGeom>
+        </p:spPr>
+        <p:txBody>
+          <a:bodyPr vert="horz" lIns="91440" tIns="45720" rIns="91440" bIns="45720" rtlCol="0"/>
+          <a:lstStyle/>
+          <a:p>
+            <a:pPr lvl="0"/>
+            <a:r>
+              <a:rPr lang="en-US"/>
+              <a:t>Click to edit Master text styles</a:t>
+            </a:r>
+          </a:p>
+          <a:p>
+            <a:pPr lvl="1"/>
+            <a:r>
+              <a:rPr lang="en-US"/>
+              <a:t>Second level</a:t>
+            </a:r>
+          </a:p>
+          <a:p>
+            <a:pPr lvl="2"/>
+            <a:r>
+              <a:rPr lang="en-US"/>
+              <a:t>Third level</a:t>
+            </a:r>
+          </a:p>
+          <a:p>
+            <a:pPr lvl="3"/>
+            <a:r>
+              <a:rPr lang="en-US"/>
+              <a:t>Fourth level</a:t>
+            </a:r>
+          </a:p>
+          <a:p>
+            <a:pPr lvl="4"/>
+            <a:r>
+              <a:rPr lang="en-US"/>
+              <a:t>Fifth level</a:t>
+            </a:r>
+            <a:endParaRPr lang="en-IL"/>
+          </a:p>
+        </p:txBody>
+      </p:sp>
+      <p:sp>
+        <p:nvSpPr>
+          <p:cNvPr id="6" name="Footer Placeholder 5"/>
+          <p:cNvSpPr>
+            <a:spLocks noGrp="1"/>
+          </p:cNvSpPr>
+          <p:nvPr>
+            <p:ph type="ftr" sz="quarter" idx="4"/>
+          </p:nvPr>
+        </p:nvSpPr>
+        <p:spPr>
+          <a:xfrm>
+            <a:off x="0" y="10155238"/>
+            <a:ext cx="3276600" cy="536575"/>
+          </a:xfrm>
+          <a:prstGeom prst="rect">
+            <a:avLst/>
+          </a:prstGeom>
+        </p:spPr>
+        <p:txBody>
+          <a:bodyPr vert="horz" lIns="91440" tIns="45720" rIns="91440" bIns="45720" rtlCol="0" anchor="b"/>
+          <a:lstStyle>
+            <a:lvl1pPr algn="l">
+              <a:defRPr sz="1200"/>
+            </a:lvl1pPr>
+          </a:lstStyle>
+          <a:p>
+            <a:endParaRPr lang="en-IL"/>
+          </a:p>
+        </p:txBody>
+      </p:sp>
+      <p:sp>
+        <p:nvSpPr>
+          <p:cNvPr id="7" name="Slide Number Placeholder 6"/>
+          <p:cNvSpPr>
+            <a:spLocks noGrp="1"/>
+          </p:cNvSpPr>
+          <p:nvPr>
+            <p:ph type="sldNum" sz="quarter" idx="5"/>
+          </p:nvPr>
+        </p:nvSpPr>
+        <p:spPr>
+          <a:xfrm>
+            <a:off x="4281488" y="10155238"/>
+            <a:ext cx="3276600" cy="536575"/>
+          </a:xfrm>
+          <a:prstGeom prst="rect">
+            <a:avLst/>
+          </a:prstGeom>
+        </p:spPr>
+        <p:txBody>
+          <a:bodyPr vert="horz" lIns="91440" tIns="45720" rIns="91440" bIns="45720" rtlCol="0" anchor="b"/>
+          <a:lstStyle>
+            <a:lvl1pPr algn="r">
+              <a:defRPr sz="1200"/>
+            </a:lvl1pPr>
+          </a:lstStyle>
+          <a:p>
+            <a:fld id="{D798D93F-4017-4274-B2E0-6C4749686F61}" type="slidenum">
+              <a:rPr lang="en-IL" smtClean="0"/>
+              <a:t>‹#›</a:t>
+            </a:fld>
+            <a:endParaRPr lang="en-IL"/>
+          </a:p>
+        </p:txBody>
+      </p:sp>
+    </p:spTree>
+    <p:extLst>
+      <p:ext uri="{BB962C8B-B14F-4D97-AF65-F5344CB8AC3E}">
+        <p14:creationId xmlns:p14="http://schemas.microsoft.com/office/powerpoint/2010/main" val="1204598592"/>
+      </p:ext>
+    </p:extLst>
+  </p:cSld>
+  <p:clrMap bg1="lt1" tx1="dk1" bg2="lt2" tx2="dk2" accent1="accent1" accent2="accent2" accent3="accent3" accent4="accent4" accent5="accent5" accent6="accent6" hlink="hlink" folHlink="folHlink"/>
+  <p:notesStyle>
+    <a:lvl1pPr marL="0" algn="l" defTabSz="914400" rtl="0" eaLnBrk="1" latinLnBrk="0" hangingPunct="1">
+      <a:defRPr sz="1200" kern="1200">
+        <a:solidFill>
+          <a:schemeClr val="tx1"/>
+        </a:solidFill>
+        <a:latin typeface="+mn-lt"/>
+        <a:ea typeface="+mn-ea"/>
+        <a:cs typeface="+mn-cs"/>
+      </a:defRPr>
+    </a:lvl1pPr>
+    <a:lvl2pPr marL="457200" algn="l" defTabSz="914400" rtl="0" eaLnBrk="1" latinLnBrk="0" hangingPunct="1">
+      <a:defRPr sz="1200" kern="1200">
+        <a:solidFill>
+          <a:schemeClr val="tx1"/>
+        </a:solidFill>
+        <a:latin typeface="+mn-lt"/>
+        <a:ea typeface="+mn-ea"/>
+        <a:cs typeface="+mn-cs"/>
+      </a:defRPr>
+    </a:lvl2pPr>
+    <a:lvl3pPr marL="914400" algn="l" defTabSz="914400" rtl="0" eaLnBrk="1" latinLnBrk="0" hangingPunct="1">
+      <a:defRPr sz="1200" kern="1200">
+        <a:solidFill>
+          <a:schemeClr val="tx1"/>
+        </a:solidFill>
+        <a:latin typeface="+mn-lt"/>
+        <a:ea typeface="+mn-ea"/>
+        <a:cs typeface="+mn-cs"/>
+      </a:defRPr>
+    </a:lvl3pPr>
+    <a:lvl4pPr marL="1371600" algn="l" defTabSz="914400" rtl="0" eaLnBrk="1" latinLnBrk="0" hangingPunct="1">
+      <a:defRPr sz="1200" kern="1200">
+        <a:solidFill>
+          <a:schemeClr val="tx1"/>
+        </a:solidFill>
+        <a:latin typeface="+mn-lt"/>
+        <a:ea typeface="+mn-ea"/>
+        <a:cs typeface="+mn-cs"/>
+      </a:defRPr>
+    </a:lvl4pPr>
+    <a:lvl5pPr marL="1828800" algn="l" defTabSz="914400" rtl="0" eaLnBrk="1" latinLnBrk="0" hangingPunct="1">
+      <a:defRPr sz="1200" kern="1200">
+        <a:solidFill>
+          <a:schemeClr val="tx1"/>
+        </a:solidFill>
+        <a:latin typeface="+mn-lt"/>
+        <a:ea typeface="+mn-ea"/>
+        <a:cs typeface="+mn-cs"/>
+      </a:defRPr>
+    </a:lvl5pPr>
+    <a:lvl6pPr marL="2286000" algn="l" defTabSz="914400" rtl="0" eaLnBrk="1" latinLnBrk="0" hangingPunct="1">
+      <a:defRPr sz="1200" kern="1200">
+        <a:solidFill>
+          <a:schemeClr val="tx1"/>
+        </a:solidFill>
+        <a:latin typeface="+mn-lt"/>
+        <a:ea typeface="+mn-ea"/>
+        <a:cs typeface="+mn-cs"/>
+      </a:defRPr>
+    </a:lvl6pPr>
+    <a:lvl7pPr marL="2743200" algn="l" defTabSz="914400" rtl="0" eaLnBrk="1" latinLnBrk="0" hangingPunct="1">
+      <a:defRPr sz="1200" kern="1200">
+        <a:solidFill>
+          <a:schemeClr val="tx1"/>
+        </a:solidFill>
+        <a:latin typeface="+mn-lt"/>
+        <a:ea typeface="+mn-ea"/>
+        <a:cs typeface="+mn-cs"/>
+      </a:defRPr>
+    </a:lvl7pPr>
+    <a:lvl8pPr marL="3200400" algn="l" defTabSz="914400" rtl="0" eaLnBrk="1" latinLnBrk="0" hangingPunct="1">
+      <a:defRPr sz="1200" kern="1200">
+        <a:solidFill>
+          <a:schemeClr val="tx1"/>
+        </a:solidFill>
+        <a:latin typeface="+mn-lt"/>
+        <a:ea typeface="+mn-ea"/>
+        <a:cs typeface="+mn-cs"/>
+      </a:defRPr>
+    </a:lvl8pPr>
+    <a:lvl9pPr marL="3657600" algn="l" defTabSz="914400" rtl="0" eaLnBrk="1" latinLnBrk="0" hangingPunct="1">
+      <a:defRPr sz="1200" kern="1200">
+        <a:solidFill>
+          <a:schemeClr val="tx1"/>
+        </a:solidFill>
+        <a:latin typeface="+mn-lt"/>
+        <a:ea typeface="+mn-ea"/>
+        <a:cs typeface="+mn-cs"/>
+      </a:defRPr>
+    </a:lvl9pPr>
+  </p:notesStyle>
+</p:notesMaster>
+</file>
+
+<file path=ppt/notesSlides/notesSlide1.xml><?xml version="1.0" encoding="utf-8"?>
+<p:notes xmlns:a="http://schemas.openxmlformats.org/drawingml/2006/main" xmlns:r="http://schemas.openxmlformats.org/officeDocument/2006/relationships" xmlns:p="http://schemas.openxmlformats.org/presentationml/2006/main">
+  <p:cSld>
+    <p:spTree>
+      <p:nvGrpSpPr>
+        <p:cNvPr id="1" name=""/>
+        <p:cNvGrpSpPr/>
+        <p:nvPr/>
+      </p:nvGrpSpPr>
+      <p:grpSpPr>
+        <a:xfrm>
+          <a:off x="0" y="0"/>
+          <a:ext cx="0" cy="0"/>
+          <a:chOff x="0" y="0"/>
+          <a:chExt cx="0" cy="0"/>
+        </a:xfrm>
+      </p:grpSpPr>
+      <p:sp>
+        <p:nvSpPr>
+          <p:cNvPr id="2" name="Slide Image Placeholder 1"/>
+          <p:cNvSpPr>
+            <a:spLocks noGrp="1" noRot="1" noChangeAspect="1"/>
+          </p:cNvSpPr>
+          <p:nvPr>
+            <p:ph type="sldImg"/>
+          </p:nvPr>
+        </p:nvSpPr>
+        <p:spPr/>
+      </p:sp>
+      <p:sp>
+        <p:nvSpPr>
+          <p:cNvPr id="3" name="Notes Placeholder 2"/>
+          <p:cNvSpPr>
+            <a:spLocks noGrp="1"/>
+          </p:cNvSpPr>
+          <p:nvPr>
+            <p:ph type="body" idx="1"/>
+          </p:nvPr>
+        </p:nvSpPr>
+        <p:spPr/>
+        <p:txBody>
+          <a:bodyPr/>
+          <a:lstStyle/>
+          <a:p>
+            <a:pPr marL="0" marR="0" lvl="0" indent="0" algn="l" defTabSz="914400" rtl="0" eaLnBrk="1" fontAlgn="auto" latinLnBrk="0" hangingPunct="1">
+              <a:lnSpc>
+                <a:spcPct val="100000"/>
+              </a:lnSpc>
+              <a:spcBef>
+                <a:spcPts val="0"/>
+              </a:spcBef>
+              <a:spcAft>
+                <a:spcPts val="0"/>
+              </a:spcAft>
+              <a:buClrTx/>
+              <a:buSzTx/>
+              <a:buFontTx/>
+              <a:buNone/>
+              <a:tabLst/>
+              <a:defRPr/>
+            </a:pPr>
+            <a:r>
+              <a:rPr lang="en" sz="1200" b="0" strike="noStrike" spc="-1" dirty="0">
+                <a:solidFill>
+                  <a:srgbClr val="333333"/>
+                </a:solidFill>
+                <a:latin typeface="Segoe UI"/>
+              </a:rPr>
+              <a:t>tagline - Short teaser describing main advantage or function of your project. SHORT - UP TO 6 WORDS MAX. For example - "delivers the drink right to you!" , "learn programming basics without a computer" , "control your air conditioner remotely" , etc. </a:t>
+            </a:r>
+            <a:endParaRPr lang="en" sz="1200" b="0" strike="noStrike" spc="-1" dirty="0">
+              <a:latin typeface="Arial"/>
+            </a:endParaRPr>
+          </a:p>
+        </p:txBody>
+      </p:sp>
+      <p:sp>
+        <p:nvSpPr>
+          <p:cNvPr id="4" name="Slide Number Placeholder 3"/>
+          <p:cNvSpPr>
+            <a:spLocks noGrp="1"/>
+          </p:cNvSpPr>
+          <p:nvPr>
+            <p:ph type="sldNum" sz="quarter" idx="5"/>
+          </p:nvPr>
+        </p:nvSpPr>
+        <p:spPr/>
+        <p:txBody>
+          <a:bodyPr/>
+          <a:lstStyle/>
+          <a:p>
+            <a:fld id="{D798D93F-4017-4274-B2E0-6C4749686F61}" type="slidenum">
+              <a:rPr lang="en-IL" smtClean="0"/>
+              <a:t>1</a:t>
+            </a:fld>
+            <a:endParaRPr lang="en-IL"/>
+          </a:p>
+        </p:txBody>
+      </p:sp>
+    </p:spTree>
+    <p:extLst>
+      <p:ext uri="{BB962C8B-B14F-4D97-AF65-F5344CB8AC3E}">
+        <p14:creationId xmlns:p14="http://schemas.microsoft.com/office/powerpoint/2010/main" val="4007210600"/>
+      </p:ext>
+    </p:extLst>
+  </p:cSld>
+  <p:clrMapOvr>
+    <a:masterClrMapping/>
+  </p:clrMapOvr>
+</p:notes>
+</file>
+
 <file path=ppt/slideLayouts/slideLayout1.xml><?xml version="1.0" encoding="utf-8"?>
-<p:sldLayout xmlns:a="http://schemas.openxmlformats.org/drawingml/2006/main" xmlns:p="http://schemas.openxmlformats.org/presentationml/2006/main" xmlns:r="http://schemas.openxmlformats.org/officeDocument/2006/relationships" xmlns:p14="http://schemas.microsoft.com/office/powerpoint/2010/main" xmlns:p15="http://schemas.microsoft.com/office/powerpoint/2012/main" xmlns:mc="http://schemas.openxmlformats.org/markup-compatibility/2006" type="blank" preserve="1">
+<p:sldLayout xmlns:a="http://schemas.openxmlformats.org/drawingml/2006/main" xmlns:r="http://schemas.openxmlformats.org/officeDocument/2006/relationships" xmlns:p="http://schemas.openxmlformats.org/presentationml/2006/main" type="blank" preserve="1">
   <p:cSld name="Blank Slide">
     <p:spTree>
       <p:nvGrpSpPr>
@@ -31,11 +649,14 @@
       </p:grpSpPr>
     </p:spTree>
   </p:cSld>
+  <p:clrMapOvr>
+    <a:masterClrMapping/>
+  </p:clrMapOvr>
 </p:sldLayout>
 </file>
 
 <file path=ppt/slideLayouts/slideLayout10.xml><?xml version="1.0" encoding="utf-8"?>
-<p:sldLayout xmlns:a="http://schemas.openxmlformats.org/drawingml/2006/main" xmlns:p="http://schemas.openxmlformats.org/presentationml/2006/main" xmlns:r="http://schemas.openxmlformats.org/officeDocument/2006/relationships" xmlns:p14="http://schemas.microsoft.com/office/powerpoint/2010/main" xmlns:p15="http://schemas.microsoft.com/office/powerpoint/2012/main" xmlns:mc="http://schemas.openxmlformats.org/markup-compatibility/2006" type="objOverTx" preserve="1">
+<p:sldLayout xmlns:a="http://schemas.openxmlformats.org/drawingml/2006/main" xmlns:r="http://schemas.openxmlformats.org/officeDocument/2006/relationships" xmlns:p="http://schemas.openxmlformats.org/presentationml/2006/main" type="objOverTx" preserve="1">
   <p:cSld name="Title, Content over Content">
     <p:spTree>
       <p:nvGrpSpPr>
@@ -71,9 +692,10 @@
           </a:prstGeom>
         </p:spPr>
         <p:txBody>
-          <a:bodyPr lIns="0" rIns="0" tIns="0" bIns="0" anchor="ctr"/>
-          <a:p>
-            <a:endParaRPr b="0" lang="he-IL" sz="3110" spc="-1" strike="noStrike">
+          <a:bodyPr lIns="0" tIns="0" rIns="0" bIns="0" anchor="ctr"/>
+          <a:lstStyle/>
+          <a:p>
+            <a:endParaRPr lang="he-IL" sz="3110" b="0" strike="noStrike" spc="-1">
               <a:solidFill>
                 <a:srgbClr val="000000"/>
               </a:solidFill>
@@ -102,11 +724,12 @@
           </a:prstGeom>
         </p:spPr>
         <p:txBody>
-          <a:bodyPr lIns="0" rIns="0" tIns="0" bIns="0">
+          <a:bodyPr lIns="0" tIns="0" rIns="0" bIns="0">
             <a:normAutofit/>
           </a:bodyPr>
-          <a:p>
-            <a:endParaRPr b="0" lang="he-IL" sz="1800" spc="-1" strike="noStrike">
+          <a:lstStyle/>
+          <a:p>
+            <a:endParaRPr lang="he-IL" sz="1800" b="0" strike="noStrike" spc="-1">
               <a:solidFill>
                 <a:srgbClr val="000000"/>
               </a:solidFill>
@@ -135,11 +758,12 @@
           </a:prstGeom>
         </p:spPr>
         <p:txBody>
-          <a:bodyPr lIns="0" rIns="0" tIns="0" bIns="0">
+          <a:bodyPr lIns="0" tIns="0" rIns="0" bIns="0">
             <a:normAutofit/>
           </a:bodyPr>
-          <a:p>
-            <a:endParaRPr b="0" lang="he-IL" sz="1800" spc="-1" strike="noStrike">
+          <a:lstStyle/>
+          <a:p>
+            <a:endParaRPr lang="he-IL" sz="1800" b="0" strike="noStrike" spc="-1">
               <a:solidFill>
                 <a:srgbClr val="000000"/>
               </a:solidFill>
@@ -150,11 +774,14 @@
       </p:sp>
     </p:spTree>
   </p:cSld>
+  <p:clrMapOvr>
+    <a:masterClrMapping/>
+  </p:clrMapOvr>
 </p:sldLayout>
 </file>
 
 <file path=ppt/slideLayouts/slideLayout11.xml><?xml version="1.0" encoding="utf-8"?>
-<p:sldLayout xmlns:a="http://schemas.openxmlformats.org/drawingml/2006/main" xmlns:p="http://schemas.openxmlformats.org/presentationml/2006/main" xmlns:r="http://schemas.openxmlformats.org/officeDocument/2006/relationships" xmlns:p14="http://schemas.microsoft.com/office/powerpoint/2010/main" xmlns:p15="http://schemas.microsoft.com/office/powerpoint/2012/main" xmlns:mc="http://schemas.openxmlformats.org/markup-compatibility/2006" type="fourObj" preserve="1">
+<p:sldLayout xmlns:a="http://schemas.openxmlformats.org/drawingml/2006/main" xmlns:r="http://schemas.openxmlformats.org/officeDocument/2006/relationships" xmlns:p="http://schemas.openxmlformats.org/presentationml/2006/main" type="fourObj" preserve="1">
   <p:cSld name="Title, 4 Content">
     <p:spTree>
       <p:nvGrpSpPr>
@@ -190,9 +817,10 @@
           </a:prstGeom>
         </p:spPr>
         <p:txBody>
-          <a:bodyPr lIns="0" rIns="0" tIns="0" bIns="0" anchor="ctr"/>
-          <a:p>
-            <a:endParaRPr b="0" lang="he-IL" sz="3110" spc="-1" strike="noStrike">
+          <a:bodyPr lIns="0" tIns="0" rIns="0" bIns="0" anchor="ctr"/>
+          <a:lstStyle/>
+          <a:p>
+            <a:endParaRPr lang="he-IL" sz="3110" b="0" strike="noStrike" spc="-1">
               <a:solidFill>
                 <a:srgbClr val="000000"/>
               </a:solidFill>
@@ -221,11 +849,12 @@
           </a:prstGeom>
         </p:spPr>
         <p:txBody>
-          <a:bodyPr lIns="0" rIns="0" tIns="0" bIns="0">
+          <a:bodyPr lIns="0" tIns="0" rIns="0" bIns="0">
             <a:normAutofit/>
           </a:bodyPr>
-          <a:p>
-            <a:endParaRPr b="0" lang="he-IL" sz="1800" spc="-1" strike="noStrike">
+          <a:lstStyle/>
+          <a:p>
+            <a:endParaRPr lang="he-IL" sz="1800" b="0" strike="noStrike" spc="-1">
               <a:solidFill>
                 <a:srgbClr val="000000"/>
               </a:solidFill>
@@ -254,11 +883,12 @@
           </a:prstGeom>
         </p:spPr>
         <p:txBody>
-          <a:bodyPr lIns="0" rIns="0" tIns="0" bIns="0">
+          <a:bodyPr lIns="0" tIns="0" rIns="0" bIns="0">
             <a:normAutofit/>
           </a:bodyPr>
-          <a:p>
-            <a:endParaRPr b="0" lang="he-IL" sz="1800" spc="-1" strike="noStrike">
+          <a:lstStyle/>
+          <a:p>
+            <a:endParaRPr lang="he-IL" sz="1800" b="0" strike="noStrike" spc="-1">
               <a:solidFill>
                 <a:srgbClr val="000000"/>
               </a:solidFill>
@@ -287,11 +917,12 @@
           </a:prstGeom>
         </p:spPr>
         <p:txBody>
-          <a:bodyPr lIns="0" rIns="0" tIns="0" bIns="0">
+          <a:bodyPr lIns="0" tIns="0" rIns="0" bIns="0">
             <a:normAutofit/>
           </a:bodyPr>
-          <a:p>
-            <a:endParaRPr b="0" lang="he-IL" sz="1800" spc="-1" strike="noStrike">
+          <a:lstStyle/>
+          <a:p>
+            <a:endParaRPr lang="he-IL" sz="1800" b="0" strike="noStrike" spc="-1">
               <a:solidFill>
                 <a:srgbClr val="000000"/>
               </a:solidFill>
@@ -320,11 +951,12 @@
           </a:prstGeom>
         </p:spPr>
         <p:txBody>
-          <a:bodyPr lIns="0" rIns="0" tIns="0" bIns="0">
+          <a:bodyPr lIns="0" tIns="0" rIns="0" bIns="0">
             <a:normAutofit/>
           </a:bodyPr>
-          <a:p>
-            <a:endParaRPr b="0" lang="he-IL" sz="1800" spc="-1" strike="noStrike">
+          <a:lstStyle/>
+          <a:p>
+            <a:endParaRPr lang="he-IL" sz="1800" b="0" strike="noStrike" spc="-1">
               <a:solidFill>
                 <a:srgbClr val="000000"/>
               </a:solidFill>
@@ -335,11 +967,14 @@
       </p:sp>
     </p:spTree>
   </p:cSld>
+  <p:clrMapOvr>
+    <a:masterClrMapping/>
+  </p:clrMapOvr>
 </p:sldLayout>
 </file>
 
 <file path=ppt/slideLayouts/slideLayout12.xml><?xml version="1.0" encoding="utf-8"?>
-<p:sldLayout xmlns:a="http://schemas.openxmlformats.org/drawingml/2006/main" xmlns:p="http://schemas.openxmlformats.org/presentationml/2006/main" xmlns:r="http://schemas.openxmlformats.org/officeDocument/2006/relationships" xmlns:p14="http://schemas.microsoft.com/office/powerpoint/2010/main" xmlns:p15="http://schemas.microsoft.com/office/powerpoint/2012/main" xmlns:mc="http://schemas.openxmlformats.org/markup-compatibility/2006" type="blank" preserve="1">
+<p:sldLayout xmlns:a="http://schemas.openxmlformats.org/drawingml/2006/main" xmlns:r="http://schemas.openxmlformats.org/officeDocument/2006/relationships" xmlns:p="http://schemas.openxmlformats.org/presentationml/2006/main" type="blank" preserve="1">
   <p:cSld name="Title, 6 Content">
     <p:spTree>
       <p:nvGrpSpPr>
@@ -375,9 +1010,10 @@
           </a:prstGeom>
         </p:spPr>
         <p:txBody>
-          <a:bodyPr lIns="0" rIns="0" tIns="0" bIns="0" anchor="ctr"/>
-          <a:p>
-            <a:endParaRPr b="0" lang="he-IL" sz="3110" spc="-1" strike="noStrike">
+          <a:bodyPr lIns="0" tIns="0" rIns="0" bIns="0" anchor="ctr"/>
+          <a:lstStyle/>
+          <a:p>
+            <a:endParaRPr lang="he-IL" sz="3110" b="0" strike="noStrike" spc="-1">
               <a:solidFill>
                 <a:srgbClr val="000000"/>
               </a:solidFill>
@@ -406,11 +1042,12 @@
           </a:prstGeom>
         </p:spPr>
         <p:txBody>
-          <a:bodyPr lIns="0" rIns="0" tIns="0" bIns="0">
+          <a:bodyPr lIns="0" tIns="0" rIns="0" bIns="0">
             <a:normAutofit/>
           </a:bodyPr>
-          <a:p>
-            <a:endParaRPr b="0" lang="he-IL" sz="1800" spc="-1" strike="noStrike">
+          <a:lstStyle/>
+          <a:p>
+            <a:endParaRPr lang="he-IL" sz="1800" b="0" strike="noStrike" spc="-1">
               <a:solidFill>
                 <a:srgbClr val="000000"/>
               </a:solidFill>
@@ -439,11 +1076,12 @@
           </a:prstGeom>
         </p:spPr>
         <p:txBody>
-          <a:bodyPr lIns="0" rIns="0" tIns="0" bIns="0">
+          <a:bodyPr lIns="0" tIns="0" rIns="0" bIns="0">
             <a:normAutofit/>
           </a:bodyPr>
-          <a:p>
-            <a:endParaRPr b="0" lang="he-IL" sz="1800" spc="-1" strike="noStrike">
+          <a:lstStyle/>
+          <a:p>
+            <a:endParaRPr lang="he-IL" sz="1800" b="0" strike="noStrike" spc="-1">
               <a:solidFill>
                 <a:srgbClr val="000000"/>
               </a:solidFill>
@@ -472,11 +1110,12 @@
           </a:prstGeom>
         </p:spPr>
         <p:txBody>
-          <a:bodyPr lIns="0" rIns="0" tIns="0" bIns="0">
+          <a:bodyPr lIns="0" tIns="0" rIns="0" bIns="0">
             <a:normAutofit/>
           </a:bodyPr>
-          <a:p>
-            <a:endParaRPr b="0" lang="he-IL" sz="1800" spc="-1" strike="noStrike">
+          <a:lstStyle/>
+          <a:p>
+            <a:endParaRPr lang="he-IL" sz="1800" b="0" strike="noStrike" spc="-1">
               <a:solidFill>
                 <a:srgbClr val="000000"/>
               </a:solidFill>
@@ -505,11 +1144,12 @@
           </a:prstGeom>
         </p:spPr>
         <p:txBody>
-          <a:bodyPr lIns="0" rIns="0" tIns="0" bIns="0">
+          <a:bodyPr lIns="0" tIns="0" rIns="0" bIns="0">
             <a:normAutofit/>
           </a:bodyPr>
-          <a:p>
-            <a:endParaRPr b="0" lang="he-IL" sz="1800" spc="-1" strike="noStrike">
+          <a:lstStyle/>
+          <a:p>
+            <a:endParaRPr lang="he-IL" sz="1800" b="0" strike="noStrike" spc="-1">
               <a:solidFill>
                 <a:srgbClr val="000000"/>
               </a:solidFill>
@@ -538,11 +1178,12 @@
           </a:prstGeom>
         </p:spPr>
         <p:txBody>
-          <a:bodyPr lIns="0" rIns="0" tIns="0" bIns="0">
+          <a:bodyPr lIns="0" tIns="0" rIns="0" bIns="0">
             <a:normAutofit/>
           </a:bodyPr>
-          <a:p>
-            <a:endParaRPr b="0" lang="he-IL" sz="1800" spc="-1" strike="noStrike">
+          <a:lstStyle/>
+          <a:p>
+            <a:endParaRPr lang="he-IL" sz="1800" b="0" strike="noStrike" spc="-1">
               <a:solidFill>
                 <a:srgbClr val="000000"/>
               </a:solidFill>
@@ -571,11 +1212,12 @@
           </a:prstGeom>
         </p:spPr>
         <p:txBody>
-          <a:bodyPr lIns="0" rIns="0" tIns="0" bIns="0">
+          <a:bodyPr lIns="0" tIns="0" rIns="0" bIns="0">
             <a:normAutofit/>
           </a:bodyPr>
-          <a:p>
-            <a:endParaRPr b="0" lang="he-IL" sz="1800" spc="-1" strike="noStrike">
+          <a:lstStyle/>
+          <a:p>
+            <a:endParaRPr lang="he-IL" sz="1800" b="0" strike="noStrike" spc="-1">
               <a:solidFill>
                 <a:srgbClr val="000000"/>
               </a:solidFill>
@@ -586,11 +1228,14 @@
       </p:sp>
     </p:spTree>
   </p:cSld>
+  <p:clrMapOvr>
+    <a:masterClrMapping/>
+  </p:clrMapOvr>
 </p:sldLayout>
 </file>
 
 <file path=ppt/slideLayouts/slideLayout2.xml><?xml version="1.0" encoding="utf-8"?>
-<p:sldLayout xmlns:a="http://schemas.openxmlformats.org/drawingml/2006/main" xmlns:p="http://schemas.openxmlformats.org/presentationml/2006/main" xmlns:r="http://schemas.openxmlformats.org/officeDocument/2006/relationships" xmlns:p14="http://schemas.microsoft.com/office/powerpoint/2010/main" xmlns:p15="http://schemas.microsoft.com/office/powerpoint/2012/main" xmlns:mc="http://schemas.openxmlformats.org/markup-compatibility/2006" type="tx" preserve="1">
+<p:sldLayout xmlns:a="http://schemas.openxmlformats.org/drawingml/2006/main" xmlns:r="http://schemas.openxmlformats.org/officeDocument/2006/relationships" xmlns:p="http://schemas.openxmlformats.org/presentationml/2006/main" type="tx" preserve="1">
   <p:cSld name="Title Slide">
     <p:spTree>
       <p:nvGrpSpPr>
@@ -626,9 +1271,10 @@
           </a:prstGeom>
         </p:spPr>
         <p:txBody>
-          <a:bodyPr lIns="0" rIns="0" tIns="0" bIns="0" anchor="ctr"/>
-          <a:p>
-            <a:endParaRPr b="0" lang="he-IL" sz="3110" spc="-1" strike="noStrike">
+          <a:bodyPr lIns="0" tIns="0" rIns="0" bIns="0" anchor="ctr"/>
+          <a:lstStyle/>
+          <a:p>
+            <a:endParaRPr lang="he-IL" sz="3110" b="0" strike="noStrike" spc="-1">
               <a:solidFill>
                 <a:srgbClr val="000000"/>
               </a:solidFill>
@@ -657,10 +1303,11 @@
           </a:prstGeom>
         </p:spPr>
         <p:txBody>
-          <a:bodyPr lIns="0" rIns="0" tIns="0" bIns="0" anchor="ctr"/>
+          <a:bodyPr lIns="0" tIns="0" rIns="0" bIns="0" anchor="ctr"/>
+          <a:lstStyle/>
           <a:p>
             <a:pPr algn="ctr"/>
-            <a:endParaRPr b="0" lang="en" sz="3200" spc="-1" strike="noStrike">
+            <a:endParaRPr lang="en" sz="3200" b="0" strike="noStrike" spc="-1">
               <a:latin typeface="Arial"/>
             </a:endParaRPr>
           </a:p>
@@ -668,11 +1315,14 @@
       </p:sp>
     </p:spTree>
   </p:cSld>
+  <p:clrMapOvr>
+    <a:masterClrMapping/>
+  </p:clrMapOvr>
 </p:sldLayout>
 </file>
 
 <file path=ppt/slideLayouts/slideLayout3.xml><?xml version="1.0" encoding="utf-8"?>
-<p:sldLayout xmlns:a="http://schemas.openxmlformats.org/drawingml/2006/main" xmlns:p="http://schemas.openxmlformats.org/presentationml/2006/main" xmlns:r="http://schemas.openxmlformats.org/officeDocument/2006/relationships" xmlns:p14="http://schemas.microsoft.com/office/powerpoint/2010/main" xmlns:p15="http://schemas.microsoft.com/office/powerpoint/2012/main" xmlns:mc="http://schemas.openxmlformats.org/markup-compatibility/2006" type="obj" preserve="1">
+<p:sldLayout xmlns:a="http://schemas.openxmlformats.org/drawingml/2006/main" xmlns:r="http://schemas.openxmlformats.org/officeDocument/2006/relationships" xmlns:p="http://schemas.openxmlformats.org/presentationml/2006/main" type="obj" preserve="1">
   <p:cSld name="Title, Content">
     <p:spTree>
       <p:nvGrpSpPr>
@@ -708,9 +1358,10 @@
           </a:prstGeom>
         </p:spPr>
         <p:txBody>
-          <a:bodyPr lIns="0" rIns="0" tIns="0" bIns="0" anchor="ctr"/>
-          <a:p>
-            <a:endParaRPr b="0" lang="he-IL" sz="3110" spc="-1" strike="noStrike">
+          <a:bodyPr lIns="0" tIns="0" rIns="0" bIns="0" anchor="ctr"/>
+          <a:lstStyle/>
+          <a:p>
+            <a:endParaRPr lang="he-IL" sz="3110" b="0" strike="noStrike" spc="-1">
               <a:solidFill>
                 <a:srgbClr val="000000"/>
               </a:solidFill>
@@ -739,11 +1390,12 @@
           </a:prstGeom>
         </p:spPr>
         <p:txBody>
-          <a:bodyPr lIns="0" rIns="0" tIns="0" bIns="0">
+          <a:bodyPr lIns="0" tIns="0" rIns="0" bIns="0">
             <a:normAutofit/>
           </a:bodyPr>
-          <a:p>
-            <a:endParaRPr b="0" lang="he-IL" sz="1800" spc="-1" strike="noStrike">
+          <a:lstStyle/>
+          <a:p>
+            <a:endParaRPr lang="he-IL" sz="1800" b="0" strike="noStrike" spc="-1">
               <a:solidFill>
                 <a:srgbClr val="000000"/>
               </a:solidFill>
@@ -754,11 +1406,14 @@
       </p:sp>
     </p:spTree>
   </p:cSld>
+  <p:clrMapOvr>
+    <a:masterClrMapping/>
+  </p:clrMapOvr>
 </p:sldLayout>
 </file>
 
 <file path=ppt/slideLayouts/slideLayout4.xml><?xml version="1.0" encoding="utf-8"?>
-<p:sldLayout xmlns:a="http://schemas.openxmlformats.org/drawingml/2006/main" xmlns:p="http://schemas.openxmlformats.org/presentationml/2006/main" xmlns:r="http://schemas.openxmlformats.org/officeDocument/2006/relationships" xmlns:p14="http://schemas.microsoft.com/office/powerpoint/2010/main" xmlns:p15="http://schemas.microsoft.com/office/powerpoint/2012/main" xmlns:mc="http://schemas.openxmlformats.org/markup-compatibility/2006" type="twoObj" preserve="1">
+<p:sldLayout xmlns:a="http://schemas.openxmlformats.org/drawingml/2006/main" xmlns:r="http://schemas.openxmlformats.org/officeDocument/2006/relationships" xmlns:p="http://schemas.openxmlformats.org/presentationml/2006/main" type="twoObj" preserve="1">
   <p:cSld name="Title, 2 Content">
     <p:spTree>
       <p:nvGrpSpPr>
@@ -794,9 +1449,10 @@
           </a:prstGeom>
         </p:spPr>
         <p:txBody>
-          <a:bodyPr lIns="0" rIns="0" tIns="0" bIns="0" anchor="ctr"/>
-          <a:p>
-            <a:endParaRPr b="0" lang="he-IL" sz="3110" spc="-1" strike="noStrike">
+          <a:bodyPr lIns="0" tIns="0" rIns="0" bIns="0" anchor="ctr"/>
+          <a:lstStyle/>
+          <a:p>
+            <a:endParaRPr lang="he-IL" sz="3110" b="0" strike="noStrike" spc="-1">
               <a:solidFill>
                 <a:srgbClr val="000000"/>
               </a:solidFill>
@@ -825,11 +1481,12 @@
           </a:prstGeom>
         </p:spPr>
         <p:txBody>
-          <a:bodyPr lIns="0" rIns="0" tIns="0" bIns="0">
+          <a:bodyPr lIns="0" tIns="0" rIns="0" bIns="0">
             <a:normAutofit/>
           </a:bodyPr>
-          <a:p>
-            <a:endParaRPr b="0" lang="he-IL" sz="1800" spc="-1" strike="noStrike">
+          <a:lstStyle/>
+          <a:p>
+            <a:endParaRPr lang="he-IL" sz="1800" b="0" strike="noStrike" spc="-1">
               <a:solidFill>
                 <a:srgbClr val="000000"/>
               </a:solidFill>
@@ -858,11 +1515,12 @@
           </a:prstGeom>
         </p:spPr>
         <p:txBody>
-          <a:bodyPr lIns="0" rIns="0" tIns="0" bIns="0">
+          <a:bodyPr lIns="0" tIns="0" rIns="0" bIns="0">
             <a:normAutofit/>
           </a:bodyPr>
-          <a:p>
-            <a:endParaRPr b="0" lang="he-IL" sz="1800" spc="-1" strike="noStrike">
+          <a:lstStyle/>
+          <a:p>
+            <a:endParaRPr lang="he-IL" sz="1800" b="0" strike="noStrike" spc="-1">
               <a:solidFill>
                 <a:srgbClr val="000000"/>
               </a:solidFill>
@@ -873,11 +1531,14 @@
       </p:sp>
     </p:spTree>
   </p:cSld>
+  <p:clrMapOvr>
+    <a:masterClrMapping/>
+  </p:clrMapOvr>
 </p:sldLayout>
 </file>
 
 <file path=ppt/slideLayouts/slideLayout5.xml><?xml version="1.0" encoding="utf-8"?>
-<p:sldLayout xmlns:a="http://schemas.openxmlformats.org/drawingml/2006/main" xmlns:p="http://schemas.openxmlformats.org/presentationml/2006/main" xmlns:r="http://schemas.openxmlformats.org/officeDocument/2006/relationships" xmlns:p14="http://schemas.microsoft.com/office/powerpoint/2010/main" xmlns:p15="http://schemas.microsoft.com/office/powerpoint/2012/main" xmlns:mc="http://schemas.openxmlformats.org/markup-compatibility/2006" type="titleOnly" preserve="1">
+<p:sldLayout xmlns:a="http://schemas.openxmlformats.org/drawingml/2006/main" xmlns:r="http://schemas.openxmlformats.org/officeDocument/2006/relationships" xmlns:p="http://schemas.openxmlformats.org/presentationml/2006/main" type="titleOnly" preserve="1">
   <p:cSld name="Title Only">
     <p:spTree>
       <p:nvGrpSpPr>
@@ -913,9 +1574,10 @@
           </a:prstGeom>
         </p:spPr>
         <p:txBody>
-          <a:bodyPr lIns="0" rIns="0" tIns="0" bIns="0" anchor="ctr"/>
-          <a:p>
-            <a:endParaRPr b="0" lang="he-IL" sz="3110" spc="-1" strike="noStrike">
+          <a:bodyPr lIns="0" tIns="0" rIns="0" bIns="0" anchor="ctr"/>
+          <a:lstStyle/>
+          <a:p>
+            <a:endParaRPr lang="he-IL" sz="3110" b="0" strike="noStrike" spc="-1">
               <a:solidFill>
                 <a:srgbClr val="000000"/>
               </a:solidFill>
@@ -926,11 +1588,14 @@
       </p:sp>
     </p:spTree>
   </p:cSld>
+  <p:clrMapOvr>
+    <a:masterClrMapping/>
+  </p:clrMapOvr>
 </p:sldLayout>
 </file>
 
 <file path=ppt/slideLayouts/slideLayout6.xml><?xml version="1.0" encoding="utf-8"?>
-<p:sldLayout xmlns:a="http://schemas.openxmlformats.org/drawingml/2006/main" xmlns:p="http://schemas.openxmlformats.org/presentationml/2006/main" xmlns:r="http://schemas.openxmlformats.org/officeDocument/2006/relationships" xmlns:p14="http://schemas.microsoft.com/office/powerpoint/2010/main" xmlns:p15="http://schemas.microsoft.com/office/powerpoint/2012/main" xmlns:mc="http://schemas.openxmlformats.org/markup-compatibility/2006" type="objOnly" preserve="1">
+<p:sldLayout xmlns:a="http://schemas.openxmlformats.org/drawingml/2006/main" xmlns:r="http://schemas.openxmlformats.org/officeDocument/2006/relationships" xmlns:p="http://schemas.openxmlformats.org/presentationml/2006/main" type="objOnly" preserve="1">
   <p:cSld name="Centered Text">
     <p:spTree>
       <p:nvGrpSpPr>
@@ -966,10 +1631,11 @@
           </a:prstGeom>
         </p:spPr>
         <p:txBody>
-          <a:bodyPr lIns="0" rIns="0" tIns="0" bIns="0" anchor="ctr"/>
+          <a:bodyPr lIns="0" tIns="0" rIns="0" bIns="0" anchor="ctr"/>
+          <a:lstStyle/>
           <a:p>
             <a:pPr algn="ctr"/>
-            <a:endParaRPr b="0" lang="en" sz="3200" spc="-1" strike="noStrike">
+            <a:endParaRPr lang="en" sz="3200" b="0" strike="noStrike" spc="-1">
               <a:latin typeface="Arial"/>
             </a:endParaRPr>
           </a:p>
@@ -977,11 +1643,14 @@
       </p:sp>
     </p:spTree>
   </p:cSld>
+  <p:clrMapOvr>
+    <a:masterClrMapping/>
+  </p:clrMapOvr>
 </p:sldLayout>
 </file>
 
 <file path=ppt/slideLayouts/slideLayout7.xml><?xml version="1.0" encoding="utf-8"?>
-<p:sldLayout xmlns:a="http://schemas.openxmlformats.org/drawingml/2006/main" xmlns:p="http://schemas.openxmlformats.org/presentationml/2006/main" xmlns:r="http://schemas.openxmlformats.org/officeDocument/2006/relationships" xmlns:p14="http://schemas.microsoft.com/office/powerpoint/2010/main" xmlns:p15="http://schemas.microsoft.com/office/powerpoint/2012/main" xmlns:mc="http://schemas.openxmlformats.org/markup-compatibility/2006" type="twoObjAndObj" preserve="1">
+<p:sldLayout xmlns:a="http://schemas.openxmlformats.org/drawingml/2006/main" xmlns:r="http://schemas.openxmlformats.org/officeDocument/2006/relationships" xmlns:p="http://schemas.openxmlformats.org/presentationml/2006/main" type="twoObjAndObj" preserve="1">
   <p:cSld name="Title, 2 Content and Content">
     <p:spTree>
       <p:nvGrpSpPr>
@@ -1017,9 +1686,10 @@
           </a:prstGeom>
         </p:spPr>
         <p:txBody>
-          <a:bodyPr lIns="0" rIns="0" tIns="0" bIns="0" anchor="ctr"/>
-          <a:p>
-            <a:endParaRPr b="0" lang="he-IL" sz="3110" spc="-1" strike="noStrike">
+          <a:bodyPr lIns="0" tIns="0" rIns="0" bIns="0" anchor="ctr"/>
+          <a:lstStyle/>
+          <a:p>
+            <a:endParaRPr lang="he-IL" sz="3110" b="0" strike="noStrike" spc="-1">
               <a:solidFill>
                 <a:srgbClr val="000000"/>
               </a:solidFill>
@@ -1048,11 +1718,12 @@
           </a:prstGeom>
         </p:spPr>
         <p:txBody>
-          <a:bodyPr lIns="0" rIns="0" tIns="0" bIns="0">
+          <a:bodyPr lIns="0" tIns="0" rIns="0" bIns="0">
             <a:normAutofit/>
           </a:bodyPr>
-          <a:p>
-            <a:endParaRPr b="0" lang="he-IL" sz="1800" spc="-1" strike="noStrike">
+          <a:lstStyle/>
+          <a:p>
+            <a:endParaRPr lang="he-IL" sz="1800" b="0" strike="noStrike" spc="-1">
               <a:solidFill>
                 <a:srgbClr val="000000"/>
               </a:solidFill>
@@ -1081,11 +1752,12 @@
           </a:prstGeom>
         </p:spPr>
         <p:txBody>
-          <a:bodyPr lIns="0" rIns="0" tIns="0" bIns="0">
+          <a:bodyPr lIns="0" tIns="0" rIns="0" bIns="0">
             <a:normAutofit/>
           </a:bodyPr>
-          <a:p>
-            <a:endParaRPr b="0" lang="he-IL" sz="1800" spc="-1" strike="noStrike">
+          <a:lstStyle/>
+          <a:p>
+            <a:endParaRPr lang="he-IL" sz="1800" b="0" strike="noStrike" spc="-1">
               <a:solidFill>
                 <a:srgbClr val="000000"/>
               </a:solidFill>
@@ -1114,11 +1786,12 @@
           </a:prstGeom>
         </p:spPr>
         <p:txBody>
-          <a:bodyPr lIns="0" rIns="0" tIns="0" bIns="0">
+          <a:bodyPr lIns="0" tIns="0" rIns="0" bIns="0">
             <a:normAutofit/>
           </a:bodyPr>
-          <a:p>
-            <a:endParaRPr b="0" lang="he-IL" sz="1800" spc="-1" strike="noStrike">
+          <a:lstStyle/>
+          <a:p>
+            <a:endParaRPr lang="he-IL" sz="1800" b="0" strike="noStrike" spc="-1">
               <a:solidFill>
                 <a:srgbClr val="000000"/>
               </a:solidFill>
@@ -1129,11 +1802,14 @@
       </p:sp>
     </p:spTree>
   </p:cSld>
+  <p:clrMapOvr>
+    <a:masterClrMapping/>
+  </p:clrMapOvr>
 </p:sldLayout>
 </file>
 
 <file path=ppt/slideLayouts/slideLayout8.xml><?xml version="1.0" encoding="utf-8"?>
-<p:sldLayout xmlns:a="http://schemas.openxmlformats.org/drawingml/2006/main" xmlns:p="http://schemas.openxmlformats.org/presentationml/2006/main" xmlns:r="http://schemas.openxmlformats.org/officeDocument/2006/relationships" xmlns:p14="http://schemas.microsoft.com/office/powerpoint/2010/main" xmlns:p15="http://schemas.microsoft.com/office/powerpoint/2012/main" xmlns:mc="http://schemas.openxmlformats.org/markup-compatibility/2006" type="objAndTwoObj" preserve="1">
+<p:sldLayout xmlns:a="http://schemas.openxmlformats.org/drawingml/2006/main" xmlns:r="http://schemas.openxmlformats.org/officeDocument/2006/relationships" xmlns:p="http://schemas.openxmlformats.org/presentationml/2006/main" type="objAndTwoObj" preserve="1">
   <p:cSld name="Title Content and 2 Content">
     <p:spTree>
       <p:nvGrpSpPr>
@@ -1169,9 +1845,10 @@
           </a:prstGeom>
         </p:spPr>
         <p:txBody>
-          <a:bodyPr lIns="0" rIns="0" tIns="0" bIns="0" anchor="ctr"/>
-          <a:p>
-            <a:endParaRPr b="0" lang="he-IL" sz="3110" spc="-1" strike="noStrike">
+          <a:bodyPr lIns="0" tIns="0" rIns="0" bIns="0" anchor="ctr"/>
+          <a:lstStyle/>
+          <a:p>
+            <a:endParaRPr lang="he-IL" sz="3110" b="0" strike="noStrike" spc="-1">
               <a:solidFill>
                 <a:srgbClr val="000000"/>
               </a:solidFill>
@@ -1200,11 +1877,12 @@
           </a:prstGeom>
         </p:spPr>
         <p:txBody>
-          <a:bodyPr lIns="0" rIns="0" tIns="0" bIns="0">
+          <a:bodyPr lIns="0" tIns="0" rIns="0" bIns="0">
             <a:normAutofit/>
           </a:bodyPr>
-          <a:p>
-            <a:endParaRPr b="0" lang="he-IL" sz="1800" spc="-1" strike="noStrike">
+          <a:lstStyle/>
+          <a:p>
+            <a:endParaRPr lang="he-IL" sz="1800" b="0" strike="noStrike" spc="-1">
               <a:solidFill>
                 <a:srgbClr val="000000"/>
               </a:solidFill>
@@ -1233,11 +1911,12 @@
           </a:prstGeom>
         </p:spPr>
         <p:txBody>
-          <a:bodyPr lIns="0" rIns="0" tIns="0" bIns="0">
+          <a:bodyPr lIns="0" tIns="0" rIns="0" bIns="0">
             <a:normAutofit/>
           </a:bodyPr>
-          <a:p>
-            <a:endParaRPr b="0" lang="he-IL" sz="1800" spc="-1" strike="noStrike">
+          <a:lstStyle/>
+          <a:p>
+            <a:endParaRPr lang="he-IL" sz="1800" b="0" strike="noStrike" spc="-1">
               <a:solidFill>
                 <a:srgbClr val="000000"/>
               </a:solidFill>
@@ -1266,11 +1945,12 @@
           </a:prstGeom>
         </p:spPr>
         <p:txBody>
-          <a:bodyPr lIns="0" rIns="0" tIns="0" bIns="0">
+          <a:bodyPr lIns="0" tIns="0" rIns="0" bIns="0">
             <a:normAutofit/>
           </a:bodyPr>
-          <a:p>
-            <a:endParaRPr b="0" lang="he-IL" sz="1800" spc="-1" strike="noStrike">
+          <a:lstStyle/>
+          <a:p>
+            <a:endParaRPr lang="he-IL" sz="1800" b="0" strike="noStrike" spc="-1">
               <a:solidFill>
                 <a:srgbClr val="000000"/>
               </a:solidFill>
@@ -1281,11 +1961,14 @@
       </p:sp>
     </p:spTree>
   </p:cSld>
+  <p:clrMapOvr>
+    <a:masterClrMapping/>
+  </p:clrMapOvr>
 </p:sldLayout>
 </file>
 
 <file path=ppt/slideLayouts/slideLayout9.xml><?xml version="1.0" encoding="utf-8"?>
-<p:sldLayout xmlns:a="http://schemas.openxmlformats.org/drawingml/2006/main" xmlns:p="http://schemas.openxmlformats.org/presentationml/2006/main" xmlns:r="http://schemas.openxmlformats.org/officeDocument/2006/relationships" xmlns:p14="http://schemas.microsoft.com/office/powerpoint/2010/main" xmlns:p15="http://schemas.microsoft.com/office/powerpoint/2012/main" xmlns:mc="http://schemas.openxmlformats.org/markup-compatibility/2006" type="twoObjOverTx" preserve="1">
+<p:sldLayout xmlns:a="http://schemas.openxmlformats.org/drawingml/2006/main" xmlns:r="http://schemas.openxmlformats.org/officeDocument/2006/relationships" xmlns:p="http://schemas.openxmlformats.org/presentationml/2006/main" type="twoObjOverTx" preserve="1">
   <p:cSld name="Title, 2 Content over Content">
     <p:spTree>
       <p:nvGrpSpPr>
@@ -1321,9 +2004,10 @@
           </a:prstGeom>
         </p:spPr>
         <p:txBody>
-          <a:bodyPr lIns="0" rIns="0" tIns="0" bIns="0" anchor="ctr"/>
-          <a:p>
-            <a:endParaRPr b="0" lang="he-IL" sz="3110" spc="-1" strike="noStrike">
+          <a:bodyPr lIns="0" tIns="0" rIns="0" bIns="0" anchor="ctr"/>
+          <a:lstStyle/>
+          <a:p>
+            <a:endParaRPr lang="he-IL" sz="3110" b="0" strike="noStrike" spc="-1">
               <a:solidFill>
                 <a:srgbClr val="000000"/>
               </a:solidFill>
@@ -1352,11 +2036,12 @@
           </a:prstGeom>
         </p:spPr>
         <p:txBody>
-          <a:bodyPr lIns="0" rIns="0" tIns="0" bIns="0">
+          <a:bodyPr lIns="0" tIns="0" rIns="0" bIns="0">
             <a:normAutofit/>
           </a:bodyPr>
-          <a:p>
-            <a:endParaRPr b="0" lang="he-IL" sz="1800" spc="-1" strike="noStrike">
+          <a:lstStyle/>
+          <a:p>
+            <a:endParaRPr lang="he-IL" sz="1800" b="0" strike="noStrike" spc="-1">
               <a:solidFill>
                 <a:srgbClr val="000000"/>
               </a:solidFill>
@@ -1385,11 +2070,12 @@
           </a:prstGeom>
         </p:spPr>
         <p:txBody>
-          <a:bodyPr lIns="0" rIns="0" tIns="0" bIns="0">
+          <a:bodyPr lIns="0" tIns="0" rIns="0" bIns="0">
             <a:normAutofit/>
           </a:bodyPr>
-          <a:p>
-            <a:endParaRPr b="0" lang="he-IL" sz="1800" spc="-1" strike="noStrike">
+          <a:lstStyle/>
+          <a:p>
+            <a:endParaRPr lang="he-IL" sz="1800" b="0" strike="noStrike" spc="-1">
               <a:solidFill>
                 <a:srgbClr val="000000"/>
               </a:solidFill>
@@ -1418,11 +2104,12 @@
           </a:prstGeom>
         </p:spPr>
         <p:txBody>
-          <a:bodyPr lIns="0" rIns="0" tIns="0" bIns="0">
+          <a:bodyPr lIns="0" tIns="0" rIns="0" bIns="0">
             <a:normAutofit/>
           </a:bodyPr>
-          <a:p>
-            <a:endParaRPr b="0" lang="he-IL" sz="1800" spc="-1" strike="noStrike">
+          <a:lstStyle/>
+          <a:p>
+            <a:endParaRPr lang="he-IL" sz="1800" b="0" strike="noStrike" spc="-1">
               <a:solidFill>
                 <a:srgbClr val="000000"/>
               </a:solidFill>
@@ -1433,17 +2120,21 @@
       </p:sp>
     </p:spTree>
   </p:cSld>
+  <p:clrMapOvr>
+    <a:masterClrMapping/>
+  </p:clrMapOvr>
 </p:sldLayout>
 </file>
 
 <file path=ppt/slideMasters/slideMaster1.xml><?xml version="1.0" encoding="utf-8"?>
-<p:sldMaster xmlns:a="http://schemas.openxmlformats.org/drawingml/2006/main" xmlns:p="http://schemas.openxmlformats.org/presentationml/2006/main" xmlns:r="http://schemas.openxmlformats.org/officeDocument/2006/relationships" xmlns:p14="http://schemas.microsoft.com/office/powerpoint/2010/main" xmlns:p15="http://schemas.microsoft.com/office/powerpoint/2012/main" xmlns:mc="http://schemas.openxmlformats.org/markup-compatibility/2006">
+<p:sldMaster xmlns:a="http://schemas.openxmlformats.org/drawingml/2006/main" xmlns:r="http://schemas.openxmlformats.org/officeDocument/2006/relationships" xmlns:p="http://schemas.openxmlformats.org/presentationml/2006/main">
   <p:cSld>
     <p:bg>
       <p:bgPr>
         <a:solidFill>
-          <a:srgbClr val="ffffff"/>
+          <a:srgbClr val="FFFFFF"/>
         </a:solidFill>
+        <a:effectLst/>
       </p:bgPr>
     </p:bg>
     <p:spTree>
@@ -1462,7 +2153,7 @@
       </p:grpSpPr>
       <p:sp>
         <p:nvSpPr>
-          <p:cNvPr id="0" name="CustomShape 1"/>
+          <p:cNvPr id="68" name="CustomShape 1"/>
           <p:cNvSpPr/>
           <p:nvPr/>
         </p:nvSpPr>
@@ -1475,6 +2166,7 @@
             <a:avLst/>
             <a:gdLst/>
             <a:ahLst/>
+            <a:cxnLst/>
             <a:rect l="l" t="t" r="r" b="b"/>
             <a:pathLst>
               <a:path w="9716769" h="14052550">
@@ -1495,7 +2187,7 @@
             </a:pathLst>
           </a:custGeom>
           <a:solidFill>
-            <a:srgbClr val="70ccd7">
+            <a:srgbClr val="70CCD7">
               <a:alpha val="20000"/>
             </a:srgbClr>
           </a:solidFill>
@@ -1504,15 +2196,28 @@
           </a:ln>
         </p:spPr>
         <p:style>
-          <a:lnRef idx="0"/>
-          <a:fillRef idx="0"/>
-          <a:effectRef idx="0"/>
+          <a:lnRef idx="0">
+            <a:scrgbClr r="0" g="0" b="0"/>
+          </a:lnRef>
+          <a:fillRef idx="0">
+            <a:scrgbClr r="0" g="0" b="0"/>
+          </a:fillRef>
+          <a:effectRef idx="0">
+            <a:scrgbClr r="0" g="0" b="0"/>
+          </a:effectRef>
           <a:fontRef idx="minor"/>
         </p:style>
-      </p:sp>
-      <p:sp>
-        <p:nvSpPr>
-          <p:cNvPr id="1" name="CustomShape 2"/>
+        <p:txBody>
+          <a:bodyPr/>
+          <a:lstStyle/>
+          <a:p>
+            <a:endParaRPr lang="en-IL"/>
+          </a:p>
+        </p:txBody>
+      </p:sp>
+      <p:sp>
+        <p:nvSpPr>
+          <p:cNvPr id="69" name="CustomShape 2"/>
           <p:cNvSpPr/>
           <p:nvPr/>
         </p:nvSpPr>
@@ -1525,6 +2230,7 @@
             <a:avLst/>
             <a:gdLst/>
             <a:ahLst/>
+            <a:cxnLst/>
             <a:rect l="l" t="t" r="r" b="b"/>
             <a:pathLst>
               <a:path w="9921875" h="14032865">
@@ -1545,7 +2251,7 @@
             </a:pathLst>
           </a:custGeom>
           <a:solidFill>
-            <a:srgbClr val="f3ed63">
+            <a:srgbClr val="F3ED63">
               <a:alpha val="20000"/>
             </a:srgbClr>
           </a:solidFill>
@@ -1554,11 +2260,24 @@
           </a:ln>
         </p:spPr>
         <p:style>
-          <a:lnRef idx="0"/>
-          <a:fillRef idx="0"/>
-          <a:effectRef idx="0"/>
+          <a:lnRef idx="0">
+            <a:scrgbClr r="0" g="0" b="0"/>
+          </a:lnRef>
+          <a:fillRef idx="0">
+            <a:scrgbClr r="0" g="0" b="0"/>
+          </a:fillRef>
+          <a:effectRef idx="0">
+            <a:scrgbClr r="0" g="0" b="0"/>
+          </a:effectRef>
           <a:fontRef idx="minor"/>
         </p:style>
+        <p:txBody>
+          <a:bodyPr/>
+          <a:lstStyle/>
+          <a:p>
+            <a:endParaRPr lang="en-IL"/>
+          </a:p>
+        </p:txBody>
       </p:sp>
       <p:sp>
         <p:nvSpPr>
@@ -1575,6 +2294,7 @@
             <a:avLst/>
             <a:gdLst/>
             <a:ahLst/>
+            <a:cxnLst/>
             <a:rect l="l" t="t" r="r" b="b"/>
             <a:pathLst>
               <a:path w="8277225" h="11704955">
@@ -1602,11 +2322,24 @@
           </a:ln>
         </p:spPr>
         <p:style>
-          <a:lnRef idx="0"/>
-          <a:fillRef idx="0"/>
-          <a:effectRef idx="0"/>
+          <a:lnRef idx="0">
+            <a:scrgbClr r="0" g="0" b="0"/>
+          </a:lnRef>
+          <a:fillRef idx="0">
+            <a:scrgbClr r="0" g="0" b="0"/>
+          </a:fillRef>
+          <a:effectRef idx="0">
+            <a:scrgbClr r="0" g="0" b="0"/>
+          </a:effectRef>
           <a:fontRef idx="minor"/>
         </p:style>
+        <p:txBody>
+          <a:bodyPr/>
+          <a:lstStyle/>
+          <a:p>
+            <a:endParaRPr lang="en-IL"/>
+          </a:p>
+        </p:txBody>
       </p:sp>
       <p:sp>
         <p:nvSpPr>
@@ -1623,6 +2356,7 @@
             <a:avLst/>
             <a:gdLst/>
             <a:ahLst/>
+            <a:cxnLst/>
             <a:rect l="l" t="t" r="r" b="b"/>
             <a:pathLst>
               <a:path w="909954" h="633730">
@@ -1898,18 +2632,31 @@
             </a:pathLst>
           </a:custGeom>
           <a:solidFill>
-            <a:srgbClr val="231f20"/>
+            <a:srgbClr val="231F20"/>
           </a:solidFill>
           <a:ln>
             <a:noFill/>
           </a:ln>
         </p:spPr>
         <p:style>
-          <a:lnRef idx="0"/>
-          <a:fillRef idx="0"/>
-          <a:effectRef idx="0"/>
+          <a:lnRef idx="0">
+            <a:scrgbClr r="0" g="0" b="0"/>
+          </a:lnRef>
+          <a:fillRef idx="0">
+            <a:scrgbClr r="0" g="0" b="0"/>
+          </a:fillRef>
+          <a:effectRef idx="0">
+            <a:scrgbClr r="0" g="0" b="0"/>
+          </a:effectRef>
           <a:fontRef idx="minor"/>
         </p:style>
+        <p:txBody>
+          <a:bodyPr/>
+          <a:lstStyle/>
+          <a:p>
+            <a:endParaRPr lang="en-IL"/>
+          </a:p>
+        </p:txBody>
       </p:sp>
       <p:sp>
         <p:nvSpPr>
@@ -1926,6 +2673,7 @@
             <a:avLst/>
             <a:gdLst/>
             <a:ahLst/>
+            <a:cxnLst/>
             <a:rect l="l" t="t" r="r" b="b"/>
             <a:pathLst>
               <a:path w="862330" h="877569">
@@ -1982,18 +2730,31 @@
             </a:pathLst>
           </a:custGeom>
           <a:solidFill>
-            <a:srgbClr val="fbfdfb"/>
+            <a:srgbClr val="FBFDFB"/>
           </a:solidFill>
           <a:ln>
             <a:noFill/>
           </a:ln>
         </p:spPr>
         <p:style>
-          <a:lnRef idx="0"/>
-          <a:fillRef idx="0"/>
-          <a:effectRef idx="0"/>
+          <a:lnRef idx="0">
+            <a:scrgbClr r="0" g="0" b="0"/>
+          </a:lnRef>
+          <a:fillRef idx="0">
+            <a:scrgbClr r="0" g="0" b="0"/>
+          </a:fillRef>
+          <a:effectRef idx="0">
+            <a:scrgbClr r="0" g="0" b="0"/>
+          </a:effectRef>
           <a:fontRef idx="minor"/>
         </p:style>
+        <p:txBody>
+          <a:bodyPr/>
+          <a:lstStyle/>
+          <a:p>
+            <a:endParaRPr lang="en-IL"/>
+          </a:p>
+        </p:txBody>
       </p:sp>
       <p:sp>
         <p:nvSpPr>
@@ -2010,6 +2771,7 @@
             <a:avLst/>
             <a:gdLst/>
             <a:ahLst/>
+            <a:cxnLst/>
             <a:rect l="l" t="t" r="r" b="b"/>
             <a:pathLst>
               <a:path w="883285" h="898525">
@@ -2232,18 +2994,31 @@
             </a:pathLst>
           </a:custGeom>
           <a:solidFill>
-            <a:srgbClr val="231f20"/>
+            <a:srgbClr val="231F20"/>
           </a:solidFill>
           <a:ln>
             <a:noFill/>
           </a:ln>
         </p:spPr>
         <p:style>
-          <a:lnRef idx="0"/>
-          <a:fillRef idx="0"/>
-          <a:effectRef idx="0"/>
+          <a:lnRef idx="0">
+            <a:scrgbClr r="0" g="0" b="0"/>
+          </a:lnRef>
+          <a:fillRef idx="0">
+            <a:scrgbClr r="0" g="0" b="0"/>
+          </a:fillRef>
+          <a:effectRef idx="0">
+            <a:scrgbClr r="0" g="0" b="0"/>
+          </a:effectRef>
           <a:fontRef idx="minor"/>
         </p:style>
+        <p:txBody>
+          <a:bodyPr/>
+          <a:lstStyle/>
+          <a:p>
+            <a:endParaRPr lang="en-IL"/>
+          </a:p>
+        </p:txBody>
       </p:sp>
       <p:sp>
         <p:nvSpPr>
@@ -2260,6 +3035,7 @@
             <a:avLst/>
             <a:gdLst/>
             <a:ahLst/>
+            <a:cxnLst/>
             <a:rect l="l" t="t" r="r" b="b"/>
             <a:pathLst>
               <a:path w="560069" h="139064">
@@ -2286,18 +3062,31 @@
             </a:pathLst>
           </a:custGeom>
           <a:solidFill>
-            <a:srgbClr val="fbfdfb"/>
+            <a:srgbClr val="FBFDFB"/>
           </a:solidFill>
           <a:ln>
             <a:noFill/>
           </a:ln>
         </p:spPr>
         <p:style>
-          <a:lnRef idx="0"/>
-          <a:fillRef idx="0"/>
-          <a:effectRef idx="0"/>
+          <a:lnRef idx="0">
+            <a:scrgbClr r="0" g="0" b="0"/>
+          </a:lnRef>
+          <a:fillRef idx="0">
+            <a:scrgbClr r="0" g="0" b="0"/>
+          </a:fillRef>
+          <a:effectRef idx="0">
+            <a:scrgbClr r="0" g="0" b="0"/>
+          </a:effectRef>
           <a:fontRef idx="minor"/>
         </p:style>
+        <p:txBody>
+          <a:bodyPr/>
+          <a:lstStyle/>
+          <a:p>
+            <a:endParaRPr lang="en-IL"/>
+          </a:p>
+        </p:txBody>
       </p:sp>
       <p:sp>
         <p:nvSpPr>
@@ -2314,6 +3103,7 @@
             <a:avLst/>
             <a:gdLst/>
             <a:ahLst/>
+            <a:cxnLst/>
             <a:rect l="l" t="t" r="r" b="b"/>
             <a:pathLst>
               <a:path w="926464" h="102869">
@@ -2416,18 +3206,31 @@
             </a:pathLst>
           </a:custGeom>
           <a:solidFill>
-            <a:srgbClr val="231f20"/>
+            <a:srgbClr val="231F20"/>
           </a:solidFill>
           <a:ln>
             <a:noFill/>
           </a:ln>
         </p:spPr>
         <p:style>
-          <a:lnRef idx="0"/>
-          <a:fillRef idx="0"/>
-          <a:effectRef idx="0"/>
+          <a:lnRef idx="0">
+            <a:scrgbClr r="0" g="0" b="0"/>
+          </a:lnRef>
+          <a:fillRef idx="0">
+            <a:scrgbClr r="0" g="0" b="0"/>
+          </a:fillRef>
+          <a:effectRef idx="0">
+            <a:scrgbClr r="0" g="0" b="0"/>
+          </a:effectRef>
           <a:fontRef idx="minor"/>
         </p:style>
+        <p:txBody>
+          <a:bodyPr/>
+          <a:lstStyle/>
+          <a:p>
+            <a:endParaRPr lang="en-IL"/>
+          </a:p>
+        </p:txBody>
       </p:sp>
       <p:sp>
         <p:nvSpPr>
@@ -2444,6 +3247,7 @@
             <a:avLst/>
             <a:gdLst/>
             <a:ahLst/>
+            <a:cxnLst/>
             <a:rect l="l" t="t" r="r" b="b"/>
             <a:pathLst>
               <a:path w="628650" h="1147445">
@@ -2467,18 +3271,31 @@
             </a:pathLst>
           </a:custGeom>
           <a:solidFill>
-            <a:srgbClr val="ffffff"/>
+            <a:srgbClr val="FFFFFF"/>
           </a:solidFill>
           <a:ln>
             <a:noFill/>
           </a:ln>
         </p:spPr>
         <p:style>
-          <a:lnRef idx="0"/>
-          <a:fillRef idx="0"/>
-          <a:effectRef idx="0"/>
+          <a:lnRef idx="0">
+            <a:scrgbClr r="0" g="0" b="0"/>
+          </a:lnRef>
+          <a:fillRef idx="0">
+            <a:scrgbClr r="0" g="0" b="0"/>
+          </a:fillRef>
+          <a:effectRef idx="0">
+            <a:scrgbClr r="0" g="0" b="0"/>
+          </a:effectRef>
           <a:fontRef idx="minor"/>
         </p:style>
+        <p:txBody>
+          <a:bodyPr/>
+          <a:lstStyle/>
+          <a:p>
+            <a:endParaRPr lang="en-IL"/>
+          </a:p>
+        </p:txBody>
       </p:sp>
       <p:sp>
         <p:nvSpPr>
@@ -2495,6 +3312,7 @@
             <a:avLst/>
             <a:gdLst/>
             <a:ahLst/>
+            <a:cxnLst/>
             <a:rect l="l" t="t" r="r" b="b"/>
             <a:pathLst>
               <a:path w="651510" h="22860">
@@ -2518,18 +3336,31 @@
             </a:pathLst>
           </a:custGeom>
           <a:solidFill>
-            <a:srgbClr val="231f20"/>
+            <a:srgbClr val="231F20"/>
           </a:solidFill>
           <a:ln>
             <a:noFill/>
           </a:ln>
         </p:spPr>
         <p:style>
-          <a:lnRef idx="0"/>
-          <a:fillRef idx="0"/>
-          <a:effectRef idx="0"/>
+          <a:lnRef idx="0">
+            <a:scrgbClr r="0" g="0" b="0"/>
+          </a:lnRef>
+          <a:fillRef idx="0">
+            <a:scrgbClr r="0" g="0" b="0"/>
+          </a:fillRef>
+          <a:effectRef idx="0">
+            <a:scrgbClr r="0" g="0" b="0"/>
+          </a:effectRef>
           <a:fontRef idx="minor"/>
         </p:style>
+        <p:txBody>
+          <a:bodyPr/>
+          <a:lstStyle/>
+          <a:p>
+            <a:endParaRPr lang="en-IL"/>
+          </a:p>
+        </p:txBody>
       </p:sp>
       <p:sp>
         <p:nvSpPr>
@@ -2546,9 +3377,10 @@
             <a:avLst/>
             <a:gdLst/>
             <a:ahLst/>
+            <a:cxnLst/>
             <a:rect l="l" t="t" r="r" b="b"/>
             <a:pathLst>
-              <a:path w="0" h="1123950">
+              <a:path h="1123950">
                 <a:moveTo>
                   <a:pt x="0" y="0"/>
                 </a:moveTo>
@@ -2561,17 +3393,30 @@
           <a:noFill/>
           <a:ln w="22680">
             <a:solidFill>
-              <a:srgbClr val="231f20"/>
+              <a:srgbClr val="231F20"/>
             </a:solidFill>
             <a:round/>
           </a:ln>
         </p:spPr>
         <p:style>
-          <a:lnRef idx="0"/>
-          <a:fillRef idx="0"/>
-          <a:effectRef idx="0"/>
+          <a:lnRef idx="0">
+            <a:scrgbClr r="0" g="0" b="0"/>
+          </a:lnRef>
+          <a:fillRef idx="0">
+            <a:scrgbClr r="0" g="0" b="0"/>
+          </a:fillRef>
+          <a:effectRef idx="0">
+            <a:scrgbClr r="0" g="0" b="0"/>
+          </a:effectRef>
           <a:fontRef idx="minor"/>
         </p:style>
+        <p:txBody>
+          <a:bodyPr/>
+          <a:lstStyle/>
+          <a:p>
+            <a:endParaRPr lang="en-IL"/>
+          </a:p>
+        </p:txBody>
       </p:sp>
       <p:sp>
         <p:nvSpPr>
@@ -2588,6 +3433,7 @@
             <a:avLst/>
             <a:gdLst/>
             <a:ahLst/>
+            <a:cxnLst/>
             <a:rect l="l" t="t" r="r" b="b"/>
             <a:pathLst>
               <a:path w="651510" h="22859">
@@ -2611,18 +3457,31 @@
             </a:pathLst>
           </a:custGeom>
           <a:solidFill>
-            <a:srgbClr val="231f20"/>
+            <a:srgbClr val="231F20"/>
           </a:solidFill>
           <a:ln>
             <a:noFill/>
           </a:ln>
         </p:spPr>
         <p:style>
-          <a:lnRef idx="0"/>
-          <a:fillRef idx="0"/>
-          <a:effectRef idx="0"/>
+          <a:lnRef idx="0">
+            <a:scrgbClr r="0" g="0" b="0"/>
+          </a:lnRef>
+          <a:fillRef idx="0">
+            <a:scrgbClr r="0" g="0" b="0"/>
+          </a:fillRef>
+          <a:effectRef idx="0">
+            <a:scrgbClr r="0" g="0" b="0"/>
+          </a:effectRef>
           <a:fontRef idx="minor"/>
         </p:style>
+        <p:txBody>
+          <a:bodyPr/>
+          <a:lstStyle/>
+          <a:p>
+            <a:endParaRPr lang="en-IL"/>
+          </a:p>
+        </p:txBody>
       </p:sp>
       <p:sp>
         <p:nvSpPr>
@@ -2639,9 +3498,10 @@
             <a:avLst/>
             <a:gdLst/>
             <a:ahLst/>
+            <a:cxnLst/>
             <a:rect l="l" t="t" r="r" b="b"/>
             <a:pathLst>
-              <a:path w="0" h="1124585">
+              <a:path h="1124585">
                 <a:moveTo>
                   <a:pt x="0" y="0"/>
                 </a:moveTo>
@@ -2654,17 +3514,30 @@
           <a:noFill/>
           <a:ln w="22680">
             <a:solidFill>
-              <a:srgbClr val="231f20"/>
+              <a:srgbClr val="231F20"/>
             </a:solidFill>
             <a:round/>
           </a:ln>
         </p:spPr>
         <p:style>
-          <a:lnRef idx="0"/>
-          <a:fillRef idx="0"/>
-          <a:effectRef idx="0"/>
+          <a:lnRef idx="0">
+            <a:scrgbClr r="0" g="0" b="0"/>
+          </a:lnRef>
+          <a:fillRef idx="0">
+            <a:scrgbClr r="0" g="0" b="0"/>
+          </a:fillRef>
+          <a:effectRef idx="0">
+            <a:scrgbClr r="0" g="0" b="0"/>
+          </a:effectRef>
           <a:fontRef idx="minor"/>
         </p:style>
+        <p:txBody>
+          <a:bodyPr/>
+          <a:lstStyle/>
+          <a:p>
+            <a:endParaRPr lang="en-IL"/>
+          </a:p>
+        </p:txBody>
       </p:sp>
       <p:sp>
         <p:nvSpPr>
@@ -2681,9 +3554,10 @@
             <a:avLst/>
             <a:gdLst/>
             <a:ahLst/>
+            <a:cxnLst/>
             <a:rect l="l" t="t" r="r" b="b"/>
             <a:pathLst>
-              <a:path w="628650" h="0">
+              <a:path w="628650">
                 <a:moveTo>
                   <a:pt x="0" y="0"/>
                 </a:moveTo>
@@ -2696,17 +3570,30 @@
           <a:noFill/>
           <a:ln w="22680">
             <a:solidFill>
-              <a:srgbClr val="231f20"/>
+              <a:srgbClr val="231F20"/>
             </a:solidFill>
             <a:round/>
           </a:ln>
         </p:spPr>
         <p:style>
-          <a:lnRef idx="0"/>
-          <a:fillRef idx="0"/>
-          <a:effectRef idx="0"/>
+          <a:lnRef idx="0">
+            <a:scrgbClr r="0" g="0" b="0"/>
+          </a:lnRef>
+          <a:fillRef idx="0">
+            <a:scrgbClr r="0" g="0" b="0"/>
+          </a:fillRef>
+          <a:effectRef idx="0">
+            <a:scrgbClr r="0" g="0" b="0"/>
+          </a:effectRef>
           <a:fontRef idx="minor"/>
         </p:style>
+        <p:txBody>
+          <a:bodyPr/>
+          <a:lstStyle/>
+          <a:p>
+            <a:endParaRPr lang="en-IL"/>
+          </a:p>
+        </p:txBody>
       </p:sp>
       <p:sp>
         <p:nvSpPr>
@@ -2723,9 +3610,10 @@
             <a:avLst/>
             <a:gdLst/>
             <a:ahLst/>
+            <a:cxnLst/>
             <a:rect l="l" t="t" r="r" b="b"/>
             <a:pathLst>
-              <a:path w="628650" h="0">
+              <a:path w="628650">
                 <a:moveTo>
                   <a:pt x="0" y="0"/>
                 </a:moveTo>
@@ -2738,17 +3626,30 @@
           <a:noFill/>
           <a:ln w="22680">
             <a:solidFill>
-              <a:srgbClr val="231f20"/>
+              <a:srgbClr val="231F20"/>
             </a:solidFill>
             <a:round/>
           </a:ln>
         </p:spPr>
         <p:style>
-          <a:lnRef idx="0"/>
-          <a:fillRef idx="0"/>
-          <a:effectRef idx="0"/>
+          <a:lnRef idx="0">
+            <a:scrgbClr r="0" g="0" b="0"/>
+          </a:lnRef>
+          <a:fillRef idx="0">
+            <a:scrgbClr r="0" g="0" b="0"/>
+          </a:fillRef>
+          <a:effectRef idx="0">
+            <a:scrgbClr r="0" g="0" b="0"/>
+          </a:effectRef>
           <a:fontRef idx="minor"/>
         </p:style>
+        <p:txBody>
+          <a:bodyPr/>
+          <a:lstStyle/>
+          <a:p>
+            <a:endParaRPr lang="en-IL"/>
+          </a:p>
+        </p:txBody>
       </p:sp>
       <p:sp>
         <p:nvSpPr>
@@ -2765,9 +3666,10 @@
             <a:avLst/>
             <a:gdLst/>
             <a:ahLst/>
+            <a:cxnLst/>
             <a:rect l="l" t="t" r="r" b="b"/>
             <a:pathLst>
-              <a:path w="102869" h="0">
+              <a:path w="102869">
                 <a:moveTo>
                   <a:pt x="0" y="0"/>
                 </a:moveTo>
@@ -2780,17 +3682,30 @@
           <a:noFill/>
           <a:ln w="22680">
             <a:solidFill>
-              <a:srgbClr val="231f20"/>
+              <a:srgbClr val="231F20"/>
             </a:solidFill>
             <a:round/>
           </a:ln>
         </p:spPr>
         <p:style>
-          <a:lnRef idx="0"/>
-          <a:fillRef idx="0"/>
-          <a:effectRef idx="0"/>
+          <a:lnRef idx="0">
+            <a:scrgbClr r="0" g="0" b="0"/>
+          </a:lnRef>
+          <a:fillRef idx="0">
+            <a:scrgbClr r="0" g="0" b="0"/>
+          </a:fillRef>
+          <a:effectRef idx="0">
+            <a:scrgbClr r="0" g="0" b="0"/>
+          </a:effectRef>
           <a:fontRef idx="minor"/>
         </p:style>
+        <p:txBody>
+          <a:bodyPr/>
+          <a:lstStyle/>
+          <a:p>
+            <a:endParaRPr lang="en-IL"/>
+          </a:p>
+        </p:txBody>
       </p:sp>
       <p:sp>
         <p:nvSpPr>
@@ -2807,6 +3722,7 @@
             <a:avLst/>
             <a:gdLst/>
             <a:ahLst/>
+            <a:cxnLst/>
             <a:rect l="l" t="t" r="r" b="b"/>
             <a:pathLst>
               <a:path w="133985" h="45085">
@@ -2872,18 +3788,31 @@
             </a:pathLst>
           </a:custGeom>
           <a:solidFill>
-            <a:srgbClr val="ffffff"/>
+            <a:srgbClr val="FFFFFF"/>
           </a:solidFill>
           <a:ln>
             <a:noFill/>
           </a:ln>
         </p:spPr>
         <p:style>
-          <a:lnRef idx="0"/>
-          <a:fillRef idx="0"/>
-          <a:effectRef idx="0"/>
+          <a:lnRef idx="0">
+            <a:scrgbClr r="0" g="0" b="0"/>
+          </a:lnRef>
+          <a:fillRef idx="0">
+            <a:scrgbClr r="0" g="0" b="0"/>
+          </a:fillRef>
+          <a:effectRef idx="0">
+            <a:scrgbClr r="0" g="0" b="0"/>
+          </a:effectRef>
           <a:fontRef idx="minor"/>
         </p:style>
+        <p:txBody>
+          <a:bodyPr/>
+          <a:lstStyle/>
+          <a:p>
+            <a:endParaRPr lang="en-IL"/>
+          </a:p>
+        </p:txBody>
       </p:sp>
       <p:sp>
         <p:nvSpPr>
@@ -2900,6 +3829,7 @@
             <a:avLst/>
             <a:gdLst/>
             <a:ahLst/>
+            <a:cxnLst/>
             <a:rect l="l" t="t" r="r" b="b"/>
             <a:pathLst>
               <a:path w="151130" h="62230">
@@ -3005,18 +3935,31 @@
             </a:pathLst>
           </a:custGeom>
           <a:solidFill>
-            <a:srgbClr val="231f20"/>
+            <a:srgbClr val="231F20"/>
           </a:solidFill>
           <a:ln>
             <a:noFill/>
           </a:ln>
         </p:spPr>
         <p:style>
-          <a:lnRef idx="0"/>
-          <a:fillRef idx="0"/>
-          <a:effectRef idx="0"/>
+          <a:lnRef idx="0">
+            <a:scrgbClr r="0" g="0" b="0"/>
+          </a:lnRef>
+          <a:fillRef idx="0">
+            <a:scrgbClr r="0" g="0" b="0"/>
+          </a:fillRef>
+          <a:effectRef idx="0">
+            <a:scrgbClr r="0" g="0" b="0"/>
+          </a:effectRef>
           <a:fontRef idx="minor"/>
         </p:style>
+        <p:txBody>
+          <a:bodyPr/>
+          <a:lstStyle/>
+          <a:p>
+            <a:endParaRPr lang="en-IL"/>
+          </a:p>
+        </p:txBody>
       </p:sp>
       <p:sp>
         <p:nvSpPr>
@@ -3033,6 +3976,7 @@
             <a:avLst/>
             <a:gdLst/>
             <a:ahLst/>
+            <a:cxnLst/>
             <a:rect l="l" t="t" r="r" b="b"/>
             <a:pathLst>
               <a:path w="2019935" h="460375">
@@ -3056,18 +4000,31 @@
             </a:pathLst>
           </a:custGeom>
           <a:solidFill>
-            <a:srgbClr val="ffffff"/>
+            <a:srgbClr val="FFFFFF"/>
           </a:solidFill>
           <a:ln>
             <a:noFill/>
           </a:ln>
         </p:spPr>
         <p:style>
-          <a:lnRef idx="0"/>
-          <a:fillRef idx="0"/>
-          <a:effectRef idx="0"/>
+          <a:lnRef idx="0">
+            <a:scrgbClr r="0" g="0" b="0"/>
+          </a:lnRef>
+          <a:fillRef idx="0">
+            <a:scrgbClr r="0" g="0" b="0"/>
+          </a:fillRef>
+          <a:effectRef idx="0">
+            <a:scrgbClr r="0" g="0" b="0"/>
+          </a:effectRef>
           <a:fontRef idx="minor"/>
         </p:style>
+        <p:txBody>
+          <a:bodyPr/>
+          <a:lstStyle/>
+          <a:p>
+            <a:endParaRPr lang="en-IL"/>
+          </a:p>
+        </p:txBody>
       </p:sp>
       <p:sp>
         <p:nvSpPr>
@@ -3084,6 +4041,7 @@
             <a:avLst/>
             <a:gdLst/>
             <a:ahLst/>
+            <a:cxnLst/>
             <a:rect l="l" t="t" r="r" b="b"/>
             <a:pathLst>
               <a:path w="2031364" h="483235">
@@ -3141,18 +4099,31 @@
             </a:pathLst>
           </a:custGeom>
           <a:solidFill>
-            <a:srgbClr val="231f20"/>
+            <a:srgbClr val="231F20"/>
           </a:solidFill>
           <a:ln>
             <a:noFill/>
           </a:ln>
         </p:spPr>
         <p:style>
-          <a:lnRef idx="0"/>
-          <a:fillRef idx="0"/>
-          <a:effectRef idx="0"/>
+          <a:lnRef idx="0">
+            <a:scrgbClr r="0" g="0" b="0"/>
+          </a:lnRef>
+          <a:fillRef idx="0">
+            <a:scrgbClr r="0" g="0" b="0"/>
+          </a:fillRef>
+          <a:effectRef idx="0">
+            <a:scrgbClr r="0" g="0" b="0"/>
+          </a:effectRef>
           <a:fontRef idx="minor"/>
         </p:style>
+        <p:txBody>
+          <a:bodyPr/>
+          <a:lstStyle/>
+          <a:p>
+            <a:endParaRPr lang="en-IL"/>
+          </a:p>
+        </p:txBody>
       </p:sp>
       <p:sp>
         <p:nvSpPr>
@@ -3169,6 +4140,7 @@
             <a:avLst/>
             <a:gdLst/>
             <a:ahLst/>
+            <a:cxnLst/>
             <a:rect l="l" t="t" r="r" b="b"/>
             <a:pathLst>
               <a:path w="2019935" h="460375">
@@ -3192,18 +4164,31 @@
             </a:pathLst>
           </a:custGeom>
           <a:solidFill>
-            <a:srgbClr val="ffffff"/>
+            <a:srgbClr val="FFFFFF"/>
           </a:solidFill>
           <a:ln>
             <a:noFill/>
           </a:ln>
         </p:spPr>
         <p:style>
-          <a:lnRef idx="0"/>
-          <a:fillRef idx="0"/>
-          <a:effectRef idx="0"/>
+          <a:lnRef idx="0">
+            <a:scrgbClr r="0" g="0" b="0"/>
+          </a:lnRef>
+          <a:fillRef idx="0">
+            <a:scrgbClr r="0" g="0" b="0"/>
+          </a:fillRef>
+          <a:effectRef idx="0">
+            <a:scrgbClr r="0" g="0" b="0"/>
+          </a:effectRef>
           <a:fontRef idx="minor"/>
         </p:style>
+        <p:txBody>
+          <a:bodyPr/>
+          <a:lstStyle/>
+          <a:p>
+            <a:endParaRPr lang="en-IL"/>
+          </a:p>
+        </p:txBody>
       </p:sp>
       <p:sp>
         <p:nvSpPr>
@@ -3220,6 +4205,7 @@
             <a:avLst/>
             <a:gdLst/>
             <a:ahLst/>
+            <a:cxnLst/>
             <a:rect l="l" t="t" r="r" b="b"/>
             <a:pathLst>
               <a:path w="1860550" h="390525">
@@ -4513,18 +5499,31 @@
             </a:pathLst>
           </a:custGeom>
           <a:solidFill>
-            <a:srgbClr val="231f20"/>
+            <a:srgbClr val="231F20"/>
           </a:solidFill>
           <a:ln>
             <a:noFill/>
           </a:ln>
         </p:spPr>
         <p:style>
-          <a:lnRef idx="0"/>
-          <a:fillRef idx="0"/>
-          <a:effectRef idx="0"/>
+          <a:lnRef idx="0">
+            <a:scrgbClr r="0" g="0" b="0"/>
+          </a:lnRef>
+          <a:fillRef idx="0">
+            <a:scrgbClr r="0" g="0" b="0"/>
+          </a:fillRef>
+          <a:effectRef idx="0">
+            <a:scrgbClr r="0" g="0" b="0"/>
+          </a:effectRef>
           <a:fontRef idx="minor"/>
         </p:style>
+        <p:txBody>
+          <a:bodyPr/>
+          <a:lstStyle/>
+          <a:p>
+            <a:endParaRPr lang="en-IL"/>
+          </a:p>
+        </p:txBody>
       </p:sp>
       <p:sp>
         <p:nvSpPr>
@@ -4541,7 +5540,7 @@
             <a:avLst/>
           </a:prstGeom>
           <a:blipFill rotWithShape="0">
-            <a:blip r:embed="rId2"/>
+            <a:blip r:embed="rId14"/>
             <a:stretch>
               <a:fillRect/>
             </a:stretch>
@@ -4551,11 +5550,24 @@
           </a:ln>
         </p:spPr>
         <p:style>
-          <a:lnRef idx="0"/>
-          <a:fillRef idx="0"/>
-          <a:effectRef idx="0"/>
+          <a:lnRef idx="0">
+            <a:scrgbClr r="0" g="0" b="0"/>
+          </a:lnRef>
+          <a:fillRef idx="0">
+            <a:scrgbClr r="0" g="0" b="0"/>
+          </a:fillRef>
+          <a:effectRef idx="0">
+            <a:scrgbClr r="0" g="0" b="0"/>
+          </a:effectRef>
           <a:fontRef idx="minor"/>
         </p:style>
+        <p:txBody>
+          <a:bodyPr/>
+          <a:lstStyle/>
+          <a:p>
+            <a:endParaRPr lang="en-IL"/>
+          </a:p>
+        </p:txBody>
       </p:sp>
       <p:sp>
         <p:nvSpPr>
@@ -4572,9 +5584,10 @@
             <a:avLst/>
             <a:gdLst/>
             <a:ahLst/>
+            <a:cxnLst/>
             <a:rect l="l" t="t" r="r" b="b"/>
             <a:pathLst>
-              <a:path w="0" h="209550">
+              <a:path h="209550">
                 <a:moveTo>
                   <a:pt x="0" y="0"/>
                 </a:moveTo>
@@ -4587,17 +5600,30 @@
           <a:noFill/>
           <a:ln w="22680">
             <a:solidFill>
-              <a:srgbClr val="231f20"/>
+              <a:srgbClr val="231F20"/>
             </a:solidFill>
             <a:round/>
           </a:ln>
         </p:spPr>
         <p:style>
-          <a:lnRef idx="0"/>
-          <a:fillRef idx="0"/>
-          <a:effectRef idx="0"/>
+          <a:lnRef idx="0">
+            <a:scrgbClr r="0" g="0" b="0"/>
+          </a:lnRef>
+          <a:fillRef idx="0">
+            <a:scrgbClr r="0" g="0" b="0"/>
+          </a:fillRef>
+          <a:effectRef idx="0">
+            <a:scrgbClr r="0" g="0" b="0"/>
+          </a:effectRef>
           <a:fontRef idx="minor"/>
         </p:style>
+        <p:txBody>
+          <a:bodyPr/>
+          <a:lstStyle/>
+          <a:p>
+            <a:endParaRPr lang="en-IL"/>
+          </a:p>
+        </p:txBody>
       </p:sp>
       <p:sp>
         <p:nvSpPr>
@@ -4614,9 +5640,10 @@
             <a:avLst/>
             <a:gdLst/>
             <a:ahLst/>
+            <a:cxnLst/>
             <a:rect l="l" t="t" r="r" b="b"/>
             <a:pathLst>
-              <a:path w="0" h="152400">
+              <a:path h="152400">
                 <a:moveTo>
                   <a:pt x="0" y="0"/>
                 </a:moveTo>
@@ -4629,17 +5656,30 @@
           <a:noFill/>
           <a:ln w="22680">
             <a:solidFill>
-              <a:srgbClr val="231f20"/>
+              <a:srgbClr val="231F20"/>
             </a:solidFill>
             <a:round/>
           </a:ln>
         </p:spPr>
         <p:style>
-          <a:lnRef idx="0"/>
-          <a:fillRef idx="0"/>
-          <a:effectRef idx="0"/>
+          <a:lnRef idx="0">
+            <a:scrgbClr r="0" g="0" b="0"/>
+          </a:lnRef>
+          <a:fillRef idx="0">
+            <a:scrgbClr r="0" g="0" b="0"/>
+          </a:fillRef>
+          <a:effectRef idx="0">
+            <a:scrgbClr r="0" g="0" b="0"/>
+          </a:effectRef>
           <a:fontRef idx="minor"/>
         </p:style>
+        <p:txBody>
+          <a:bodyPr/>
+          <a:lstStyle/>
+          <a:p>
+            <a:endParaRPr lang="en-IL"/>
+          </a:p>
+        </p:txBody>
       </p:sp>
       <p:sp>
         <p:nvSpPr>
@@ -4656,9 +5696,10 @@
             <a:avLst/>
             <a:gdLst/>
             <a:ahLst/>
+            <a:cxnLst/>
             <a:rect l="l" t="t" r="r" b="b"/>
             <a:pathLst>
-              <a:path w="0" h="152400">
+              <a:path h="152400">
                 <a:moveTo>
                   <a:pt x="0" y="0"/>
                 </a:moveTo>
@@ -4671,17 +5712,30 @@
           <a:noFill/>
           <a:ln w="22680">
             <a:solidFill>
-              <a:srgbClr val="231f20"/>
+              <a:srgbClr val="231F20"/>
             </a:solidFill>
             <a:round/>
           </a:ln>
         </p:spPr>
         <p:style>
-          <a:lnRef idx="0"/>
-          <a:fillRef idx="0"/>
-          <a:effectRef idx="0"/>
+          <a:lnRef idx="0">
+            <a:scrgbClr r="0" g="0" b="0"/>
+          </a:lnRef>
+          <a:fillRef idx="0">
+            <a:scrgbClr r="0" g="0" b="0"/>
+          </a:fillRef>
+          <a:effectRef idx="0">
+            <a:scrgbClr r="0" g="0" b="0"/>
+          </a:effectRef>
           <a:fontRef idx="minor"/>
         </p:style>
+        <p:txBody>
+          <a:bodyPr/>
+          <a:lstStyle/>
+          <a:p>
+            <a:endParaRPr lang="en-IL"/>
+          </a:p>
+        </p:txBody>
       </p:sp>
       <p:sp>
         <p:nvSpPr>
@@ -4698,9 +5752,10 @@
             <a:avLst/>
             <a:gdLst/>
             <a:ahLst/>
+            <a:cxnLst/>
             <a:rect l="l" t="t" r="r" b="b"/>
             <a:pathLst>
-              <a:path w="0" h="135255">
+              <a:path h="135255">
                 <a:moveTo>
                   <a:pt x="0" y="0"/>
                 </a:moveTo>
@@ -4713,17 +5768,30 @@
           <a:noFill/>
           <a:ln w="22680">
             <a:solidFill>
-              <a:srgbClr val="231f20"/>
+              <a:srgbClr val="231F20"/>
             </a:solidFill>
             <a:round/>
           </a:ln>
         </p:spPr>
         <p:style>
-          <a:lnRef idx="0"/>
-          <a:fillRef idx="0"/>
-          <a:effectRef idx="0"/>
+          <a:lnRef idx="0">
+            <a:scrgbClr r="0" g="0" b="0"/>
+          </a:lnRef>
+          <a:fillRef idx="0">
+            <a:scrgbClr r="0" g="0" b="0"/>
+          </a:fillRef>
+          <a:effectRef idx="0">
+            <a:scrgbClr r="0" g="0" b="0"/>
+          </a:effectRef>
           <a:fontRef idx="minor"/>
         </p:style>
+        <p:txBody>
+          <a:bodyPr/>
+          <a:lstStyle/>
+          <a:p>
+            <a:endParaRPr lang="en-IL"/>
+          </a:p>
+        </p:txBody>
       </p:sp>
       <p:sp>
         <p:nvSpPr>
@@ -4740,9 +5808,10 @@
             <a:avLst/>
             <a:gdLst/>
             <a:ahLst/>
+            <a:cxnLst/>
             <a:rect l="l" t="t" r="r" b="b"/>
             <a:pathLst>
-              <a:path w="0" h="107950">
+              <a:path h="107950">
                 <a:moveTo>
                   <a:pt x="0" y="0"/>
                 </a:moveTo>
@@ -4755,17 +5824,30 @@
           <a:noFill/>
           <a:ln w="22680">
             <a:solidFill>
-              <a:srgbClr val="231f20"/>
+              <a:srgbClr val="231F20"/>
             </a:solidFill>
             <a:round/>
           </a:ln>
         </p:spPr>
         <p:style>
-          <a:lnRef idx="0"/>
-          <a:fillRef idx="0"/>
-          <a:effectRef idx="0"/>
+          <a:lnRef idx="0">
+            <a:scrgbClr r="0" g="0" b="0"/>
+          </a:lnRef>
+          <a:fillRef idx="0">
+            <a:scrgbClr r="0" g="0" b="0"/>
+          </a:fillRef>
+          <a:effectRef idx="0">
+            <a:scrgbClr r="0" g="0" b="0"/>
+          </a:effectRef>
           <a:fontRef idx="minor"/>
         </p:style>
+        <p:txBody>
+          <a:bodyPr/>
+          <a:lstStyle/>
+          <a:p>
+            <a:endParaRPr lang="en-IL"/>
+          </a:p>
+        </p:txBody>
       </p:sp>
       <p:sp>
         <p:nvSpPr>
@@ -4782,6 +5864,7 @@
             <a:avLst/>
             <a:gdLst/>
             <a:ahLst/>
+            <a:cxnLst/>
             <a:rect l="l" t="t" r="r" b="b"/>
             <a:pathLst>
               <a:path w="20319" h="277494">
@@ -4821,18 +5904,31 @@
             </a:pathLst>
           </a:custGeom>
           <a:solidFill>
-            <a:srgbClr val="70ccd7"/>
+            <a:srgbClr val="70CCD7"/>
           </a:solidFill>
           <a:ln>
             <a:noFill/>
           </a:ln>
         </p:spPr>
         <p:style>
-          <a:lnRef idx="0"/>
-          <a:fillRef idx="0"/>
-          <a:effectRef idx="0"/>
+          <a:lnRef idx="0">
+            <a:scrgbClr r="0" g="0" b="0"/>
+          </a:lnRef>
+          <a:fillRef idx="0">
+            <a:scrgbClr r="0" g="0" b="0"/>
+          </a:fillRef>
+          <a:effectRef idx="0">
+            <a:scrgbClr r="0" g="0" b="0"/>
+          </a:effectRef>
           <a:fontRef idx="minor"/>
         </p:style>
+        <p:txBody>
+          <a:bodyPr/>
+          <a:lstStyle/>
+          <a:p>
+            <a:endParaRPr lang="en-IL"/>
+          </a:p>
+        </p:txBody>
       </p:sp>
       <p:sp>
         <p:nvSpPr>
@@ -4849,6 +5945,7 @@
             <a:avLst/>
             <a:gdLst/>
             <a:ahLst/>
+            <a:cxnLst/>
             <a:rect l="l" t="t" r="r" b="b"/>
             <a:pathLst>
               <a:path w="20319" h="96519">
@@ -4872,18 +5969,31 @@
             </a:pathLst>
           </a:custGeom>
           <a:solidFill>
-            <a:srgbClr val="6dcbd5"/>
+            <a:srgbClr val="6DCBD5"/>
           </a:solidFill>
           <a:ln>
             <a:noFill/>
           </a:ln>
         </p:spPr>
         <p:style>
-          <a:lnRef idx="0"/>
-          <a:fillRef idx="0"/>
-          <a:effectRef idx="0"/>
+          <a:lnRef idx="0">
+            <a:scrgbClr r="0" g="0" b="0"/>
+          </a:lnRef>
+          <a:fillRef idx="0">
+            <a:scrgbClr r="0" g="0" b="0"/>
+          </a:fillRef>
+          <a:effectRef idx="0">
+            <a:scrgbClr r="0" g="0" b="0"/>
+          </a:effectRef>
           <a:fontRef idx="minor"/>
         </p:style>
+        <p:txBody>
+          <a:bodyPr/>
+          <a:lstStyle/>
+          <a:p>
+            <a:endParaRPr lang="en-IL"/>
+          </a:p>
+        </p:txBody>
       </p:sp>
       <p:sp>
         <p:nvSpPr>
@@ -4900,6 +6010,7 @@
             <a:avLst/>
             <a:gdLst/>
             <a:ahLst/>
+            <a:cxnLst/>
             <a:rect l="l" t="t" r="r" b="b"/>
             <a:pathLst>
               <a:path w="20319" h="21590">
@@ -4923,18 +6034,31 @@
             </a:pathLst>
           </a:custGeom>
           <a:solidFill>
-            <a:srgbClr val="00151a"/>
+            <a:srgbClr val="00151A"/>
           </a:solidFill>
           <a:ln>
             <a:noFill/>
           </a:ln>
         </p:spPr>
         <p:style>
-          <a:lnRef idx="0"/>
-          <a:fillRef idx="0"/>
-          <a:effectRef idx="0"/>
+          <a:lnRef idx="0">
+            <a:scrgbClr r="0" g="0" b="0"/>
+          </a:lnRef>
+          <a:fillRef idx="0">
+            <a:scrgbClr r="0" g="0" b="0"/>
+          </a:fillRef>
+          <a:effectRef idx="0">
+            <a:scrgbClr r="0" g="0" b="0"/>
+          </a:effectRef>
           <a:fontRef idx="minor"/>
         </p:style>
+        <p:txBody>
+          <a:bodyPr/>
+          <a:lstStyle/>
+          <a:p>
+            <a:endParaRPr lang="en-IL"/>
+          </a:p>
+        </p:txBody>
       </p:sp>
       <p:sp>
         <p:nvSpPr>
@@ -4951,6 +6075,7 @@
             <a:avLst/>
             <a:gdLst/>
             <a:ahLst/>
+            <a:cxnLst/>
             <a:rect l="l" t="t" r="r" b="b"/>
             <a:pathLst>
               <a:path w="2000885" h="172084">
@@ -5018,18 +6143,31 @@
             </a:pathLst>
           </a:custGeom>
           <a:solidFill>
-            <a:srgbClr val="70ccd7"/>
+            <a:srgbClr val="70CCD7"/>
           </a:solidFill>
           <a:ln>
             <a:noFill/>
           </a:ln>
         </p:spPr>
         <p:style>
-          <a:lnRef idx="0"/>
-          <a:fillRef idx="0"/>
-          <a:effectRef idx="0"/>
+          <a:lnRef idx="0">
+            <a:scrgbClr r="0" g="0" b="0"/>
+          </a:lnRef>
+          <a:fillRef idx="0">
+            <a:scrgbClr r="0" g="0" b="0"/>
+          </a:fillRef>
+          <a:effectRef idx="0">
+            <a:scrgbClr r="0" g="0" b="0"/>
+          </a:effectRef>
           <a:fontRef idx="minor"/>
         </p:style>
+        <p:txBody>
+          <a:bodyPr/>
+          <a:lstStyle/>
+          <a:p>
+            <a:endParaRPr lang="en-IL"/>
+          </a:p>
+        </p:txBody>
       </p:sp>
       <p:sp>
         <p:nvSpPr>
@@ -5046,6 +6184,7 @@
             <a:avLst/>
             <a:gdLst/>
             <a:ahLst/>
+            <a:cxnLst/>
             <a:rect l="l" t="t" r="r" b="b"/>
             <a:pathLst>
               <a:path w="2031364" h="184150">
@@ -5094,18 +6233,31 @@
             </a:pathLst>
           </a:custGeom>
           <a:solidFill>
-            <a:srgbClr val="00151a"/>
+            <a:srgbClr val="00151A"/>
           </a:solidFill>
           <a:ln>
             <a:noFill/>
           </a:ln>
         </p:spPr>
         <p:style>
-          <a:lnRef idx="0"/>
-          <a:fillRef idx="0"/>
-          <a:effectRef idx="0"/>
+          <a:lnRef idx="0">
+            <a:scrgbClr r="0" g="0" b="0"/>
+          </a:lnRef>
+          <a:fillRef idx="0">
+            <a:scrgbClr r="0" g="0" b="0"/>
+          </a:fillRef>
+          <a:effectRef idx="0">
+            <a:scrgbClr r="0" g="0" b="0"/>
+          </a:effectRef>
           <a:fontRef idx="minor"/>
         </p:style>
+        <p:txBody>
+          <a:bodyPr/>
+          <a:lstStyle/>
+          <a:p>
+            <a:endParaRPr lang="en-IL"/>
+          </a:p>
+        </p:txBody>
       </p:sp>
       <p:sp>
         <p:nvSpPr>
@@ -5122,7 +6274,7 @@
             <a:avLst/>
           </a:prstGeom>
           <a:blipFill rotWithShape="0">
-            <a:blip r:embed="rId3"/>
+            <a:blip r:embed="rId15"/>
             <a:stretch>
               <a:fillRect/>
             </a:stretch>
@@ -5132,11 +6284,24 @@
           </a:ln>
         </p:spPr>
         <p:style>
-          <a:lnRef idx="0"/>
-          <a:fillRef idx="0"/>
-          <a:effectRef idx="0"/>
+          <a:lnRef idx="0">
+            <a:scrgbClr r="0" g="0" b="0"/>
+          </a:lnRef>
+          <a:fillRef idx="0">
+            <a:scrgbClr r="0" g="0" b="0"/>
+          </a:fillRef>
+          <a:effectRef idx="0">
+            <a:scrgbClr r="0" g="0" b="0"/>
+          </a:effectRef>
           <a:fontRef idx="minor"/>
         </p:style>
+        <p:txBody>
+          <a:bodyPr/>
+          <a:lstStyle/>
+          <a:p>
+            <a:endParaRPr lang="en-IL"/>
+          </a:p>
+        </p:txBody>
       </p:sp>
       <p:sp>
         <p:nvSpPr>
@@ -5153,6 +6318,7 @@
             <a:avLst/>
             <a:gdLst/>
             <a:ahLst/>
+            <a:cxnLst/>
             <a:rect l="l" t="t" r="r" b="b"/>
             <a:pathLst>
               <a:path w="2031364" h="112394">
@@ -5239,18 +6405,31 @@
             </a:pathLst>
           </a:custGeom>
           <a:solidFill>
-            <a:srgbClr val="00151a"/>
+            <a:srgbClr val="00151A"/>
           </a:solidFill>
           <a:ln>
             <a:noFill/>
           </a:ln>
         </p:spPr>
         <p:style>
-          <a:lnRef idx="0"/>
-          <a:fillRef idx="0"/>
-          <a:effectRef idx="0"/>
+          <a:lnRef idx="0">
+            <a:scrgbClr r="0" g="0" b="0"/>
+          </a:lnRef>
+          <a:fillRef idx="0">
+            <a:scrgbClr r="0" g="0" b="0"/>
+          </a:fillRef>
+          <a:effectRef idx="0">
+            <a:scrgbClr r="0" g="0" b="0"/>
+          </a:effectRef>
           <a:fontRef idx="minor"/>
         </p:style>
+        <p:txBody>
+          <a:bodyPr/>
+          <a:lstStyle/>
+          <a:p>
+            <a:endParaRPr lang="en-IL"/>
+          </a:p>
+        </p:txBody>
       </p:sp>
       <p:sp>
         <p:nvSpPr>
@@ -5267,6 +6446,7 @@
             <a:avLst/>
             <a:gdLst/>
             <a:ahLst/>
+            <a:cxnLst/>
             <a:rect l="l" t="t" r="r" b="b"/>
             <a:pathLst>
               <a:path w="1860550" h="71119">
@@ -6384,18 +7564,31 @@
             </a:pathLst>
           </a:custGeom>
           <a:solidFill>
-            <a:srgbClr val="00151a"/>
+            <a:srgbClr val="00151A"/>
           </a:solidFill>
           <a:ln>
             <a:noFill/>
           </a:ln>
         </p:spPr>
         <p:style>
-          <a:lnRef idx="0"/>
-          <a:fillRef idx="0"/>
-          <a:effectRef idx="0"/>
+          <a:lnRef idx="0">
+            <a:scrgbClr r="0" g="0" b="0"/>
+          </a:lnRef>
+          <a:fillRef idx="0">
+            <a:scrgbClr r="0" g="0" b="0"/>
+          </a:fillRef>
+          <a:effectRef idx="0">
+            <a:scrgbClr r="0" g="0" b="0"/>
+          </a:effectRef>
           <a:fontRef idx="minor"/>
         </p:style>
+        <p:txBody>
+          <a:bodyPr/>
+          <a:lstStyle/>
+          <a:p>
+            <a:endParaRPr lang="en-IL"/>
+          </a:p>
+        </p:txBody>
       </p:sp>
       <p:sp>
         <p:nvSpPr>
@@ -6412,9 +7605,10 @@
             <a:avLst/>
             <a:gdLst/>
             <a:ahLst/>
+            <a:cxnLst/>
             <a:rect l="l" t="t" r="r" b="b"/>
             <a:pathLst>
-              <a:path w="0" h="135255">
+              <a:path h="135255">
                 <a:moveTo>
                   <a:pt x="0" y="0"/>
                 </a:moveTo>
@@ -6427,17 +7621,30 @@
           <a:noFill/>
           <a:ln w="22680">
             <a:solidFill>
-              <a:srgbClr val="00151a"/>
+              <a:srgbClr val="00151A"/>
             </a:solidFill>
             <a:round/>
           </a:ln>
         </p:spPr>
         <p:style>
-          <a:lnRef idx="0"/>
-          <a:fillRef idx="0"/>
-          <a:effectRef idx="0"/>
+          <a:lnRef idx="0">
+            <a:scrgbClr r="0" g="0" b="0"/>
+          </a:lnRef>
+          <a:fillRef idx="0">
+            <a:scrgbClr r="0" g="0" b="0"/>
+          </a:fillRef>
+          <a:effectRef idx="0">
+            <a:scrgbClr r="0" g="0" b="0"/>
+          </a:effectRef>
           <a:fontRef idx="minor"/>
         </p:style>
+        <p:txBody>
+          <a:bodyPr/>
+          <a:lstStyle/>
+          <a:p>
+            <a:endParaRPr lang="en-IL"/>
+          </a:p>
+        </p:txBody>
       </p:sp>
       <p:sp>
         <p:nvSpPr>
@@ -6454,9 +7661,10 @@
             <a:avLst/>
             <a:gdLst/>
             <a:ahLst/>
+            <a:cxnLst/>
             <a:rect l="l" t="t" r="r" b="b"/>
             <a:pathLst>
-              <a:path w="0" h="107950">
+              <a:path h="107950">
                 <a:moveTo>
                   <a:pt x="0" y="0"/>
                 </a:moveTo>
@@ -6469,17 +7677,30 @@
           <a:noFill/>
           <a:ln w="22680">
             <a:solidFill>
-              <a:srgbClr val="00151a"/>
+              <a:srgbClr val="00151A"/>
             </a:solidFill>
             <a:round/>
           </a:ln>
         </p:spPr>
         <p:style>
-          <a:lnRef idx="0"/>
-          <a:fillRef idx="0"/>
-          <a:effectRef idx="0"/>
+          <a:lnRef idx="0">
+            <a:scrgbClr r="0" g="0" b="0"/>
+          </a:lnRef>
+          <a:fillRef idx="0">
+            <a:scrgbClr r="0" g="0" b="0"/>
+          </a:fillRef>
+          <a:effectRef idx="0">
+            <a:scrgbClr r="0" g="0" b="0"/>
+          </a:effectRef>
           <a:fontRef idx="minor"/>
         </p:style>
+        <p:txBody>
+          <a:bodyPr/>
+          <a:lstStyle/>
+          <a:p>
+            <a:endParaRPr lang="en-IL"/>
+          </a:p>
+        </p:txBody>
       </p:sp>
       <p:sp>
         <p:nvSpPr>
@@ -6496,6 +7717,7 @@
             <a:avLst/>
             <a:gdLst/>
             <a:ahLst/>
+            <a:cxnLst/>
             <a:rect l="l" t="t" r="r" b="b"/>
             <a:pathLst>
               <a:path w="291464" h="205739">
@@ -6519,18 +7741,31 @@
             </a:pathLst>
           </a:custGeom>
           <a:solidFill>
-            <a:srgbClr val="70ccd7"/>
+            <a:srgbClr val="70CCD7"/>
           </a:solidFill>
           <a:ln>
             <a:noFill/>
           </a:ln>
         </p:spPr>
         <p:style>
-          <a:lnRef idx="0"/>
-          <a:fillRef idx="0"/>
-          <a:effectRef idx="0"/>
+          <a:lnRef idx="0">
+            <a:scrgbClr r="0" g="0" b="0"/>
+          </a:lnRef>
+          <a:fillRef idx="0">
+            <a:scrgbClr r="0" g="0" b="0"/>
+          </a:fillRef>
+          <a:effectRef idx="0">
+            <a:scrgbClr r="0" g="0" b="0"/>
+          </a:effectRef>
           <a:fontRef idx="minor"/>
         </p:style>
+        <p:txBody>
+          <a:bodyPr/>
+          <a:lstStyle/>
+          <a:p>
+            <a:endParaRPr lang="en-IL"/>
+          </a:p>
+        </p:txBody>
       </p:sp>
       <p:sp>
         <p:nvSpPr>
@@ -6547,6 +7782,7 @@
             <a:avLst/>
             <a:gdLst/>
             <a:ahLst/>
+            <a:cxnLst/>
             <a:rect l="l" t="t" r="r" b="b"/>
             <a:pathLst>
               <a:path w="466725" h="154940">
@@ -6567,18 +7803,31 @@
             </a:pathLst>
           </a:custGeom>
           <a:solidFill>
-            <a:srgbClr val="e8a063"/>
+            <a:srgbClr val="E8A063"/>
           </a:solidFill>
           <a:ln>
             <a:noFill/>
           </a:ln>
         </p:spPr>
         <p:style>
-          <a:lnRef idx="0"/>
-          <a:fillRef idx="0"/>
-          <a:effectRef idx="0"/>
+          <a:lnRef idx="0">
+            <a:scrgbClr r="0" g="0" b="0"/>
+          </a:lnRef>
+          <a:fillRef idx="0">
+            <a:scrgbClr r="0" g="0" b="0"/>
+          </a:fillRef>
+          <a:effectRef idx="0">
+            <a:scrgbClr r="0" g="0" b="0"/>
+          </a:effectRef>
           <a:fontRef idx="minor"/>
         </p:style>
+        <p:txBody>
+          <a:bodyPr/>
+          <a:lstStyle/>
+          <a:p>
+            <a:endParaRPr lang="en-IL"/>
+          </a:p>
+        </p:txBody>
       </p:sp>
       <p:sp>
         <p:nvSpPr>
@@ -6595,9 +7844,10 @@
             <a:avLst/>
             <a:gdLst/>
             <a:ahLst/>
+            <a:cxnLst/>
             <a:rect l="l" t="t" r="r" b="b"/>
             <a:pathLst>
-              <a:path w="102869" h="0">
+              <a:path w="102869">
                 <a:moveTo>
                   <a:pt x="0" y="0"/>
                 </a:moveTo>
@@ -6610,17 +7860,30 @@
           <a:noFill/>
           <a:ln w="80280">
             <a:solidFill>
-              <a:srgbClr val="231f20"/>
+              <a:srgbClr val="231F20"/>
             </a:solidFill>
             <a:round/>
           </a:ln>
         </p:spPr>
         <p:style>
-          <a:lnRef idx="0"/>
-          <a:fillRef idx="0"/>
-          <a:effectRef idx="0"/>
+          <a:lnRef idx="0">
+            <a:scrgbClr r="0" g="0" b="0"/>
+          </a:lnRef>
+          <a:fillRef idx="0">
+            <a:scrgbClr r="0" g="0" b="0"/>
+          </a:fillRef>
+          <a:effectRef idx="0">
+            <a:scrgbClr r="0" g="0" b="0"/>
+          </a:effectRef>
           <a:fontRef idx="minor"/>
         </p:style>
+        <p:txBody>
+          <a:bodyPr/>
+          <a:lstStyle/>
+          <a:p>
+            <a:endParaRPr lang="en-IL"/>
+          </a:p>
+        </p:txBody>
       </p:sp>
       <p:sp>
         <p:nvSpPr>
@@ -6637,9 +7900,10 @@
             <a:avLst/>
             <a:gdLst/>
             <a:ahLst/>
+            <a:cxnLst/>
             <a:rect l="l" t="t" r="r" b="b"/>
             <a:pathLst>
-              <a:path w="716280" h="0">
+              <a:path w="716280">
                 <a:moveTo>
                   <a:pt x="0" y="0"/>
                 </a:moveTo>
@@ -6652,17 +7916,30 @@
           <a:noFill/>
           <a:ln w="17280">
             <a:solidFill>
-              <a:srgbClr val="231f20"/>
+              <a:srgbClr val="231F20"/>
             </a:solidFill>
             <a:round/>
           </a:ln>
         </p:spPr>
         <p:style>
-          <a:lnRef idx="0"/>
-          <a:fillRef idx="0"/>
-          <a:effectRef idx="0"/>
+          <a:lnRef idx="0">
+            <a:scrgbClr r="0" g="0" b="0"/>
+          </a:lnRef>
+          <a:fillRef idx="0">
+            <a:scrgbClr r="0" g="0" b="0"/>
+          </a:fillRef>
+          <a:effectRef idx="0">
+            <a:scrgbClr r="0" g="0" b="0"/>
+          </a:effectRef>
           <a:fontRef idx="minor"/>
         </p:style>
+        <p:txBody>
+          <a:bodyPr/>
+          <a:lstStyle/>
+          <a:p>
+            <a:endParaRPr lang="en-IL"/>
+          </a:p>
+        </p:txBody>
       </p:sp>
       <p:sp>
         <p:nvSpPr>
@@ -6679,6 +7956,7 @@
             <a:avLst/>
             <a:gdLst/>
             <a:ahLst/>
+            <a:cxnLst/>
             <a:rect l="l" t="t" r="r" b="b"/>
             <a:pathLst>
               <a:path w="267969" h="79375">
@@ -6757,18 +8035,31 @@
             </a:pathLst>
           </a:custGeom>
           <a:solidFill>
-            <a:srgbClr val="231f20"/>
+            <a:srgbClr val="231F20"/>
           </a:solidFill>
           <a:ln>
             <a:noFill/>
           </a:ln>
         </p:spPr>
         <p:style>
-          <a:lnRef idx="0"/>
-          <a:fillRef idx="0"/>
-          <a:effectRef idx="0"/>
+          <a:lnRef idx="0">
+            <a:scrgbClr r="0" g="0" b="0"/>
+          </a:lnRef>
+          <a:fillRef idx="0">
+            <a:scrgbClr r="0" g="0" b="0"/>
+          </a:fillRef>
+          <a:effectRef idx="0">
+            <a:scrgbClr r="0" g="0" b="0"/>
+          </a:effectRef>
           <a:fontRef idx="minor"/>
         </p:style>
+        <p:txBody>
+          <a:bodyPr/>
+          <a:lstStyle/>
+          <a:p>
+            <a:endParaRPr lang="en-IL"/>
+          </a:p>
+        </p:txBody>
       </p:sp>
       <p:sp>
         <p:nvSpPr>
@@ -6785,6 +8076,7 @@
             <a:avLst/>
             <a:gdLst/>
             <a:ahLst/>
+            <a:cxnLst/>
             <a:rect l="l" t="t" r="r" b="b"/>
             <a:pathLst>
               <a:path w="390525" h="108584">
@@ -6869,18 +8161,31 @@
             </a:pathLst>
           </a:custGeom>
           <a:solidFill>
-            <a:srgbClr val="231f20"/>
+            <a:srgbClr val="231F20"/>
           </a:solidFill>
           <a:ln>
             <a:noFill/>
           </a:ln>
         </p:spPr>
         <p:style>
-          <a:lnRef idx="0"/>
-          <a:fillRef idx="0"/>
-          <a:effectRef idx="0"/>
+          <a:lnRef idx="0">
+            <a:scrgbClr r="0" g="0" b="0"/>
+          </a:lnRef>
+          <a:fillRef idx="0">
+            <a:scrgbClr r="0" g="0" b="0"/>
+          </a:fillRef>
+          <a:effectRef idx="0">
+            <a:scrgbClr r="0" g="0" b="0"/>
+          </a:effectRef>
           <a:fontRef idx="minor"/>
         </p:style>
+        <p:txBody>
+          <a:bodyPr/>
+          <a:lstStyle/>
+          <a:p>
+            <a:endParaRPr lang="en-IL"/>
+          </a:p>
+        </p:txBody>
       </p:sp>
       <p:sp>
         <p:nvSpPr>
@@ -6897,6 +8202,7 @@
             <a:avLst/>
             <a:gdLst/>
             <a:ahLst/>
+            <a:cxnLst/>
             <a:rect l="l" t="t" r="r" b="b"/>
             <a:pathLst>
               <a:path w="163194" h="54609">
@@ -6975,18 +8281,31 @@
             </a:pathLst>
           </a:custGeom>
           <a:solidFill>
-            <a:srgbClr val="231f20"/>
+            <a:srgbClr val="231F20"/>
           </a:solidFill>
           <a:ln>
             <a:noFill/>
           </a:ln>
         </p:spPr>
         <p:style>
-          <a:lnRef idx="0"/>
-          <a:fillRef idx="0"/>
-          <a:effectRef idx="0"/>
+          <a:lnRef idx="0">
+            <a:scrgbClr r="0" g="0" b="0"/>
+          </a:lnRef>
+          <a:fillRef idx="0">
+            <a:scrgbClr r="0" g="0" b="0"/>
+          </a:fillRef>
+          <a:effectRef idx="0">
+            <a:scrgbClr r="0" g="0" b="0"/>
+          </a:effectRef>
           <a:fontRef idx="minor"/>
         </p:style>
+        <p:txBody>
+          <a:bodyPr/>
+          <a:lstStyle/>
+          <a:p>
+            <a:endParaRPr lang="en-IL"/>
+          </a:p>
+        </p:txBody>
       </p:sp>
       <p:sp>
         <p:nvSpPr>
@@ -7003,6 +8322,7 @@
             <a:avLst/>
             <a:gdLst/>
             <a:ahLst/>
+            <a:cxnLst/>
             <a:rect l="l" t="t" r="r" b="b"/>
             <a:pathLst>
               <a:path w="502285" h="178434">
@@ -7051,18 +8371,31 @@
             </a:pathLst>
           </a:custGeom>
           <a:solidFill>
-            <a:srgbClr val="231f20"/>
+            <a:srgbClr val="231F20"/>
           </a:solidFill>
           <a:ln>
             <a:noFill/>
           </a:ln>
         </p:spPr>
         <p:style>
-          <a:lnRef idx="0"/>
-          <a:fillRef idx="0"/>
-          <a:effectRef idx="0"/>
+          <a:lnRef idx="0">
+            <a:scrgbClr r="0" g="0" b="0"/>
+          </a:lnRef>
+          <a:fillRef idx="0">
+            <a:scrgbClr r="0" g="0" b="0"/>
+          </a:fillRef>
+          <a:effectRef idx="0">
+            <a:scrgbClr r="0" g="0" b="0"/>
+          </a:effectRef>
           <a:fontRef idx="minor"/>
         </p:style>
+        <p:txBody>
+          <a:bodyPr/>
+          <a:lstStyle/>
+          <a:p>
+            <a:endParaRPr lang="en-IL"/>
+          </a:p>
+        </p:txBody>
       </p:sp>
       <p:sp>
         <p:nvSpPr>
@@ -7079,9 +8412,10 @@
             <a:avLst/>
             <a:gdLst/>
             <a:ahLst/>
+            <a:cxnLst/>
             <a:rect l="l" t="t" r="r" b="b"/>
             <a:pathLst>
-              <a:path w="313055" h="0">
+              <a:path w="313055">
                 <a:moveTo>
                   <a:pt x="0" y="0"/>
                 </a:moveTo>
@@ -7094,17 +8428,30 @@
           <a:noFill/>
           <a:ln w="21600">
             <a:solidFill>
-              <a:srgbClr val="231f20"/>
+              <a:srgbClr val="231F20"/>
             </a:solidFill>
             <a:round/>
           </a:ln>
         </p:spPr>
         <p:style>
-          <a:lnRef idx="0"/>
-          <a:fillRef idx="0"/>
-          <a:effectRef idx="0"/>
+          <a:lnRef idx="0">
+            <a:scrgbClr r="0" g="0" b="0"/>
+          </a:lnRef>
+          <a:fillRef idx="0">
+            <a:scrgbClr r="0" g="0" b="0"/>
+          </a:fillRef>
+          <a:effectRef idx="0">
+            <a:scrgbClr r="0" g="0" b="0"/>
+          </a:effectRef>
           <a:fontRef idx="minor"/>
         </p:style>
+        <p:txBody>
+          <a:bodyPr/>
+          <a:lstStyle/>
+          <a:p>
+            <a:endParaRPr lang="en-IL"/>
+          </a:p>
+        </p:txBody>
       </p:sp>
       <p:sp>
         <p:nvSpPr>
@@ -7121,9 +8468,10 @@
             <a:avLst/>
             <a:gdLst/>
             <a:ahLst/>
+            <a:cxnLst/>
             <a:rect l="l" t="t" r="r" b="b"/>
             <a:pathLst>
-              <a:path w="0" h="146050">
+              <a:path h="146050">
                 <a:moveTo>
                   <a:pt x="0" y="0"/>
                 </a:moveTo>
@@ -7136,17 +8484,30 @@
           <a:noFill/>
           <a:ln w="21240">
             <a:solidFill>
-              <a:srgbClr val="231f20"/>
+              <a:srgbClr val="231F20"/>
             </a:solidFill>
             <a:round/>
           </a:ln>
         </p:spPr>
         <p:style>
-          <a:lnRef idx="0"/>
-          <a:fillRef idx="0"/>
-          <a:effectRef idx="0"/>
+          <a:lnRef idx="0">
+            <a:scrgbClr r="0" g="0" b="0"/>
+          </a:lnRef>
+          <a:fillRef idx="0">
+            <a:scrgbClr r="0" g="0" b="0"/>
+          </a:fillRef>
+          <a:effectRef idx="0">
+            <a:scrgbClr r="0" g="0" b="0"/>
+          </a:effectRef>
           <a:fontRef idx="minor"/>
         </p:style>
+        <p:txBody>
+          <a:bodyPr/>
+          <a:lstStyle/>
+          <a:p>
+            <a:endParaRPr lang="en-IL"/>
+          </a:p>
+        </p:txBody>
       </p:sp>
       <p:sp>
         <p:nvSpPr>
@@ -7163,9 +8524,10 @@
             <a:avLst/>
             <a:gdLst/>
             <a:ahLst/>
+            <a:cxnLst/>
             <a:rect l="l" t="t" r="r" b="b"/>
             <a:pathLst>
-              <a:path w="0" h="194944">
+              <a:path h="194944">
                 <a:moveTo>
                   <a:pt x="0" y="0"/>
                 </a:moveTo>
@@ -7178,17 +8540,30 @@
           <a:noFill/>
           <a:ln w="21240">
             <a:solidFill>
-              <a:srgbClr val="231f20"/>
+              <a:srgbClr val="231F20"/>
             </a:solidFill>
             <a:round/>
           </a:ln>
         </p:spPr>
         <p:style>
-          <a:lnRef idx="0"/>
-          <a:fillRef idx="0"/>
-          <a:effectRef idx="0"/>
+          <a:lnRef idx="0">
+            <a:scrgbClr r="0" g="0" b="0"/>
+          </a:lnRef>
+          <a:fillRef idx="0">
+            <a:scrgbClr r="0" g="0" b="0"/>
+          </a:fillRef>
+          <a:effectRef idx="0">
+            <a:scrgbClr r="0" g="0" b="0"/>
+          </a:effectRef>
           <a:fontRef idx="minor"/>
         </p:style>
+        <p:txBody>
+          <a:bodyPr/>
+          <a:lstStyle/>
+          <a:p>
+            <a:endParaRPr lang="en-IL"/>
+          </a:p>
+        </p:txBody>
       </p:sp>
       <p:sp>
         <p:nvSpPr>
@@ -7205,9 +8580,10 @@
             <a:avLst/>
             <a:gdLst/>
             <a:ahLst/>
+            <a:cxnLst/>
             <a:rect l="l" t="t" r="r" b="b"/>
             <a:pathLst>
-              <a:path w="101600" h="0">
+              <a:path w="101600">
                 <a:moveTo>
                   <a:pt x="0" y="0"/>
                 </a:moveTo>
@@ -7220,17 +8596,30 @@
           <a:noFill/>
           <a:ln w="21240">
             <a:solidFill>
-              <a:srgbClr val="231f20"/>
+              <a:srgbClr val="231F20"/>
             </a:solidFill>
             <a:round/>
           </a:ln>
         </p:spPr>
         <p:style>
-          <a:lnRef idx="0"/>
-          <a:fillRef idx="0"/>
-          <a:effectRef idx="0"/>
+          <a:lnRef idx="0">
+            <a:scrgbClr r="0" g="0" b="0"/>
+          </a:lnRef>
+          <a:fillRef idx="0">
+            <a:scrgbClr r="0" g="0" b="0"/>
+          </a:fillRef>
+          <a:effectRef idx="0">
+            <a:scrgbClr r="0" g="0" b="0"/>
+          </a:effectRef>
           <a:fontRef idx="minor"/>
         </p:style>
+        <p:txBody>
+          <a:bodyPr/>
+          <a:lstStyle/>
+          <a:p>
+            <a:endParaRPr lang="en-IL"/>
+          </a:p>
+        </p:txBody>
       </p:sp>
       <p:sp>
         <p:nvSpPr>
@@ -7247,6 +8636,7 @@
             <a:avLst/>
             <a:gdLst/>
             <a:ahLst/>
+            <a:cxnLst/>
             <a:rect l="l" t="t" r="r" b="b"/>
             <a:pathLst>
               <a:path w="2031364" h="483235">
@@ -7304,18 +8694,31 @@
             </a:pathLst>
           </a:custGeom>
           <a:solidFill>
-            <a:srgbClr val="231f20"/>
+            <a:srgbClr val="231F20"/>
           </a:solidFill>
           <a:ln>
             <a:noFill/>
           </a:ln>
         </p:spPr>
         <p:style>
-          <a:lnRef idx="0"/>
-          <a:fillRef idx="0"/>
-          <a:effectRef idx="0"/>
+          <a:lnRef idx="0">
+            <a:scrgbClr r="0" g="0" b="0"/>
+          </a:lnRef>
+          <a:fillRef idx="0">
+            <a:scrgbClr r="0" g="0" b="0"/>
+          </a:fillRef>
+          <a:effectRef idx="0">
+            <a:scrgbClr r="0" g="0" b="0"/>
+          </a:effectRef>
           <a:fontRef idx="minor"/>
         </p:style>
+        <p:txBody>
+          <a:bodyPr/>
+          <a:lstStyle/>
+          <a:p>
+            <a:endParaRPr lang="en-IL"/>
+          </a:p>
+        </p:txBody>
       </p:sp>
       <p:sp>
         <p:nvSpPr>
@@ -7332,6 +8735,7 @@
             <a:avLst/>
             <a:gdLst/>
             <a:ahLst/>
+            <a:cxnLst/>
             <a:rect l="l" t="t" r="r" b="b"/>
             <a:pathLst>
               <a:path w="2007235" h="340994">
@@ -7355,18 +8759,31 @@
             </a:pathLst>
           </a:custGeom>
           <a:solidFill>
-            <a:srgbClr val="f3ed63"/>
+            <a:srgbClr val="F3ED63"/>
           </a:solidFill>
           <a:ln>
             <a:noFill/>
           </a:ln>
         </p:spPr>
         <p:style>
-          <a:lnRef idx="0"/>
-          <a:fillRef idx="0"/>
-          <a:effectRef idx="0"/>
+          <a:lnRef idx="0">
+            <a:scrgbClr r="0" g="0" b="0"/>
+          </a:lnRef>
+          <a:fillRef idx="0">
+            <a:scrgbClr r="0" g="0" b="0"/>
+          </a:fillRef>
+          <a:effectRef idx="0">
+            <a:scrgbClr r="0" g="0" b="0"/>
+          </a:effectRef>
           <a:fontRef idx="minor"/>
         </p:style>
+        <p:txBody>
+          <a:bodyPr/>
+          <a:lstStyle/>
+          <a:p>
+            <a:endParaRPr lang="en-IL"/>
+          </a:p>
+        </p:txBody>
       </p:sp>
       <p:sp>
         <p:nvSpPr>
@@ -7383,6 +8800,7 @@
             <a:avLst/>
             <a:gdLst/>
             <a:ahLst/>
+            <a:cxnLst/>
             <a:rect l="l" t="t" r="r" b="b"/>
             <a:pathLst>
               <a:path w="12851130" h="117475">
@@ -7406,18 +8824,31 @@
             </a:pathLst>
           </a:custGeom>
           <a:solidFill>
-            <a:srgbClr val="231f20"/>
+            <a:srgbClr val="231F20"/>
           </a:solidFill>
           <a:ln>
             <a:noFill/>
           </a:ln>
         </p:spPr>
         <p:style>
-          <a:lnRef idx="0"/>
-          <a:fillRef idx="0"/>
-          <a:effectRef idx="0"/>
+          <a:lnRef idx="0">
+            <a:scrgbClr r="0" g="0" b="0"/>
+          </a:lnRef>
+          <a:fillRef idx="0">
+            <a:scrgbClr r="0" g="0" b="0"/>
+          </a:fillRef>
+          <a:effectRef idx="0">
+            <a:scrgbClr r="0" g="0" b="0"/>
+          </a:effectRef>
           <a:fontRef idx="minor"/>
         </p:style>
+        <p:txBody>
+          <a:bodyPr/>
+          <a:lstStyle/>
+          <a:p>
+            <a:endParaRPr lang="en-IL"/>
+          </a:p>
+        </p:txBody>
       </p:sp>
       <p:sp>
         <p:nvSpPr>
@@ -7434,6 +8865,7 @@
             <a:avLst/>
             <a:gdLst/>
             <a:ahLst/>
+            <a:cxnLst/>
             <a:rect l="l" t="t" r="r" b="b"/>
             <a:pathLst>
               <a:path w="12851130" h="117475">
@@ -7457,18 +8889,31 @@
             </a:pathLst>
           </a:custGeom>
           <a:solidFill>
-            <a:srgbClr val="231f20"/>
+            <a:srgbClr val="231F20"/>
           </a:solidFill>
           <a:ln>
             <a:noFill/>
           </a:ln>
         </p:spPr>
         <p:style>
-          <a:lnRef idx="0"/>
-          <a:fillRef idx="0"/>
-          <a:effectRef idx="0"/>
+          <a:lnRef idx="0">
+            <a:scrgbClr r="0" g="0" b="0"/>
+          </a:lnRef>
+          <a:fillRef idx="0">
+            <a:scrgbClr r="0" g="0" b="0"/>
+          </a:fillRef>
+          <a:effectRef idx="0">
+            <a:scrgbClr r="0" g="0" b="0"/>
+          </a:effectRef>
           <a:fontRef idx="minor"/>
         </p:style>
+        <p:txBody>
+          <a:bodyPr/>
+          <a:lstStyle/>
+          <a:p>
+            <a:endParaRPr lang="en-IL"/>
+          </a:p>
+        </p:txBody>
       </p:sp>
       <p:sp>
         <p:nvSpPr>
@@ -7485,9 +8930,10 @@
             <a:avLst/>
             <a:gdLst/>
             <a:ahLst/>
+            <a:cxnLst/>
             <a:rect l="l" t="t" r="r" b="b"/>
             <a:pathLst>
-              <a:path w="12851130" h="0">
+              <a:path w="12851130">
                 <a:moveTo>
                   <a:pt x="0" y="0"/>
                 </a:moveTo>
@@ -7498,9 +8944,9 @@
             </a:pathLst>
           </a:custGeom>
           <a:noFill/>
-          <a:ln cap="rnd" w="33480">
+          <a:ln w="33480" cap="rnd">
             <a:solidFill>
-              <a:srgbClr val="231f20"/>
+              <a:srgbClr val="231F20"/>
             </a:solidFill>
             <a:custDash>
               <a:ds d="800000" sp="300000"/>
@@ -7509,11 +8955,24 @@
           </a:ln>
         </p:spPr>
         <p:style>
-          <a:lnRef idx="0"/>
-          <a:fillRef idx="0"/>
-          <a:effectRef idx="0"/>
+          <a:lnRef idx="0">
+            <a:scrgbClr r="0" g="0" b="0"/>
+          </a:lnRef>
+          <a:fillRef idx="0">
+            <a:scrgbClr r="0" g="0" b="0"/>
+          </a:fillRef>
+          <a:effectRef idx="0">
+            <a:scrgbClr r="0" g="0" b="0"/>
+          </a:effectRef>
           <a:fontRef idx="minor"/>
         </p:style>
+        <p:txBody>
+          <a:bodyPr/>
+          <a:lstStyle/>
+          <a:p>
+            <a:endParaRPr lang="en-IL"/>
+          </a:p>
+        </p:txBody>
       </p:sp>
       <p:sp>
         <p:nvSpPr>
@@ -7530,9 +8989,10 @@
             <a:avLst/>
             <a:gdLst/>
             <a:ahLst/>
+            <a:cxnLst/>
             <a:rect l="l" t="t" r="r" b="b"/>
             <a:pathLst>
-              <a:path w="12851130" h="0">
+              <a:path w="12851130">
                 <a:moveTo>
                   <a:pt x="0" y="0"/>
                 </a:moveTo>
@@ -7543,9 +9003,9 @@
             </a:pathLst>
           </a:custGeom>
           <a:noFill/>
-          <a:ln cap="rnd" w="33480">
+          <a:ln w="33480" cap="rnd">
             <a:solidFill>
-              <a:srgbClr val="231f20"/>
+              <a:srgbClr val="231F20"/>
             </a:solidFill>
             <a:custDash>
               <a:ds d="800000" sp="300000"/>
@@ -7554,11 +9014,24 @@
           </a:ln>
         </p:spPr>
         <p:style>
-          <a:lnRef idx="0"/>
-          <a:fillRef idx="0"/>
-          <a:effectRef idx="0"/>
+          <a:lnRef idx="0">
+            <a:scrgbClr r="0" g="0" b="0"/>
+          </a:lnRef>
+          <a:fillRef idx="0">
+            <a:scrgbClr r="0" g="0" b="0"/>
+          </a:fillRef>
+          <a:effectRef idx="0">
+            <a:scrgbClr r="0" g="0" b="0"/>
+          </a:effectRef>
           <a:fontRef idx="minor"/>
         </p:style>
+        <p:txBody>
+          <a:bodyPr/>
+          <a:lstStyle/>
+          <a:p>
+            <a:endParaRPr lang="en-IL"/>
+          </a:p>
+        </p:txBody>
       </p:sp>
       <p:sp>
         <p:nvSpPr>
@@ -7575,6 +9048,7 @@
             <a:avLst/>
             <a:gdLst/>
             <a:ahLst/>
+            <a:cxnLst/>
             <a:rect l="l" t="t" r="r" b="b"/>
             <a:pathLst>
               <a:path w="12851130" h="13460094">
@@ -7598,18 +9072,31 @@
             </a:pathLst>
           </a:custGeom>
           <a:solidFill>
-            <a:srgbClr val="ffffff"/>
+            <a:srgbClr val="FFFFFF"/>
           </a:solidFill>
           <a:ln>
             <a:noFill/>
           </a:ln>
         </p:spPr>
         <p:style>
-          <a:lnRef idx="0"/>
-          <a:fillRef idx="0"/>
-          <a:effectRef idx="0"/>
+          <a:lnRef idx="0">
+            <a:scrgbClr r="0" g="0" b="0"/>
+          </a:lnRef>
+          <a:fillRef idx="0">
+            <a:scrgbClr r="0" g="0" b="0"/>
+          </a:fillRef>
+          <a:effectRef idx="0">
+            <a:scrgbClr r="0" g="0" b="0"/>
+          </a:effectRef>
           <a:fontRef idx="minor"/>
         </p:style>
+        <p:txBody>
+          <a:bodyPr/>
+          <a:lstStyle/>
+          <a:p>
+            <a:endParaRPr lang="en-IL"/>
+          </a:p>
+        </p:txBody>
       </p:sp>
       <p:sp>
         <p:nvSpPr>
@@ -7626,6 +9113,7 @@
             <a:avLst/>
             <a:gdLst/>
             <a:ahLst/>
+            <a:cxnLst/>
             <a:rect l="l" t="t" r="r" b="b"/>
             <a:pathLst>
               <a:path w="12228194" h="3667125">
@@ -7649,18 +9137,31 @@
             </a:pathLst>
           </a:custGeom>
           <a:solidFill>
-            <a:srgbClr val="fbf9f9"/>
+            <a:srgbClr val="FBF9F9"/>
           </a:solidFill>
           <a:ln>
             <a:noFill/>
           </a:ln>
         </p:spPr>
         <p:style>
-          <a:lnRef idx="0"/>
-          <a:fillRef idx="0"/>
-          <a:effectRef idx="0"/>
+          <a:lnRef idx="0">
+            <a:scrgbClr r="0" g="0" b="0"/>
+          </a:lnRef>
+          <a:fillRef idx="0">
+            <a:scrgbClr r="0" g="0" b="0"/>
+          </a:fillRef>
+          <a:effectRef idx="0">
+            <a:scrgbClr r="0" g="0" b="0"/>
+          </a:effectRef>
           <a:fontRef idx="minor"/>
         </p:style>
+        <p:txBody>
+          <a:bodyPr/>
+          <a:lstStyle/>
+          <a:p>
+            <a:endParaRPr lang="en-IL"/>
+          </a:p>
+        </p:txBody>
       </p:sp>
       <p:sp>
         <p:nvSpPr>
@@ -7677,6 +9178,7 @@
             <a:avLst/>
             <a:gdLst/>
             <a:ahLst/>
+            <a:cxnLst/>
             <a:rect l="l" t="t" r="r" b="b"/>
             <a:pathLst>
               <a:path w="12228194" h="7998459">
@@ -7700,18 +9202,31 @@
             </a:pathLst>
           </a:custGeom>
           <a:solidFill>
-            <a:srgbClr val="fbf9f9"/>
+            <a:srgbClr val="FBF9F9"/>
           </a:solidFill>
           <a:ln>
             <a:noFill/>
           </a:ln>
         </p:spPr>
         <p:style>
-          <a:lnRef idx="0"/>
-          <a:fillRef idx="0"/>
-          <a:effectRef idx="0"/>
+          <a:lnRef idx="0">
+            <a:scrgbClr r="0" g="0" b="0"/>
+          </a:lnRef>
+          <a:fillRef idx="0">
+            <a:scrgbClr r="0" g="0" b="0"/>
+          </a:fillRef>
+          <a:effectRef idx="0">
+            <a:scrgbClr r="0" g="0" b="0"/>
+          </a:effectRef>
           <a:fontRef idx="minor"/>
         </p:style>
+        <p:txBody>
+          <a:bodyPr/>
+          <a:lstStyle/>
+          <a:p>
+            <a:endParaRPr lang="en-IL"/>
+          </a:p>
+        </p:txBody>
       </p:sp>
       <p:sp>
         <p:nvSpPr>
@@ -7728,6 +9243,7 @@
             <a:avLst/>
             <a:gdLst/>
             <a:ahLst/>
+            <a:cxnLst/>
             <a:rect l="l" t="t" r="r" b="b"/>
             <a:pathLst>
               <a:path w="12228194" h="1572259">
@@ -7751,18 +9267,31 @@
             </a:pathLst>
           </a:custGeom>
           <a:solidFill>
-            <a:srgbClr val="fbf9f9"/>
+            <a:srgbClr val="FBF9F9"/>
           </a:solidFill>
           <a:ln>
             <a:noFill/>
           </a:ln>
         </p:spPr>
         <p:style>
-          <a:lnRef idx="0"/>
-          <a:fillRef idx="0"/>
-          <a:effectRef idx="0"/>
+          <a:lnRef idx="0">
+            <a:scrgbClr r="0" g="0" b="0"/>
+          </a:lnRef>
+          <a:fillRef idx="0">
+            <a:scrgbClr r="0" g="0" b="0"/>
+          </a:fillRef>
+          <a:effectRef idx="0">
+            <a:scrgbClr r="0" g="0" b="0"/>
+          </a:effectRef>
           <a:fontRef idx="minor"/>
         </p:style>
+        <p:txBody>
+          <a:bodyPr/>
+          <a:lstStyle/>
+          <a:p>
+            <a:endParaRPr lang="en-IL"/>
+          </a:p>
+        </p:txBody>
       </p:sp>
       <p:sp>
         <p:nvSpPr>
@@ -7784,9 +9313,10 @@
           </a:prstGeom>
         </p:spPr>
         <p:txBody>
-          <a:bodyPr lIns="0" rIns="0" tIns="0" bIns="0"/>
-          <a:p>
-            <a:endParaRPr b="0" lang="en" sz="2400" spc="-1" strike="noStrike">
+          <a:bodyPr lIns="0" tIns="0" rIns="0" bIns="0"/>
+          <a:lstStyle/>
+          <a:p>
+            <a:endParaRPr lang="en" sz="2400" b="0" strike="noStrike" spc="-1">
               <a:latin typeface="Times New Roman"/>
             </a:endParaRPr>
           </a:p>
@@ -7812,7 +9342,8 @@
           </a:prstGeom>
         </p:spPr>
         <p:txBody>
-          <a:bodyPr lIns="0" rIns="0" tIns="0" bIns="0"/>
+          <a:bodyPr lIns="0" tIns="0" rIns="0" bIns="0"/>
+          <a:lstStyle/>
           <a:p>
             <a:pPr>
               <a:lnSpc>
@@ -7820,15 +9351,15 @@
               </a:lnSpc>
             </a:pPr>
             <a:fld id="{B6219E94-DEAD-420B-A1AE-08F1DE210746}" type="datetime">
-              <a:rPr b="0" lang="en" sz="3110" spc="-1" strike="noStrike">
+              <a:rPr lang="en" sz="3110" b="0" strike="noStrike" spc="-1">
                 <a:solidFill>
-                  <a:srgbClr val="b2b2b2"/>
+                  <a:srgbClr val="B2B2B2"/>
                 </a:solidFill>
                 <a:latin typeface="Calibri"/>
               </a:rPr>
-              <a:t>6/11/26</a:t>
+              <a:t>6/28/2026</a:t>
             </a:fld>
-            <a:endParaRPr b="0" lang="en" sz="3110" spc="-1" strike="noStrike">
+            <a:endParaRPr lang="en" sz="3110" b="0" strike="noStrike" spc="-1">
               <a:latin typeface="Times New Roman"/>
             </a:endParaRPr>
           </a:p>
@@ -7854,7 +9385,8 @@
           </a:prstGeom>
         </p:spPr>
         <p:txBody>
-          <a:bodyPr lIns="0" rIns="0" tIns="0" bIns="0"/>
+          <a:bodyPr lIns="0" tIns="0" rIns="0" bIns="0"/>
+          <a:lstStyle/>
           <a:p>
             <a:pPr algn="r">
               <a:lnSpc>
@@ -7862,15 +9394,15 @@
               </a:lnSpc>
             </a:pPr>
             <a:fld id="{3A74D029-085B-4BF3-91BF-4E1BCD39ABE2}" type="slidenum">
-              <a:rPr b="0" lang="en" sz="3110" spc="-1" strike="noStrike">
+              <a:rPr lang="en" sz="3110" b="0" strike="noStrike" spc="-1">
                 <a:solidFill>
-                  <a:srgbClr val="b2b2b2"/>
+                  <a:srgbClr val="B2B2B2"/>
                 </a:solidFill>
                 <a:latin typeface="Calibri"/>
               </a:rPr>
-              <a:t>1</a:t>
+              <a:t>‹#›</a:t>
             </a:fld>
-            <a:endParaRPr b="0" lang="en" sz="3110" spc="-1" strike="noStrike">
+            <a:endParaRPr lang="en" sz="3110" b="0" strike="noStrike" spc="-1">
               <a:latin typeface="Times New Roman"/>
             </a:endParaRPr>
           </a:p>
@@ -7896,13 +9428,20 @@
           </a:ln>
         </p:spPr>
         <p:style>
-          <a:lnRef idx="0"/>
-          <a:fillRef idx="0"/>
-          <a:effectRef idx="0"/>
+          <a:lnRef idx="0">
+            <a:scrgbClr r="0" g="0" b="0"/>
+          </a:lnRef>
+          <a:fillRef idx="0">
+            <a:scrgbClr r="0" g="0" b="0"/>
+          </a:fillRef>
+          <a:effectRef idx="0">
+            <a:scrgbClr r="0" g="0" b="0"/>
+          </a:effectRef>
           <a:fontRef idx="minor"/>
         </p:style>
         <p:txBody>
-          <a:bodyPr lIns="0" rIns="0" tIns="27360" bIns="0"/>
+          <a:bodyPr lIns="0" tIns="27360" rIns="0" bIns="0"/>
+          <a:lstStyle/>
           <a:p>
             <a:pPr marL="21600">
               <a:lnSpc>
@@ -7913,33 +9452,33 @@
               </a:spcBef>
             </a:pPr>
             <a:r>
-              <a:rPr b="1" lang="en" sz="5400" spc="15" strike="noStrike">
+              <a:rPr lang="en" sz="5400" b="1" strike="noStrike" spc="15">
                 <a:solidFill>
-                  <a:srgbClr val="231f20"/>
+                  <a:srgbClr val="231F20"/>
                 </a:solidFill>
                 <a:latin typeface="Arial"/>
               </a:rPr>
               <a:t>Final Project - Software</a:t>
             </a:r>
             <a:r>
-              <a:rPr b="1" lang="en" sz="5400" spc="265" strike="noStrike">
+              <a:rPr lang="en" sz="5400" b="1" strike="noStrike" spc="265">
                 <a:solidFill>
-                  <a:srgbClr val="231f20"/>
+                  <a:srgbClr val="231F20"/>
                 </a:solidFill>
                 <a:latin typeface="Arial"/>
               </a:rPr>
               <a:t> </a:t>
             </a:r>
             <a:r>
-              <a:rPr b="1" lang="en" sz="5400" spc="24" strike="noStrike">
+              <a:rPr lang="en" sz="5400" b="1" strike="noStrike" spc="24">
                 <a:solidFill>
-                  <a:srgbClr val="231f20"/>
+                  <a:srgbClr val="231F20"/>
                 </a:solidFill>
                 <a:latin typeface="Arial"/>
               </a:rPr>
               <a:t>Engineering</a:t>
             </a:r>
-            <a:endParaRPr b="0" lang="en" sz="5400" spc="-1" strike="noStrike">
+            <a:endParaRPr lang="en" sz="5400" b="0" strike="noStrike" spc="-1">
               <a:latin typeface="Arial"/>
             </a:endParaRPr>
           </a:p>
@@ -7960,7 +9499,7 @@
             <a:avLst/>
           </a:prstGeom>
           <a:blipFill rotWithShape="0">
-            <a:blip r:embed="rId4"/>
+            <a:blip r:embed="rId16"/>
             <a:stretch>
               <a:fillRect/>
             </a:stretch>
@@ -7970,11 +9509,24 @@
           </a:ln>
         </p:spPr>
         <p:style>
-          <a:lnRef idx="0"/>
-          <a:fillRef idx="0"/>
-          <a:effectRef idx="0"/>
+          <a:lnRef idx="0">
+            <a:scrgbClr r="0" g="0" b="0"/>
+          </a:lnRef>
+          <a:fillRef idx="0">
+            <a:scrgbClr r="0" g="0" b="0"/>
+          </a:fillRef>
+          <a:effectRef idx="0">
+            <a:scrgbClr r="0" g="0" b="0"/>
+          </a:effectRef>
           <a:fontRef idx="minor"/>
         </p:style>
+        <p:txBody>
+          <a:bodyPr/>
+          <a:lstStyle/>
+          <a:p>
+            <a:endParaRPr lang="en-IL"/>
+          </a:p>
+        </p:txBody>
       </p:sp>
       <p:sp>
         <p:nvSpPr>
@@ -7991,7 +9543,7 @@
             <a:avLst/>
           </a:prstGeom>
           <a:blipFill rotWithShape="0">
-            <a:blip r:embed="rId5"/>
+            <a:blip r:embed="rId17"/>
             <a:stretch>
               <a:fillRect/>
             </a:stretch>
@@ -8001,11 +9553,24 @@
           </a:ln>
         </p:spPr>
         <p:style>
-          <a:lnRef idx="0"/>
-          <a:fillRef idx="0"/>
-          <a:effectRef idx="0"/>
+          <a:lnRef idx="0">
+            <a:scrgbClr r="0" g="0" b="0"/>
+          </a:lnRef>
+          <a:fillRef idx="0">
+            <a:scrgbClr r="0" g="0" b="0"/>
+          </a:fillRef>
+          <a:effectRef idx="0">
+            <a:scrgbClr r="0" g="0" b="0"/>
+          </a:effectRef>
           <a:fontRef idx="minor"/>
         </p:style>
+        <p:txBody>
+          <a:bodyPr/>
+          <a:lstStyle/>
+          <a:p>
+            <a:endParaRPr lang="en-IL"/>
+          </a:p>
+        </p:txBody>
       </p:sp>
       <p:sp>
         <p:nvSpPr>
@@ -8027,10 +9592,11 @@
           </a:prstGeom>
         </p:spPr>
         <p:txBody>
-          <a:bodyPr lIns="0" rIns="0" tIns="0" bIns="0" anchor="ctr"/>
+          <a:bodyPr lIns="0" tIns="0" rIns="0" bIns="0" anchor="ctr"/>
+          <a:lstStyle/>
           <a:p>
             <a:r>
-              <a:rPr b="0" lang="he-IL" sz="3110" spc="-1" strike="noStrike">
+              <a:rPr lang="he-IL" sz="3110" b="0" strike="noStrike" spc="-1">
                 <a:solidFill>
                   <a:srgbClr val="000000"/>
                 </a:solidFill>
@@ -8038,12 +9604,6 @@
               </a:rPr>
               <a:t>Click to edit the title text format</a:t>
             </a:r>
-            <a:endParaRPr b="0" lang="he-IL" sz="3110" spc="-1" strike="noStrike">
-              <a:solidFill>
-                <a:srgbClr val="000000"/>
-              </a:solidFill>
-              <a:latin typeface="Calibri"/>
-            </a:endParaRPr>
           </a:p>
         </p:txBody>
       </p:sp>
@@ -8067,9 +9627,10 @@
           </a:prstGeom>
         </p:spPr>
         <p:txBody>
-          <a:bodyPr lIns="0" rIns="0" tIns="0" bIns="0">
+          <a:bodyPr lIns="0" tIns="0" rIns="0" bIns="0">
             <a:normAutofit/>
           </a:bodyPr>
+          <a:lstStyle/>
           <a:p>
             <a:pPr marL="432000" indent="-324000">
               <a:spcBef>
@@ -8083,7 +9644,7 @@
               <a:buChar char=""/>
             </a:pPr>
             <a:r>
-              <a:rPr b="0" lang="he-IL" sz="1800" spc="-1" strike="noStrike">
+              <a:rPr lang="he-IL" sz="1800" b="0" strike="noStrike" spc="-1">
                 <a:solidFill>
                   <a:srgbClr val="000000"/>
                 </a:solidFill>
@@ -8091,15 +9652,9 @@
               </a:rPr>
               <a:t>Click to edit the outline text format</a:t>
             </a:r>
-            <a:endParaRPr b="0" lang="he-IL" sz="1800" spc="-1" strike="noStrike">
-              <a:solidFill>
-                <a:srgbClr val="000000"/>
-              </a:solidFill>
-              <a:latin typeface="Calibri"/>
-            </a:endParaRPr>
-          </a:p>
-          <a:p>
-            <a:pPr lvl="1" marL="864000" indent="-324000">
+          </a:p>
+          <a:p>
+            <a:pPr marL="864000" lvl="1" indent="-324000">
               <a:spcBef>
                 <a:spcPts val="1134"/>
               </a:spcBef>
@@ -8111,7 +9666,7 @@
               <a:buChar char=""/>
             </a:pPr>
             <a:r>
-              <a:rPr b="0" lang="he-IL" sz="1800" spc="-1" strike="noStrike">
+              <a:rPr lang="he-IL" sz="1800" b="0" strike="noStrike" spc="-1">
                 <a:solidFill>
                   <a:srgbClr val="000000"/>
                 </a:solidFill>
@@ -8119,15 +9674,9 @@
               </a:rPr>
               <a:t>Second Outline Level</a:t>
             </a:r>
-            <a:endParaRPr b="0" lang="he-IL" sz="1800" spc="-1" strike="noStrike">
-              <a:solidFill>
-                <a:srgbClr val="000000"/>
-              </a:solidFill>
-              <a:latin typeface="Calibri"/>
-            </a:endParaRPr>
-          </a:p>
-          <a:p>
-            <a:pPr lvl="2" marL="1296000" indent="-288000">
+          </a:p>
+          <a:p>
+            <a:pPr marL="1296000" lvl="2" indent="-288000">
               <a:spcBef>
                 <a:spcPts val="850"/>
               </a:spcBef>
@@ -8139,7 +9688,7 @@
               <a:buChar char=""/>
             </a:pPr>
             <a:r>
-              <a:rPr b="0" lang="he-IL" sz="1800" spc="-1" strike="noStrike">
+              <a:rPr lang="he-IL" sz="1800" b="0" strike="noStrike" spc="-1">
                 <a:solidFill>
                   <a:srgbClr val="000000"/>
                 </a:solidFill>
@@ -8147,15 +9696,9 @@
               </a:rPr>
               <a:t>Third Outline Level</a:t>
             </a:r>
-            <a:endParaRPr b="0" lang="he-IL" sz="1800" spc="-1" strike="noStrike">
-              <a:solidFill>
-                <a:srgbClr val="000000"/>
-              </a:solidFill>
-              <a:latin typeface="Calibri"/>
-            </a:endParaRPr>
-          </a:p>
-          <a:p>
-            <a:pPr lvl="3" marL="1728000" indent="-216000">
+          </a:p>
+          <a:p>
+            <a:pPr marL="1728000" lvl="3" indent="-216000">
               <a:spcBef>
                 <a:spcPts val="567"/>
               </a:spcBef>
@@ -8167,7 +9710,7 @@
               <a:buChar char=""/>
             </a:pPr>
             <a:r>
-              <a:rPr b="0" lang="he-IL" sz="1800" spc="-1" strike="noStrike">
+              <a:rPr lang="he-IL" sz="1800" b="0" strike="noStrike" spc="-1">
                 <a:solidFill>
                   <a:srgbClr val="000000"/>
                 </a:solidFill>
@@ -8175,15 +9718,9 @@
               </a:rPr>
               <a:t>Fourth Outline Level</a:t>
             </a:r>
-            <a:endParaRPr b="0" lang="he-IL" sz="1800" spc="-1" strike="noStrike">
-              <a:solidFill>
-                <a:srgbClr val="000000"/>
-              </a:solidFill>
-              <a:latin typeface="Calibri"/>
-            </a:endParaRPr>
-          </a:p>
-          <a:p>
-            <a:pPr lvl="4" marL="2160000" indent="-216000">
+          </a:p>
+          <a:p>
+            <a:pPr marL="2160000" lvl="4" indent="-216000">
               <a:spcBef>
                 <a:spcPts val="283"/>
               </a:spcBef>
@@ -8195,7 +9732,7 @@
               <a:buChar char=""/>
             </a:pPr>
             <a:r>
-              <a:rPr b="0" lang="he-IL" sz="2000" spc="-1" strike="noStrike">
+              <a:rPr lang="he-IL" sz="2000" b="0" strike="noStrike" spc="-1">
                 <a:solidFill>
                   <a:srgbClr val="000000"/>
                 </a:solidFill>
@@ -8203,15 +9740,9 @@
               </a:rPr>
               <a:t>Fifth Outline Level</a:t>
             </a:r>
-            <a:endParaRPr b="0" lang="he-IL" sz="2000" spc="-1" strike="noStrike">
-              <a:solidFill>
-                <a:srgbClr val="000000"/>
-              </a:solidFill>
-              <a:latin typeface="Calibri"/>
-            </a:endParaRPr>
-          </a:p>
-          <a:p>
-            <a:pPr lvl="5" marL="2592000" indent="-216000">
+          </a:p>
+          <a:p>
+            <a:pPr marL="2592000" lvl="5" indent="-216000">
               <a:spcBef>
                 <a:spcPts val="283"/>
               </a:spcBef>
@@ -8223,7 +9754,7 @@
               <a:buChar char=""/>
             </a:pPr>
             <a:r>
-              <a:rPr b="0" lang="he-IL" sz="2000" spc="-1" strike="noStrike">
+              <a:rPr lang="he-IL" sz="2000" b="0" strike="noStrike" spc="-1">
                 <a:solidFill>
                   <a:srgbClr val="000000"/>
                 </a:solidFill>
@@ -8231,15 +9762,9 @@
               </a:rPr>
               <a:t>Sixth Outline Level</a:t>
             </a:r>
-            <a:endParaRPr b="0" lang="he-IL" sz="2000" spc="-1" strike="noStrike">
-              <a:solidFill>
-                <a:srgbClr val="000000"/>
-              </a:solidFill>
-              <a:latin typeface="Calibri"/>
-            </a:endParaRPr>
-          </a:p>
-          <a:p>
-            <a:pPr lvl="6" marL="3024000" indent="-216000">
+          </a:p>
+          <a:p>
+            <a:pPr marL="3024000" lvl="6" indent="-216000">
               <a:spcBef>
                 <a:spcPts val="283"/>
               </a:spcBef>
@@ -8251,7 +9776,7 @@
               <a:buChar char=""/>
             </a:pPr>
             <a:r>
-              <a:rPr b="0" lang="he-IL" sz="2000" spc="-1" strike="noStrike">
+              <a:rPr lang="he-IL" sz="2000" b="0" strike="noStrike" spc="-1">
                 <a:solidFill>
                   <a:srgbClr val="000000"/>
                 </a:solidFill>
@@ -8259,37 +9784,311 @@
               </a:rPr>
               <a:t>Seventh Outline Level</a:t>
             </a:r>
-            <a:endParaRPr b="0" lang="he-IL" sz="2000" spc="-1" strike="noStrike">
-              <a:solidFill>
-                <a:srgbClr val="000000"/>
-              </a:solidFill>
-              <a:latin typeface="Calibri"/>
-            </a:endParaRPr>
           </a:p>
         </p:txBody>
       </p:sp>
     </p:spTree>
   </p:cSld>
-  <p:clrMap bg1="lt1" bg2="lt2" tx1="dk1" tx2="dk2" accent1="accent1" accent2="accent2" accent3="accent3" accent4="accent4" accent5="accent5" accent6="accent6" hlink="hlink" folHlink="folHlink"/>
+  <p:clrMap bg1="lt1" tx1="dk1" bg2="lt2" tx2="dk2" accent1="accent1" accent2="accent2" accent3="accent3" accent4="accent4" accent5="accent5" accent6="accent6" hlink="hlink" folHlink="folHlink"/>
   <p:sldLayoutIdLst>
-    <p:sldLayoutId id="2147483649" r:id="rId6"/>
-    <p:sldLayoutId id="2147483650" r:id="rId7"/>
-    <p:sldLayoutId id="2147483651" r:id="rId8"/>
-    <p:sldLayoutId id="2147483652" r:id="rId9"/>
-    <p:sldLayoutId id="2147483653" r:id="rId10"/>
-    <p:sldLayoutId id="2147483654" r:id="rId11"/>
-    <p:sldLayoutId id="2147483655" r:id="rId12"/>
-    <p:sldLayoutId id="2147483656" r:id="rId13"/>
-    <p:sldLayoutId id="2147483657" r:id="rId14"/>
-    <p:sldLayoutId id="2147483658" r:id="rId15"/>
-    <p:sldLayoutId id="2147483659" r:id="rId16"/>
-    <p:sldLayoutId id="2147483660" r:id="rId17"/>
+    <p:sldLayoutId id="2147483649" r:id="rId1"/>
+    <p:sldLayoutId id="2147483650" r:id="rId2"/>
+    <p:sldLayoutId id="2147483651" r:id="rId3"/>
+    <p:sldLayoutId id="2147483652" r:id="rId4"/>
+    <p:sldLayoutId id="2147483653" r:id="rId5"/>
+    <p:sldLayoutId id="2147483654" r:id="rId6"/>
+    <p:sldLayoutId id="2147483655" r:id="rId7"/>
+    <p:sldLayoutId id="2147483656" r:id="rId8"/>
+    <p:sldLayoutId id="2147483657" r:id="rId9"/>
+    <p:sldLayoutId id="2147483658" r:id="rId10"/>
+    <p:sldLayoutId id="2147483659" r:id="rId11"/>
+    <p:sldLayoutId id="2147483660" r:id="rId12"/>
   </p:sldLayoutIdLst>
+  <p:txStyles>
+    <p:titleStyle>
+      <a:lvl1pPr algn="l" defTabSz="914400" rtl="0" eaLnBrk="1" latinLnBrk="0" hangingPunct="1">
+        <a:lnSpc>
+          <a:spcPct val="90000"/>
+        </a:lnSpc>
+        <a:spcBef>
+          <a:spcPct val="0"/>
+        </a:spcBef>
+        <a:buNone/>
+        <a:defRPr sz="4400" kern="1200">
+          <a:solidFill>
+            <a:schemeClr val="tx1"/>
+          </a:solidFill>
+          <a:latin typeface="+mj-lt"/>
+          <a:ea typeface="+mj-ea"/>
+          <a:cs typeface="+mj-cs"/>
+        </a:defRPr>
+      </a:lvl1pPr>
+    </p:titleStyle>
+    <p:bodyStyle>
+      <a:lvl1pPr marL="228600" indent="-228600" algn="l" defTabSz="914400" rtl="0" eaLnBrk="1" latinLnBrk="0" hangingPunct="1">
+        <a:lnSpc>
+          <a:spcPct val="90000"/>
+        </a:lnSpc>
+        <a:spcBef>
+          <a:spcPts val="1000"/>
+        </a:spcBef>
+        <a:buFont typeface="Arial" panose="020B0604020202020204" pitchFamily="34" charset="0"/>
+        <a:buChar char="•"/>
+        <a:defRPr sz="2800" kern="1200">
+          <a:solidFill>
+            <a:schemeClr val="tx1"/>
+          </a:solidFill>
+          <a:latin typeface="+mn-lt"/>
+          <a:ea typeface="+mn-ea"/>
+          <a:cs typeface="+mn-cs"/>
+        </a:defRPr>
+      </a:lvl1pPr>
+      <a:lvl2pPr marL="685800" indent="-228600" algn="l" defTabSz="914400" rtl="0" eaLnBrk="1" latinLnBrk="0" hangingPunct="1">
+        <a:lnSpc>
+          <a:spcPct val="90000"/>
+        </a:lnSpc>
+        <a:spcBef>
+          <a:spcPts val="500"/>
+        </a:spcBef>
+        <a:buFont typeface="Arial" panose="020B0604020202020204" pitchFamily="34" charset="0"/>
+        <a:buChar char="•"/>
+        <a:defRPr sz="2400" kern="1200">
+          <a:solidFill>
+            <a:schemeClr val="tx1"/>
+          </a:solidFill>
+          <a:latin typeface="+mn-lt"/>
+          <a:ea typeface="+mn-ea"/>
+          <a:cs typeface="+mn-cs"/>
+        </a:defRPr>
+      </a:lvl2pPr>
+      <a:lvl3pPr marL="1143000" indent="-228600" algn="l" defTabSz="914400" rtl="0" eaLnBrk="1" latinLnBrk="0" hangingPunct="1">
+        <a:lnSpc>
+          <a:spcPct val="90000"/>
+        </a:lnSpc>
+        <a:spcBef>
+          <a:spcPts val="500"/>
+        </a:spcBef>
+        <a:buFont typeface="Arial" panose="020B0604020202020204" pitchFamily="34" charset="0"/>
+        <a:buChar char="•"/>
+        <a:defRPr sz="2000" kern="1200">
+          <a:solidFill>
+            <a:schemeClr val="tx1"/>
+          </a:solidFill>
+          <a:latin typeface="+mn-lt"/>
+          <a:ea typeface="+mn-ea"/>
+          <a:cs typeface="+mn-cs"/>
+        </a:defRPr>
+      </a:lvl3pPr>
+      <a:lvl4pPr marL="1600200" indent="-228600" algn="l" defTabSz="914400" rtl="0" eaLnBrk="1" latinLnBrk="0" hangingPunct="1">
+        <a:lnSpc>
+          <a:spcPct val="90000"/>
+        </a:lnSpc>
+        <a:spcBef>
+          <a:spcPts val="500"/>
+        </a:spcBef>
+        <a:buFont typeface="Arial" panose="020B0604020202020204" pitchFamily="34" charset="0"/>
+        <a:buChar char="•"/>
+        <a:defRPr sz="1800" kern="1200">
+          <a:solidFill>
+            <a:schemeClr val="tx1"/>
+          </a:solidFill>
+          <a:latin typeface="+mn-lt"/>
+          <a:ea typeface="+mn-ea"/>
+          <a:cs typeface="+mn-cs"/>
+        </a:defRPr>
+      </a:lvl4pPr>
+      <a:lvl5pPr marL="2057400" indent="-228600" algn="l" defTabSz="914400" rtl="0" eaLnBrk="1" latinLnBrk="0" hangingPunct="1">
+        <a:lnSpc>
+          <a:spcPct val="90000"/>
+        </a:lnSpc>
+        <a:spcBef>
+          <a:spcPts val="500"/>
+        </a:spcBef>
+        <a:buFont typeface="Arial" panose="020B0604020202020204" pitchFamily="34" charset="0"/>
+        <a:buChar char="•"/>
+        <a:defRPr sz="1800" kern="1200">
+          <a:solidFill>
+            <a:schemeClr val="tx1"/>
+          </a:solidFill>
+          <a:latin typeface="+mn-lt"/>
+          <a:ea typeface="+mn-ea"/>
+          <a:cs typeface="+mn-cs"/>
+        </a:defRPr>
+      </a:lvl5pPr>
+      <a:lvl6pPr marL="2514600" indent="-228600" algn="l" defTabSz="914400" rtl="0" eaLnBrk="1" latinLnBrk="0" hangingPunct="1">
+        <a:lnSpc>
+          <a:spcPct val="90000"/>
+        </a:lnSpc>
+        <a:spcBef>
+          <a:spcPts val="500"/>
+        </a:spcBef>
+        <a:buFont typeface="Arial" panose="020B0604020202020204" pitchFamily="34" charset="0"/>
+        <a:buChar char="•"/>
+        <a:defRPr sz="1800" kern="1200">
+          <a:solidFill>
+            <a:schemeClr val="tx1"/>
+          </a:solidFill>
+          <a:latin typeface="+mn-lt"/>
+          <a:ea typeface="+mn-ea"/>
+          <a:cs typeface="+mn-cs"/>
+        </a:defRPr>
+      </a:lvl6pPr>
+      <a:lvl7pPr marL="2971800" indent="-228600" algn="l" defTabSz="914400" rtl="0" eaLnBrk="1" latinLnBrk="0" hangingPunct="1">
+        <a:lnSpc>
+          <a:spcPct val="90000"/>
+        </a:lnSpc>
+        <a:spcBef>
+          <a:spcPts val="500"/>
+        </a:spcBef>
+        <a:buFont typeface="Arial" panose="020B0604020202020204" pitchFamily="34" charset="0"/>
+        <a:buChar char="•"/>
+        <a:defRPr sz="1800" kern="1200">
+          <a:solidFill>
+            <a:schemeClr val="tx1"/>
+          </a:solidFill>
+          <a:latin typeface="+mn-lt"/>
+          <a:ea typeface="+mn-ea"/>
+          <a:cs typeface="+mn-cs"/>
+        </a:defRPr>
+      </a:lvl7pPr>
+      <a:lvl8pPr marL="3429000" indent="-228600" algn="l" defTabSz="914400" rtl="0" eaLnBrk="1" latinLnBrk="0" hangingPunct="1">
+        <a:lnSpc>
+          <a:spcPct val="90000"/>
+        </a:lnSpc>
+        <a:spcBef>
+          <a:spcPts val="500"/>
+        </a:spcBef>
+        <a:buFont typeface="Arial" panose="020B0604020202020204" pitchFamily="34" charset="0"/>
+        <a:buChar char="•"/>
+        <a:defRPr sz="1800" kern="1200">
+          <a:solidFill>
+            <a:schemeClr val="tx1"/>
+          </a:solidFill>
+          <a:latin typeface="+mn-lt"/>
+          <a:ea typeface="+mn-ea"/>
+          <a:cs typeface="+mn-cs"/>
+        </a:defRPr>
+      </a:lvl8pPr>
+      <a:lvl9pPr marL="3886200" indent="-228600" algn="l" defTabSz="914400" rtl="0" eaLnBrk="1" latinLnBrk="0" hangingPunct="1">
+        <a:lnSpc>
+          <a:spcPct val="90000"/>
+        </a:lnSpc>
+        <a:spcBef>
+          <a:spcPts val="500"/>
+        </a:spcBef>
+        <a:buFont typeface="Arial" panose="020B0604020202020204" pitchFamily="34" charset="0"/>
+        <a:buChar char="•"/>
+        <a:defRPr sz="1800" kern="1200">
+          <a:solidFill>
+            <a:schemeClr val="tx1"/>
+          </a:solidFill>
+          <a:latin typeface="+mn-lt"/>
+          <a:ea typeface="+mn-ea"/>
+          <a:cs typeface="+mn-cs"/>
+        </a:defRPr>
+      </a:lvl9pPr>
+    </p:bodyStyle>
+    <p:otherStyle>
+      <a:defPPr>
+        <a:defRPr lang="en-IL"/>
+      </a:defPPr>
+      <a:lvl1pPr marL="0" algn="l" defTabSz="914400" rtl="0" eaLnBrk="1" latinLnBrk="0" hangingPunct="1">
+        <a:defRPr sz="1800" kern="1200">
+          <a:solidFill>
+            <a:schemeClr val="tx1"/>
+          </a:solidFill>
+          <a:latin typeface="+mn-lt"/>
+          <a:ea typeface="+mn-ea"/>
+          <a:cs typeface="+mn-cs"/>
+        </a:defRPr>
+      </a:lvl1pPr>
+      <a:lvl2pPr marL="457200" algn="l" defTabSz="914400" rtl="0" eaLnBrk="1" latinLnBrk="0" hangingPunct="1">
+        <a:defRPr sz="1800" kern="1200">
+          <a:solidFill>
+            <a:schemeClr val="tx1"/>
+          </a:solidFill>
+          <a:latin typeface="+mn-lt"/>
+          <a:ea typeface="+mn-ea"/>
+          <a:cs typeface="+mn-cs"/>
+        </a:defRPr>
+      </a:lvl2pPr>
+      <a:lvl3pPr marL="914400" algn="l" defTabSz="914400" rtl="0" eaLnBrk="1" latinLnBrk="0" hangingPunct="1">
+        <a:defRPr sz="1800" kern="1200">
+          <a:solidFill>
+            <a:schemeClr val="tx1"/>
+          </a:solidFill>
+          <a:latin typeface="+mn-lt"/>
+          <a:ea typeface="+mn-ea"/>
+          <a:cs typeface="+mn-cs"/>
+        </a:defRPr>
+      </a:lvl3pPr>
+      <a:lvl4pPr marL="1371600" algn="l" defTabSz="914400" rtl="0" eaLnBrk="1" latinLnBrk="0" hangingPunct="1">
+        <a:defRPr sz="1800" kern="1200">
+          <a:solidFill>
+            <a:schemeClr val="tx1"/>
+          </a:solidFill>
+          <a:latin typeface="+mn-lt"/>
+          <a:ea typeface="+mn-ea"/>
+          <a:cs typeface="+mn-cs"/>
+        </a:defRPr>
+      </a:lvl4pPr>
+      <a:lvl5pPr marL="1828800" algn="l" defTabSz="914400" rtl="0" eaLnBrk="1" latinLnBrk="0" hangingPunct="1">
+        <a:defRPr sz="1800" kern="1200">
+          <a:solidFill>
+            <a:schemeClr val="tx1"/>
+          </a:solidFill>
+          <a:latin typeface="+mn-lt"/>
+          <a:ea typeface="+mn-ea"/>
+          <a:cs typeface="+mn-cs"/>
+        </a:defRPr>
+      </a:lvl5pPr>
+      <a:lvl6pPr marL="2286000" algn="l" defTabSz="914400" rtl="0" eaLnBrk="1" latinLnBrk="0" hangingPunct="1">
+        <a:defRPr sz="1800" kern="1200">
+          <a:solidFill>
+            <a:schemeClr val="tx1"/>
+          </a:solidFill>
+          <a:latin typeface="+mn-lt"/>
+          <a:ea typeface="+mn-ea"/>
+          <a:cs typeface="+mn-cs"/>
+        </a:defRPr>
+      </a:lvl6pPr>
+      <a:lvl7pPr marL="2743200" algn="l" defTabSz="914400" rtl="0" eaLnBrk="1" latinLnBrk="0" hangingPunct="1">
+        <a:defRPr sz="1800" kern="1200">
+          <a:solidFill>
+            <a:schemeClr val="tx1"/>
+          </a:solidFill>
+          <a:latin typeface="+mn-lt"/>
+          <a:ea typeface="+mn-ea"/>
+          <a:cs typeface="+mn-cs"/>
+        </a:defRPr>
+      </a:lvl7pPr>
+      <a:lvl8pPr marL="3200400" algn="l" defTabSz="914400" rtl="0" eaLnBrk="1" latinLnBrk="0" hangingPunct="1">
+        <a:defRPr sz="1800" kern="1200">
+          <a:solidFill>
+            <a:schemeClr val="tx1"/>
+          </a:solidFill>
+          <a:latin typeface="+mn-lt"/>
+          <a:ea typeface="+mn-ea"/>
+          <a:cs typeface="+mn-cs"/>
+        </a:defRPr>
+      </a:lvl8pPr>
+      <a:lvl9pPr marL="3657600" algn="l" defTabSz="914400" rtl="0" eaLnBrk="1" latinLnBrk="0" hangingPunct="1">
+        <a:defRPr sz="1800" kern="1200">
+          <a:solidFill>
+            <a:schemeClr val="tx1"/>
+          </a:solidFill>
+          <a:latin typeface="+mn-lt"/>
+          <a:ea typeface="+mn-ea"/>
+          <a:cs typeface="+mn-cs"/>
+        </a:defRPr>
+      </a:lvl9pPr>
+    </p:otherStyle>
+  </p:txStyles>
 </p:sldMaster>
 </file>
 
 <file path=ppt/slides/slide1.xml><?xml version="1.0" encoding="utf-8"?>
-<p:sld xmlns:a="http://schemas.openxmlformats.org/drawingml/2006/main" xmlns:p="http://schemas.openxmlformats.org/presentationml/2006/main" xmlns:r="http://schemas.openxmlformats.org/officeDocument/2006/relationships" xmlns:p14="http://schemas.microsoft.com/office/powerpoint/2010/main" xmlns:p15="http://schemas.microsoft.com/office/powerpoint/2012/main" xmlns:mc="http://schemas.openxmlformats.org/markup-compatibility/2006">
+<p:sld xmlns:a="http://schemas.openxmlformats.org/drawingml/2006/main" xmlns:ns2="http://schemas.openxmlformats.org/officeDocument/2006/relationships" xmlns:p="http://schemas.openxmlformats.org/presentationml/2006/main">
   <p:cSld>
     <p:spTree>
       <p:nvGrpSpPr>
@@ -8325,13 +10124,20 @@
           </a:ln>
         </p:spPr>
         <p:style>
-          <a:lnRef idx="0"/>
-          <a:fillRef idx="0"/>
-          <a:effectRef idx="0"/>
+          <a:lnRef idx="0">
+            <a:scrgbClr r="0" g="0" b="0"/>
+          </a:lnRef>
+          <a:fillRef idx="0">
+            <a:scrgbClr r="0" g="0" b="0"/>
+          </a:fillRef>
+          <a:effectRef idx="0">
+            <a:scrgbClr r="0" g="0" b="0"/>
+          </a:effectRef>
           <a:fontRef idx="minor"/>
         </p:style>
         <p:txBody>
-          <a:bodyPr lIns="90000" rIns="90000" tIns="45000" bIns="45000"/>
+          <a:bodyPr lIns="90000" tIns="45000" rIns="90000" bIns="45000"/>
+          <a:lstStyle/>
           <a:p>
             <a:pPr algn="ctr">
               <a:lnSpc>
@@ -8339,15 +10145,15 @@
               </a:lnSpc>
             </a:pPr>
             <a:r>
-              <a:rPr b="1" lang="en" sz="6030" spc="-1" strike="noStrike">
+              <a:rPr lang="en" sz="6030" b="1" strike="noStrike" spc="-1">
                 <a:solidFill>
                   <a:srgbClr val="000000"/>
                 </a:solidFill>
                 <a:latin typeface="Calibri"/>
               </a:rPr>
-              <a:t>&lt;Project tagline - optional&gt;</a:t>
+              <a:t>From abandoned buildings to action</a:t>
             </a:r>
-            <a:endParaRPr b="0" lang="en" sz="6030" spc="-1" strike="noStrike">
+            <a:endParaRPr lang="en" sz="6030" b="0" strike="noStrike" spc="-1">
               <a:latin typeface="Arial"/>
             </a:endParaRPr>
           </a:p>
@@ -8373,303 +10179,23 @@
           </a:ln>
         </p:spPr>
         <p:style>
-          <a:lnRef idx="0"/>
-          <a:fillRef idx="0"/>
-          <a:effectRef idx="0"/>
+          <a:lnRef idx="0">
+            <a:scrgbClr r="0" g="0" b="0"/>
+          </a:lnRef>
+          <a:fillRef idx="0">
+            <a:scrgbClr r="0" g="0" b="0"/>
+          </a:fillRef>
+          <a:effectRef idx="0">
+            <a:scrgbClr r="0" g="0" b="0"/>
+          </a:effectRef>
           <a:fontRef idx="minor"/>
         </p:style>
         <p:txBody>
-          <a:bodyPr lIns="90000" rIns="90000" tIns="45000" bIns="45000"/>
-          <a:p>
-            <a:pPr>
-              <a:lnSpc>
-                <a:spcPct val="100000"/>
-              </a:lnSpc>
-            </a:pPr>
-            <a:r>
-              <a:rPr b="0" lang="en" sz="6030" spc="-1" strike="noStrike">
-                <a:solidFill>
-                  <a:srgbClr val="000000"/>
-                </a:solidFill>
-                <a:latin typeface="Calibri"/>
-              </a:rPr>
-              <a:t>photos and graphics – </a:t>
-            </a:r>
-            <a:endParaRPr b="0" lang="en" sz="6030" spc="-1" strike="noStrike">
-              <a:latin typeface="Arial"/>
-            </a:endParaRPr>
-          </a:p>
-          <a:p>
-            <a:pPr>
-              <a:lnSpc>
-                <a:spcPct val="100000"/>
-              </a:lnSpc>
-            </a:pPr>
-            <a:r>
-              <a:rPr b="0" lang="en" sz="6030" spc="-1" strike="noStrike">
-                <a:solidFill>
-                  <a:srgbClr val="000000"/>
-                </a:solidFill>
-                <a:latin typeface="Calibri"/>
-              </a:rPr>
-              <a:t>Up to 6 images , with description for each image </a:t>
-            </a:r>
-            <a:r>
-              <a:rPr b="0" lang="en" sz="3600" spc="-1" strike="noStrike">
-                <a:solidFill>
-                  <a:srgbClr val="000000"/>
-                </a:solidFill>
-                <a:latin typeface="Calibri"/>
-              </a:rPr>
-              <a:t>in #36 font (minimum)</a:t>
-            </a:r>
-            <a:endParaRPr b="0" lang="en" sz="3600" spc="-1" strike="noStrike">
-              <a:latin typeface="Arial"/>
-            </a:endParaRPr>
-          </a:p>
-          <a:p>
-            <a:pPr>
-              <a:lnSpc>
-                <a:spcPct val="100000"/>
-              </a:lnSpc>
-            </a:pPr>
-            <a:endParaRPr b="0" lang="en" sz="3600" spc="-1" strike="noStrike">
-              <a:latin typeface="Arial"/>
-            </a:endParaRPr>
-          </a:p>
-          <a:p>
-            <a:pPr marL="857160" indent="-856800">
-              <a:lnSpc>
-                <a:spcPct val="100000"/>
-              </a:lnSpc>
-              <a:buClr>
-                <a:srgbClr val="000000"/>
-              </a:buClr>
-              <a:buFont typeface="Arial"/>
-              <a:buChar char="•"/>
-            </a:pPr>
-            <a:r>
-              <a:rPr b="0" lang="en" sz="6030" spc="-1" strike="noStrike">
-                <a:solidFill>
-                  <a:srgbClr val="000000"/>
-                </a:solidFill>
-                <a:latin typeface="Calibri"/>
-              </a:rPr>
-              <a:t>Use case diagram (UML 2.5.1)</a:t>
-            </a:r>
-            <a:endParaRPr b="0" lang="en" sz="6030" spc="-1" strike="noStrike">
-              <a:latin typeface="Arial"/>
-            </a:endParaRPr>
-          </a:p>
-          <a:p>
-            <a:pPr marL="857160" indent="-856800">
-              <a:lnSpc>
-                <a:spcPct val="100000"/>
-              </a:lnSpc>
-              <a:buClr>
-                <a:srgbClr val="000000"/>
-              </a:buClr>
-              <a:buFont typeface="Arial"/>
-              <a:buChar char="•"/>
-            </a:pPr>
-            <a:r>
-              <a:rPr b="0" lang="en" sz="6030" spc="-1" strike="noStrike">
-                <a:solidFill>
-                  <a:srgbClr val="000000"/>
-                </a:solidFill>
-                <a:latin typeface="Calibri"/>
-                <a:ea typeface="Noto Sans CJK SC"/>
-              </a:rPr>
-              <a:t>Class Diagram</a:t>
-            </a:r>
-            <a:r>
-              <a:rPr b="0" lang="en" sz="6030" spc="-1" strike="noStrike">
-                <a:solidFill>
-                  <a:srgbClr val="000000"/>
-                </a:solidFill>
-                <a:latin typeface="Calibri"/>
-              </a:rPr>
-              <a:t> (UML 2.5.1)</a:t>
-            </a:r>
-            <a:endParaRPr b="0" lang="en" sz="6030" spc="-1" strike="noStrike">
-              <a:latin typeface="Arial"/>
-            </a:endParaRPr>
-          </a:p>
-          <a:p>
-            <a:pPr marL="857160" indent="-856800">
-              <a:lnSpc>
-                <a:spcPct val="100000"/>
-              </a:lnSpc>
-              <a:buClr>
-                <a:srgbClr val="000000"/>
-              </a:buClr>
-              <a:buFont typeface="Arial"/>
-              <a:buChar char="•"/>
-            </a:pPr>
-            <a:r>
-              <a:rPr b="0" lang="en" sz="6030" spc="-1" strike="noStrike">
-                <a:solidFill>
-                  <a:srgbClr val="000000"/>
-                </a:solidFill>
-                <a:latin typeface="Calibri"/>
-                <a:ea typeface="Noto Sans CJK SC"/>
-              </a:rPr>
-              <a:t>Deployment Diagram </a:t>
-            </a:r>
-            <a:r>
-              <a:rPr b="0" lang="en" sz="6030" spc="-1" strike="noStrike">
-                <a:solidFill>
-                  <a:srgbClr val="000000"/>
-                </a:solidFill>
-                <a:latin typeface="Calibri"/>
-              </a:rPr>
-              <a:t> (UML 2.5.1)</a:t>
-            </a:r>
-            <a:endParaRPr b="0" lang="en" sz="6030" spc="-1" strike="noStrike">
-              <a:latin typeface="Arial"/>
-            </a:endParaRPr>
-          </a:p>
-          <a:p>
-            <a:pPr marL="857160" indent="-856800">
-              <a:lnSpc>
-                <a:spcPct val="100000"/>
-              </a:lnSpc>
-              <a:buClr>
-                <a:srgbClr val="000000"/>
-              </a:buClr>
-              <a:buFont typeface="Arial"/>
-              <a:buChar char="•"/>
-            </a:pPr>
-            <a:r>
-              <a:rPr b="0" lang="en" sz="6030" spc="-1" strike="noStrike">
-                <a:solidFill>
-                  <a:srgbClr val="000000"/>
-                </a:solidFill>
-                <a:latin typeface="Calibri"/>
-                <a:ea typeface="Noto Sans CJK SC"/>
-              </a:rPr>
-              <a:t>Sequence Diagram of a major use case (if applicable) </a:t>
-            </a:r>
-            <a:r>
-              <a:rPr b="0" lang="en" sz="6030" spc="-1" strike="noStrike">
-                <a:solidFill>
-                  <a:srgbClr val="000000"/>
-                </a:solidFill>
-                <a:latin typeface="Calibri"/>
-              </a:rPr>
-              <a:t> (UML 2.5.1)</a:t>
-            </a:r>
-            <a:endParaRPr b="0" lang="en" sz="6030" spc="-1" strike="noStrike">
-              <a:latin typeface="Arial"/>
-            </a:endParaRPr>
-          </a:p>
-          <a:p>
-            <a:pPr marL="857160" indent="-856800">
-              <a:lnSpc>
-                <a:spcPct val="100000"/>
-              </a:lnSpc>
-              <a:buClr>
-                <a:srgbClr val="000000"/>
-              </a:buClr>
-              <a:buFont typeface="Arial"/>
-              <a:buChar char="•"/>
-            </a:pPr>
-            <a:r>
-              <a:rPr b="0" lang="en" sz="6030" spc="-1" strike="noStrike">
-                <a:solidFill>
-                  <a:srgbClr val="000000"/>
-                </a:solidFill>
-                <a:latin typeface="Calibri"/>
-                <a:ea typeface="Noto Sans CJK SC"/>
-              </a:rPr>
-              <a:t>Activity Diagram of a major algorithm used (if applicable) </a:t>
-            </a:r>
-            <a:r>
-              <a:rPr b="0" lang="en" sz="6030" spc="-1" strike="noStrike">
-                <a:solidFill>
-                  <a:srgbClr val="000000"/>
-                </a:solidFill>
-                <a:latin typeface="Calibri"/>
-              </a:rPr>
-              <a:t> (UML 2.5.1)</a:t>
-            </a:r>
-            <a:endParaRPr b="0" lang="en" sz="6030" spc="-1" strike="noStrike">
-              <a:latin typeface="Arial"/>
-            </a:endParaRPr>
-          </a:p>
-          <a:p>
-            <a:pPr marL="857160" indent="-856800">
-              <a:lnSpc>
-                <a:spcPct val="100000"/>
-              </a:lnSpc>
-              <a:buClr>
-                <a:srgbClr val="000000"/>
-              </a:buClr>
-              <a:buFont typeface="Arial"/>
-              <a:buChar char="•"/>
-            </a:pPr>
-            <a:r>
-              <a:rPr b="0" lang="en" sz="6030" spc="-1" strike="noStrike">
-                <a:solidFill>
-                  <a:srgbClr val="000000"/>
-                </a:solidFill>
-                <a:latin typeface="Calibri"/>
-              </a:rPr>
-              <a:t>App or GUI screenshot/s</a:t>
-            </a:r>
-            <a:endParaRPr b="0" lang="en" sz="6030" spc="-1" strike="noStrike">
-              <a:latin typeface="Arial"/>
-            </a:endParaRPr>
-          </a:p>
-          <a:p>
-            <a:pPr>
-              <a:lnSpc>
-                <a:spcPct val="100000"/>
-              </a:lnSpc>
-            </a:pPr>
-            <a:endParaRPr b="0" lang="en" sz="6030" spc="-1" strike="noStrike">
-              <a:latin typeface="Arial"/>
-            </a:endParaRPr>
-          </a:p>
-          <a:p>
-            <a:pPr>
-              <a:lnSpc>
-                <a:spcPct val="100000"/>
-              </a:lnSpc>
-            </a:pPr>
-            <a:endParaRPr b="0" lang="en" sz="6030" spc="-1" strike="noStrike">
-              <a:latin typeface="Arial"/>
-            </a:endParaRPr>
-          </a:p>
-          <a:p>
-            <a:pPr>
-              <a:lnSpc>
-                <a:spcPct val="100000"/>
-              </a:lnSpc>
-            </a:pPr>
-            <a:endParaRPr b="0" lang="en" sz="6030" spc="-1" strike="noStrike">
-              <a:latin typeface="Arial"/>
-            </a:endParaRPr>
-          </a:p>
-          <a:p>
-            <a:pPr>
-              <a:lnSpc>
-                <a:spcPct val="100000"/>
-              </a:lnSpc>
-            </a:pPr>
-            <a:endParaRPr b="0" lang="en" sz="6030" spc="-1" strike="noStrike">
-              <a:latin typeface="Arial"/>
-            </a:endParaRPr>
-          </a:p>
-          <a:p>
-            <a:pPr algn="ctr">
-              <a:lnSpc>
-                <a:spcPct val="100000"/>
-              </a:lnSpc>
-            </a:pPr>
-            <a:endParaRPr b="0" lang="en" sz="6030" spc="-1" strike="noStrike">
-              <a:latin typeface="Arial"/>
-            </a:endParaRPr>
+          <a:bodyPr lIns="90000" tIns="45000" rIns="90000" bIns="45000"/>
+          <a:lstStyle/>
+          <a:p>
+            <a:pPr algn="ctr"/>
+            <a:endParaRPr lang="en-US" sz="100"/>
           </a:p>
         </p:txBody>
       </p:sp>
@@ -8693,13 +10219,20 @@
           </a:ln>
         </p:spPr>
         <p:style>
-          <a:lnRef idx="0"/>
-          <a:fillRef idx="0"/>
-          <a:effectRef idx="0"/>
+          <a:lnRef idx="0">
+            <a:scrgbClr r="0" g="0" b="0"/>
+          </a:lnRef>
+          <a:fillRef idx="0">
+            <a:scrgbClr r="0" g="0" b="0"/>
+          </a:fillRef>
+          <a:effectRef idx="0">
+            <a:scrgbClr r="0" g="0" b="0"/>
+          </a:effectRef>
           <a:fontRef idx="minor"/>
         </p:style>
         <p:txBody>
-          <a:bodyPr lIns="90000" rIns="90000" tIns="45000" bIns="45000"/>
+          <a:bodyPr lIns="90000" tIns="45000" rIns="90000" bIns="45000"/>
+          <a:lstStyle/>
           <a:p>
             <a:pPr algn="ctr">
               <a:lnSpc>
@@ -8707,15 +10240,15 @@
               </a:lnSpc>
             </a:pPr>
             <a:r>
-              <a:rPr b="1" lang="en" sz="8000" spc="-1" strike="noStrike">
+              <a:rPr lang="en" sz="8000" b="1" strike="noStrike" spc="-1">
                 <a:solidFill>
                   <a:srgbClr val="000000"/>
                 </a:solidFill>
                 <a:latin typeface="Calibri"/>
               </a:rPr>
-              <a:t>&lt;Project name&gt;</a:t>
+              <a:t>GhostHouses</a:t>
             </a:r>
-            <a:endParaRPr b="0" lang="en" sz="8000" spc="-1" strike="noStrike">
+            <a:endParaRPr lang="en" sz="8000" b="0" strike="noStrike" spc="-1">
               <a:latin typeface="Arial"/>
             </a:endParaRPr>
           </a:p>
@@ -8730,7 +10263,7 @@
         <p:spPr>
           <a:xfrm>
             <a:off x="1650600" y="7969680"/>
-            <a:ext cx="20907000" cy="6675480"/>
+            <a:ext cx="20907000" cy="7427088"/>
           </a:xfrm>
           <a:prstGeom prst="rect">
             <a:avLst/>
@@ -8741,15 +10274,22 @@
           </a:ln>
         </p:spPr>
         <p:style>
-          <a:lnRef idx="0"/>
-          <a:fillRef idx="0"/>
-          <a:effectRef idx="0"/>
+          <a:lnRef idx="0">
+            <a:scrgbClr r="0" g="0" b="0"/>
+          </a:lnRef>
+          <a:fillRef idx="0">
+            <a:scrgbClr r="0" g="0" b="0"/>
+          </a:fillRef>
+          <a:effectRef idx="0">
+            <a:scrgbClr r="0" g="0" b="0"/>
+          </a:effectRef>
           <a:fontRef idx="minor"/>
         </p:style>
         <p:txBody>
-          <a:bodyPr/>
-          <a:p>
-            <a:pPr>
+          <a:bodyPr lIns="90000" rIns="90000" tIns="45000" bIns="45000"/>
+          <a:lstStyle/>
+          <a:p>
+            <a:pPr algn="l">
               <a:lnSpc>
                 <a:spcPct val="100000"/>
               </a:lnSpc>
@@ -8761,14 +10301,14 @@
                 </a:solidFill>
                 <a:latin typeface="Calibri"/>
               </a:rPr>
-              <a:t>&lt;Project description - font #54 minimum, in English only &gt; </a:t>
+              <a:t>Haifa Municipality needs one reliable way to track abandoned and vacant buildings from field data to municipal decisions.</a:t>
             </a:r>
             <a:endParaRPr b="0" lang="en" sz="5400" spc="-1" strike="noStrike">
               <a:latin typeface="Arial"/>
             </a:endParaRPr>
           </a:p>
           <a:p>
-            <a:pPr>
+            <a:pPr algn="l">
               <a:lnSpc>
                 <a:spcPct val="100000"/>
               </a:lnSpc>
@@ -8780,22 +10320,17 @@
                 </a:solidFill>
                 <a:latin typeface="Calibri"/>
               </a:rPr>
-              <a:t>includes:</a:t>
+              <a:t>GhostHouses is a municipal web system that turns scattered records into a searchable, controlled building registry.</a:t>
             </a:r>
             <a:endParaRPr b="0" lang="en" sz="5400" spc="-1" strike="noStrike">
               <a:latin typeface="Arial"/>
             </a:endParaRPr>
           </a:p>
           <a:p>
-            <a:pPr marL="685800" indent="-685440">
+            <a:pPr algn="l">
               <a:lnSpc>
                 <a:spcPct val="100000"/>
               </a:lnSpc>
-              <a:buClr>
-                <a:srgbClr val="000000"/>
-              </a:buClr>
-              <a:buFont typeface="Arial"/>
-              <a:buChar char="•"/>
             </a:pPr>
             <a:r>
               <a:rPr b="0" lang="en" sz="5400" spc="-1" strike="noStrike">
@@ -8804,22 +10339,17 @@
                 </a:solidFill>
                 <a:latin typeface="Calibri"/>
               </a:rPr>
-              <a:t>The need or problem your project addresses -one sentence (optional)</a:t>
+              <a:t>Main features: building management with filters, GIS map context, and import/export with presentation-ready building cards.</a:t>
             </a:r>
             <a:endParaRPr b="0" lang="en" sz="5400" spc="-1" strike="noStrike">
               <a:latin typeface="Arial"/>
             </a:endParaRPr>
           </a:p>
           <a:p>
-            <a:pPr marL="685800" indent="-685440">
+            <a:pPr algn="l">
               <a:lnSpc>
                 <a:spcPct val="100000"/>
               </a:lnSpc>
-              <a:buClr>
-                <a:srgbClr val="000000"/>
-              </a:buClr>
-              <a:buFont typeface="Arial"/>
-              <a:buChar char="•"/>
             </a:pPr>
             <a:r>
               <a:rPr b="0" lang="en" sz="5400" spc="-1" strike="noStrike">
@@ -8828,22 +10358,17 @@
                 </a:solidFill>
                 <a:latin typeface="Calibri"/>
               </a:rPr>
-              <a:t>What you project is - in one sentence (“a locker controlled using a smart lending management app”)</a:t>
+              <a:t>The system also includes role-based permissions, audit logs, and Docker deployment prepared for municipality handover.</a:t>
             </a:r>
             <a:endParaRPr b="0" lang="en" sz="5400" spc="-1" strike="noStrike">
               <a:latin typeface="Arial"/>
             </a:endParaRPr>
           </a:p>
           <a:p>
-            <a:pPr marL="685800" indent="-685440">
+            <a:pPr algn="l">
               <a:lnSpc>
                 <a:spcPct val="100000"/>
               </a:lnSpc>
-              <a:buClr>
-                <a:srgbClr val="000000"/>
-              </a:buClr>
-              <a:buFont typeface="Arial"/>
-              <a:buChar char="•"/>
             </a:pPr>
             <a:r>
               <a:rPr b="0" lang="en" sz="5400" spc="-1" strike="noStrike">
@@ -8852,74 +10377,12 @@
                 </a:solidFill>
                 <a:latin typeface="Calibri"/>
               </a:rPr>
-              <a:t>What are the </a:t>
-            </a:r>
-            <a:r>
-              <a:rPr b="0" lang="en" sz="5400" spc="-1" strike="noStrike" u="sng">
-                <a:solidFill>
-                  <a:srgbClr val="000000"/>
-                </a:solidFill>
-                <a:uFillTx/>
-                <a:latin typeface="Calibri"/>
-              </a:rPr>
-              <a:t>main</a:t>
-            </a:r>
-            <a:r>
-              <a:rPr b="0" lang="en" sz="5400" spc="-1" strike="noStrike">
-                <a:solidFill>
-                  <a:srgbClr val="000000"/>
-                </a:solidFill>
-                <a:latin typeface="Calibri"/>
-              </a:rPr>
-              <a:t> </a:t>
-            </a:r>
-            <a:r>
-              <a:rPr b="0" lang="en" sz="5400" spc="-1" strike="noStrike" u="sng">
-                <a:solidFill>
-                  <a:srgbClr val="000000"/>
-                </a:solidFill>
-                <a:uFillTx/>
-                <a:latin typeface="Calibri"/>
-              </a:rPr>
-              <a:t>features</a:t>
-            </a:r>
-            <a:r>
-              <a:rPr b="0" lang="en" sz="5400" spc="-1" strike="noStrike">
-                <a:solidFill>
-                  <a:srgbClr val="000000"/>
-                </a:solidFill>
-                <a:latin typeface="Calibri"/>
-              </a:rPr>
-              <a:t> of the project (up to 3)</a:t>
+              <a:t>GhostHouses gives the department one maintainable source of truth.</a:t>
             </a:r>
             <a:endParaRPr b="0" lang="en" sz="5400" spc="-1" strike="noStrike">
               <a:latin typeface="Arial"/>
             </a:endParaRPr>
           </a:p>
-          <a:p>
-            <a:pPr marL="685800" indent="-685440">
-              <a:lnSpc>
-                <a:spcPct val="100000"/>
-              </a:lnSpc>
-              <a:buClr>
-                <a:srgbClr val="000000"/>
-              </a:buClr>
-              <a:buFont typeface="Arial"/>
-              <a:buChar char="•"/>
-            </a:pPr>
-            <a:r>
-              <a:rPr b="0" lang="en" sz="5400" spc="-1" strike="noStrike">
-                <a:solidFill>
-                  <a:srgbClr val="000000"/>
-                </a:solidFill>
-                <a:latin typeface="Calibri"/>
-              </a:rPr>
-              <a:t>Main advantages of the project over current methods/solutions. (optional)</a:t>
-            </a:r>
-            <a:endParaRPr b="0" lang="en" sz="5400" spc="-1" strike="noStrike">
-              <a:latin typeface="Arial"/>
-            </a:endParaRPr>
-          </a:p>
         </p:txBody>
       </p:sp>
       <p:sp>
@@ -8930,8 +10393,8 @@
         </p:nvSpPr>
         <p:spPr>
           <a:xfrm>
-            <a:off x="1683000" y="30185640"/>
-            <a:ext cx="21326760" cy="2223000"/>
+            <a:off x="1650600" y="29945398"/>
+            <a:ext cx="20907000" cy="2698682"/>
           </a:xfrm>
           <a:prstGeom prst="rect">
             <a:avLst/>
@@ -8942,13 +10405,20 @@
           </a:ln>
         </p:spPr>
         <p:style>
-          <a:lnRef idx="0"/>
-          <a:fillRef idx="0"/>
-          <a:effectRef idx="0"/>
+          <a:lnRef idx="0">
+            <a:scrgbClr r="0" g="0" b="0"/>
+          </a:lnRef>
+          <a:fillRef idx="0">
+            <a:scrgbClr r="0" g="0" b="0"/>
+          </a:fillRef>
+          <a:effectRef idx="0">
+            <a:scrgbClr r="0" g="0" b="0"/>
+          </a:effectRef>
           <a:fontRef idx="minor"/>
         </p:style>
         <p:txBody>
-          <a:bodyPr lIns="90000" rIns="90000" tIns="45000" bIns="45000"/>
+          <a:bodyPr lIns="90000" tIns="45000" rIns="90000" bIns="45000"/>
+          <a:lstStyle/>
           <a:p>
             <a:pPr algn="ctr">
               <a:lnSpc>
@@ -8956,15 +10426,15 @@
               </a:lnSpc>
             </a:pPr>
             <a:r>
-              <a:rPr b="1" lang="en" sz="4800" spc="-1" strike="noStrike">
+              <a:rPr lang="en" sz="4400" b="1" strike="noStrike" spc="-1" dirty="0">
                 <a:solidFill>
                   <a:srgbClr val="000000"/>
                 </a:solidFill>
                 <a:latin typeface="Calibri"/>
               </a:rPr>
-              <a:t>Team member names</a:t>
+              <a:t>Team: Kareem Araide, Benjamin Stryzakov, Bayan Kheir, Carol Elasmar, Yara Zeineh, Omer Samara</a:t>
             </a:r>
-            <a:endParaRPr b="0" lang="en" sz="4800" spc="-1" strike="noStrike">
+            <a:endParaRPr lang="en" sz="4400" b="0" strike="noStrike" spc="-1" dirty="0">
               <a:latin typeface="Arial"/>
             </a:endParaRPr>
           </a:p>
@@ -8975,15 +10445,15 @@
               </a:lnSpc>
             </a:pPr>
             <a:r>
-              <a:rPr b="1" lang="en" sz="4800" spc="-1" strike="noStrike">
+              <a:rPr lang="en" sz="4400" b="1" strike="noStrike" spc="-1" dirty="0">
                 <a:solidFill>
                   <a:srgbClr val="000000"/>
                 </a:solidFill>
                 <a:latin typeface="Calibri"/>
               </a:rPr>
-              <a:t>Instructor names</a:t>
+              <a:t>Supervisor: Daria Bebin</a:t>
             </a:r>
-            <a:endParaRPr b="0" lang="en" sz="4800" spc="-1" strike="noStrike">
+            <a:endParaRPr lang="en" sz="4400" b="0" strike="noStrike" spc="-1" dirty="0">
               <a:latin typeface="Arial"/>
             </a:endParaRPr>
           </a:p>
@@ -8994,67 +10464,15 @@
               </a:lnSpc>
             </a:pPr>
             <a:r>
-              <a:rPr b="1" lang="en" sz="4400" spc="-1" strike="noStrike">
+              <a:rPr lang="en" sz="4000" b="1" strike="noStrike" spc="-1" dirty="0">
                 <a:solidFill>
                   <a:srgbClr val="000000"/>
                 </a:solidFill>
                 <a:latin typeface="Calibri"/>
               </a:rPr>
-              <a:t>In collaboration with (name + institution , if relevant)</a:t>
+              <a:t>In collaboration with Haifa Municipality, contact: Vitaly Dubov-Dotan</a:t>
             </a:r>
-            <a:endParaRPr b="0" lang="en" sz="4400" spc="-1" strike="noStrike">
-              <a:latin typeface="Arial"/>
-            </a:endParaRPr>
-          </a:p>
-        </p:txBody>
-      </p:sp>
-      <p:sp>
-        <p:nvSpPr>
-          <p:cNvPr id="109" name="CustomShape 6"/>
-          <p:cNvSpPr/>
-          <p:nvPr/>
-        </p:nvSpPr>
-        <p:spPr>
-          <a:xfrm>
-            <a:off x="21122640" y="4389120"/>
-            <a:ext cx="7467120" cy="3879720"/>
-          </a:xfrm>
-          <a:prstGeom prst="rect">
-            <a:avLst/>
-          </a:prstGeom>
-          <a:solidFill>
-            <a:schemeClr val="bg1"/>
-          </a:solidFill>
-          <a:ln>
-            <a:solidFill>
-              <a:schemeClr val="accent1"/>
-            </a:solidFill>
-          </a:ln>
-        </p:spPr>
-        <p:style>
-          <a:lnRef idx="0"/>
-          <a:fillRef idx="0"/>
-          <a:effectRef idx="0"/>
-          <a:fontRef idx="minor"/>
-        </p:style>
-        <p:txBody>
-          <a:bodyPr lIns="90000" rIns="90000" tIns="45000" bIns="45000"/>
-          <a:p>
-            <a:pPr>
-              <a:lnSpc>
-                <a:spcPct val="100000"/>
-              </a:lnSpc>
-            </a:pPr>
-            <a:r>
-              <a:rPr b="0" lang="en" sz="3110" spc="-1" strike="noStrike">
-                <a:solidFill>
-                  <a:srgbClr val="333333"/>
-                </a:solidFill>
-                <a:latin typeface="Segoe UI"/>
-              </a:rPr>
-              <a:t>tagline - Short teaser describing main advantage or function of your project. SHORT - UP TO 6 WORDS MAX. For example - "delivers the drink right to you!" , "learn programming basics without a computer" , "control your air conditioner remotely" , etc. </a:t>
-            </a:r>
-            <a:endParaRPr b="0" lang="en" sz="3110" spc="-1" strike="noStrike">
+            <a:endParaRPr lang="en" sz="4000" b="0" strike="noStrike" spc="-1" dirty="0">
               <a:latin typeface="Arial"/>
             </a:endParaRPr>
           </a:p>
@@ -9075,61 +10493,41 @@
             <a:avLst/>
           </a:prstGeom>
           <a:solidFill>
-            <a:srgbClr val="fbf9f9"/>
+            <a:srgbClr val="FBF9F9"/>
           </a:solidFill>
           <a:ln>
             <a:noFill/>
           </a:ln>
         </p:spPr>
         <p:style>
-          <a:lnRef idx="0"/>
-          <a:fillRef idx="0"/>
-          <a:effectRef idx="0"/>
+          <a:lnRef idx="0">
+            <a:scrgbClr r="0" g="0" b="0"/>
+          </a:lnRef>
+          <a:fillRef idx="0">
+            <a:scrgbClr r="0" g="0" b="0"/>
+          </a:fillRef>
+          <a:effectRef idx="0">
+            <a:scrgbClr r="0" g="0" b="0"/>
+          </a:effectRef>
           <a:fontRef idx="minor"/>
         </p:style>
         <p:txBody>
-          <a:bodyPr lIns="0" rIns="0" tIns="931680" bIns="0"/>
-          <a:p>
-            <a:pPr marL="1850400" indent="-698400">
-              <a:lnSpc>
-                <a:spcPct val="71000"/>
-              </a:lnSpc>
-              <a:spcBef>
-                <a:spcPts val="7336"/>
-              </a:spcBef>
-            </a:pPr>
-            <a:r>
-              <a:rPr b="1" lang="en" sz="8490" spc="24" strike="noStrike">
-                <a:solidFill>
-                  <a:srgbClr val="231f20"/>
-                </a:solidFill>
-                <a:latin typeface="Arial"/>
-              </a:rPr>
-              <a:t>Project  </a:t>
-            </a:r>
-            <a:r>
-              <a:rPr b="1" lang="en" sz="8490" spc="41" strike="noStrike">
-                <a:solidFill>
-                  <a:srgbClr val="231f20"/>
-                </a:solidFill>
-                <a:latin typeface="Arial"/>
-              </a:rPr>
-              <a:t>logo</a:t>
-            </a:r>
-            <a:endParaRPr b="0" lang="en" sz="8490" spc="-1" strike="noStrike">
-              <a:latin typeface="Arial"/>
-            </a:endParaRPr>
+          <a:bodyPr lIns="0" tIns="931680" rIns="0" bIns="0"/>
+          <a:lstStyle/>
+          <a:p>
+            <a:pPr algn="ctr"/>
+            <a:endParaRPr lang="en-US" sz="100"/>
           </a:p>
         </p:txBody>
       </p:sp>
       <p:pic>
         <p:nvPicPr>
-          <p:cNvPr id="111" name="Picture 2" descr=""/>
+          <p:cNvPr id="111" name="Picture 2"/>
           <p:cNvPicPr/>
           <p:nvPr/>
         </p:nvPicPr>
         <p:blipFill>
-          <a:blip r:embed="rId1"/>
+          <a:blip ns2:embed="rId3"/>
           <a:stretch/>
         </p:blipFill>
         <p:spPr>
@@ -9145,8 +10543,351 @@
           </a:ln>
         </p:spPr>
       </p:pic>
+      <p:pic>
+        <p:nvPicPr>
+          <p:cNvPr id="112" name="Haifa Municipality logo"/>
+          <p:cNvPicPr/>
+          <p:nvPr/>
+        </p:nvPicPr>
+        <p:blipFill>
+          <a:blip ns2:embed="rId4"/>
+          <a:stretch>
+            <a:fillRect/>
+          </a:stretch>
+        </p:blipFill>
+        <p:spPr>
+          <a:xfrm>
+            <a:off x="1490472" y="4562856"/>
+            <a:ext cx="5989320" cy="2770632"/>
+          </a:xfrm>
+          <a:prstGeom prst="rect">
+            <a:avLst/>
+          </a:prstGeom>
+        </p:spPr>
+      </p:pic>
+      <p:sp>
+        <p:nvSpPr>
+          <p:cNvPr id="113" name="Caption 1"/>
+          <p:cNvSpPr txBox="1"/>
+          <p:nvPr/>
+        </p:nvSpPr>
+        <p:spPr>
+          <a:xfrm>
+            <a:off x="1819656" y="15700248"/>
+            <a:ext cx="6736080" cy="585216"/>
+          </a:xfrm>
+          <a:noFill/>
+        </p:spPr>
+        <p:txBody>
+          <a:bodyPr/>
+          <a:lstStyle/>
+          <a:p>
+            <a:pPr algn="ctr"/>
+            <a:r>
+              <a:rPr lang="en-US" sz="3600" b="1" dirty="0">
+                <a:solidFill>
+                  <a:srgbClr val="1F2A3A"/>
+                </a:solidFill>
+                <a:latin typeface="Aptos"/>
+              </a:rPr>
+              <a:t>Traceability UML 2.5.1</a:t>
+            </a:r>
+            <a:endParaRPr lang="en-US" sz="2600" dirty="0"/>
+          </a:p>
+        </p:txBody>
+      </p:sp>
+      <p:pic>
+        <p:nvPicPr>
+          <p:cNvPr id="114" name="Poster visual 1"/>
+          <p:cNvPicPr/>
+          <p:nvPr/>
+        </p:nvPicPr>
+        <p:blipFill>
+          <a:blip ns2:embed="rId5"/>
+          <a:stretch>
+            <a:fillRect/>
+          </a:stretch>
+        </p:blipFill>
+        <p:spPr>
+          <a:xfrm>
+            <a:off x="1819656" y="16340328"/>
+            <a:ext cx="6736080" cy="6249924"/>
+          </a:xfrm>
+          <a:prstGeom prst="rect">
+            <a:avLst/>
+          </a:prstGeom>
+        </p:spPr>
+      </p:pic>
+      <p:sp>
+        <p:nvSpPr>
+          <p:cNvPr id="115" name="Caption 2"/>
+          <p:cNvSpPr txBox="1"/>
+          <p:nvPr/>
+        </p:nvSpPr>
+        <p:spPr>
+          <a:xfrm>
+            <a:off x="8738616" y="15700248"/>
+            <a:ext cx="6736080" cy="585216"/>
+          </a:xfrm>
+          <a:noFill/>
+        </p:spPr>
+        <p:txBody>
+          <a:bodyPr/>
+          <a:lstStyle/>
+          <a:p>
+            <a:pPr algn="ctr"/>
+            <a:r>
+              <a:rPr lang="en-US" sz="3600" b="1" dirty="0">
+                <a:solidFill>
+                  <a:srgbClr val="1F2A3A"/>
+                </a:solidFill>
+                <a:latin typeface="Aptos"/>
+              </a:rPr>
+              <a:t>Class Diagram UML 2.5.1</a:t>
+            </a:r>
+            <a:endParaRPr lang="en-US" sz="2600" dirty="0"/>
+          </a:p>
+        </p:txBody>
+      </p:sp>
+      <p:pic>
+        <p:nvPicPr>
+          <p:cNvPr id="116" name="Poster visual 2"/>
+          <p:cNvPicPr/>
+          <p:nvPr/>
+        </p:nvPicPr>
+        <p:blipFill>
+          <a:blip ns2:embed="rId6"/>
+          <a:stretch>
+            <a:fillRect/>
+          </a:stretch>
+        </p:blipFill>
+        <p:spPr>
+          <a:xfrm>
+            <a:off x="8738616" y="16340328"/>
+            <a:ext cx="6736080" cy="6249924"/>
+          </a:xfrm>
+          <a:prstGeom prst="rect">
+            <a:avLst/>
+          </a:prstGeom>
+        </p:spPr>
+      </p:pic>
+      <p:sp>
+        <p:nvSpPr>
+          <p:cNvPr id="117" name="Caption 3"/>
+          <p:cNvSpPr txBox="1"/>
+          <p:nvPr/>
+        </p:nvSpPr>
+        <p:spPr>
+          <a:xfrm>
+            <a:off x="15657576" y="15700248"/>
+            <a:ext cx="6736080" cy="585216"/>
+          </a:xfrm>
+          <a:noFill/>
+        </p:spPr>
+        <p:txBody>
+          <a:bodyPr/>
+          <a:lstStyle/>
+          <a:p>
+            <a:pPr algn="ctr"/>
+            <a:r>
+              <a:rPr lang="en-US" sz="3600" b="1" dirty="0">
+                <a:solidFill>
+                  <a:srgbClr val="1F2A3A"/>
+                </a:solidFill>
+                <a:latin typeface="Aptos"/>
+              </a:rPr>
+              <a:t>Deployment UML 2.5.1</a:t>
+            </a:r>
+            <a:endParaRPr lang="en-US" sz="2600" dirty="0"/>
+          </a:p>
+        </p:txBody>
+      </p:sp>
+      <p:pic>
+        <p:nvPicPr>
+          <p:cNvPr id="118" name="Poster visual 3"/>
+          <p:cNvPicPr/>
+          <p:nvPr/>
+        </p:nvPicPr>
+        <p:blipFill>
+          <a:blip ns2:embed="rId7"/>
+          <a:stretch>
+            <a:fillRect/>
+          </a:stretch>
+        </p:blipFill>
+        <p:spPr>
+          <a:xfrm>
+            <a:off x="15657576" y="16340328"/>
+            <a:ext cx="6736080" cy="6249924"/>
+          </a:xfrm>
+          <a:prstGeom prst="rect">
+            <a:avLst/>
+          </a:prstGeom>
+        </p:spPr>
+      </p:pic>
+      <p:sp>
+        <p:nvSpPr>
+          <p:cNvPr id="119" name="Caption 4"/>
+          <p:cNvSpPr txBox="1"/>
+          <p:nvPr/>
+        </p:nvSpPr>
+        <p:spPr>
+          <a:xfrm>
+            <a:off x="1819656" y="22791420"/>
+            <a:ext cx="6736080" cy="585216"/>
+          </a:xfrm>
+          <a:noFill/>
+        </p:spPr>
+        <p:txBody>
+          <a:bodyPr/>
+          <a:lstStyle/>
+          <a:p>
+            <a:pPr algn="ctr"/>
+            <a:r>
+              <a:rPr lang="en-US" sz="3600" b="1">
+                <a:solidFill>
+                  <a:srgbClr val="1F2A3A"/>
+                </a:solidFill>
+                <a:latin typeface="Aptos"/>
+              </a:rPr>
+              <a:t>Building Registry</a:t>
+            </a:r>
+            <a:endParaRPr lang="en-US" sz="2600"/>
+          </a:p>
+        </p:txBody>
+      </p:sp>
+      <p:pic>
+        <p:nvPicPr>
+          <p:cNvPr id="120" name="Poster visual 4"/>
+          <p:cNvPicPr/>
+          <p:nvPr/>
+        </p:nvPicPr>
+        <p:blipFill>
+          <a:blip ns2:embed="rId8"/>
+          <a:stretch>
+            <a:fillRect/>
+          </a:stretch>
+        </p:blipFill>
+        <p:spPr>
+          <a:xfrm>
+            <a:off x="1819656" y="23431500"/>
+            <a:ext cx="6736080" cy="6249924"/>
+          </a:xfrm>
+          <a:prstGeom prst="rect">
+            <a:avLst/>
+          </a:prstGeom>
+        </p:spPr>
+      </p:pic>
+      <p:sp>
+        <p:nvSpPr>
+          <p:cNvPr id="121" name="Caption 5"/>
+          <p:cNvSpPr txBox="1"/>
+          <p:nvPr/>
+        </p:nvSpPr>
+        <p:spPr>
+          <a:xfrm>
+            <a:off x="8738616" y="22791420"/>
+            <a:ext cx="6736080" cy="585216"/>
+          </a:xfrm>
+          <a:noFill/>
+        </p:spPr>
+        <p:txBody>
+          <a:bodyPr/>
+          <a:lstStyle/>
+          <a:p>
+            <a:pPr algn="ctr"/>
+            <a:r>
+              <a:rPr lang="en-US" sz="3600" b="1">
+                <a:solidFill>
+                  <a:srgbClr val="1F2A3A"/>
+                </a:solidFill>
+                <a:latin typeface="Aptos"/>
+              </a:rPr>
+              <a:t>GIS Map</a:t>
+            </a:r>
+            <a:endParaRPr lang="en-US" sz="2600"/>
+          </a:p>
+        </p:txBody>
+      </p:sp>
+      <p:pic>
+        <p:nvPicPr>
+          <p:cNvPr id="122" name="Poster visual 5"/>
+          <p:cNvPicPr/>
+          <p:nvPr/>
+        </p:nvPicPr>
+        <p:blipFill>
+          <a:blip ns2:embed="rId9"/>
+          <a:stretch>
+            <a:fillRect/>
+          </a:stretch>
+        </p:blipFill>
+        <p:spPr>
+          <a:xfrm>
+            <a:off x="8738616" y="23431500"/>
+            <a:ext cx="6736080" cy="6249924"/>
+          </a:xfrm>
+          <a:prstGeom prst="rect">
+            <a:avLst/>
+          </a:prstGeom>
+        </p:spPr>
+      </p:pic>
+      <p:sp>
+        <p:nvSpPr>
+          <p:cNvPr id="123" name="Caption 6"/>
+          <p:cNvSpPr txBox="1"/>
+          <p:nvPr/>
+        </p:nvSpPr>
+        <p:spPr>
+          <a:xfrm>
+            <a:off x="15657576" y="22791420"/>
+            <a:ext cx="6736080" cy="585216"/>
+          </a:xfrm>
+          <a:noFill/>
+        </p:spPr>
+        <p:txBody>
+          <a:bodyPr/>
+          <a:lstStyle/>
+          <a:p>
+            <a:pPr algn="ctr"/>
+            <a:r>
+              <a:rPr lang="en-US" sz="3600" b="1" dirty="0">
+                <a:solidFill>
+                  <a:srgbClr val="1F2A3A"/>
+                </a:solidFill>
+                <a:latin typeface="Aptos"/>
+              </a:rPr>
+              <a:t>Building Details</a:t>
+            </a:r>
+            <a:endParaRPr lang="en-US" sz="2600" dirty="0"/>
+          </a:p>
+        </p:txBody>
+      </p:sp>
+      <p:pic>
+        <p:nvPicPr>
+          <p:cNvPr id="124" name="Poster visual 6"/>
+          <p:cNvPicPr/>
+          <p:nvPr/>
+        </p:nvPicPr>
+        <p:blipFill>
+          <a:blip ns2:embed="rId10"/>
+          <a:stretch>
+            <a:fillRect/>
+          </a:stretch>
+        </p:blipFill>
+        <p:spPr>
+          <a:xfrm>
+            <a:off x="15657576" y="23431500"/>
+            <a:ext cx="6736080" cy="6249924"/>
+          </a:xfrm>
+          <a:prstGeom prst="rect">
+            <a:avLst/>
+          </a:prstGeom>
+        </p:spPr>
+      </p:pic>
     </p:spTree>
   </p:cSld>
+  <p:clrMapOvr>
+    <a:masterClrMapping/>
+  </p:clrMapOvr>
   <p:timing>
     <p:tnLst>
       <p:par>
@@ -9155,14 +10896,14 @@
             <p:seq>
               <p:cTn id="2" dur="indefinite" nodeType="mainSeq"/>
               <p:prevCondLst>
-                <p:cond delay="0" evt="onPrev">
+                <p:cond evt="onPrev" delay="0">
                   <p:tgtEl>
                     <p:sldTgt/>
                   </p:tgtEl>
                 </p:cond>
               </p:prevCondLst>
               <p:nextCondLst>
-                <p:cond delay="0" evt="onNext">
+                <p:cond evt="onNext" delay="0">
                   <p:tgtEl>
                     <p:sldTgt/>
                   </p:tgtEl>
@@ -9188,31 +10929,31 @@
         <a:sysClr val="window" lastClr="FFFFFF"/>
       </a:lt1>
       <a:dk2>
-        <a:srgbClr val="1f497d"/>
+        <a:srgbClr val="1F497D"/>
       </a:dk2>
       <a:lt2>
-        <a:srgbClr val="eeece1"/>
+        <a:srgbClr val="EEECE1"/>
       </a:lt2>
       <a:accent1>
-        <a:srgbClr val="4f81bd"/>
+        <a:srgbClr val="4F81BD"/>
       </a:accent1>
       <a:accent2>
-        <a:srgbClr val="c0504d"/>
+        <a:srgbClr val="C0504D"/>
       </a:accent2>
       <a:accent3>
-        <a:srgbClr val="9bbb59"/>
+        <a:srgbClr val="9BBB59"/>
       </a:accent3>
       <a:accent4>
-        <a:srgbClr val="8064a2"/>
+        <a:srgbClr val="8064A2"/>
       </a:accent4>
       <a:accent5>
-        <a:srgbClr val="4bacc6"/>
+        <a:srgbClr val="4BACC6"/>
       </a:accent5>
       <a:accent6>
-        <a:srgbClr val="f79646"/>
+        <a:srgbClr val="F79646"/>
       </a:accent6>
       <a:hlink>
-        <a:srgbClr val="0000ff"/>
+        <a:srgbClr val="0000FF"/>
       </a:hlink>
       <a:folHlink>
         <a:srgbClr val="800080"/>
@@ -9397,5 +11138,322 @@
       </a:bgFillStyleLst>
     </a:fmtScheme>
   </a:themeElements>
+  <a:objectDefaults/>
+  <a:extraClrSchemeLst/>
+</a:theme>
+</file>
+
+<file path=ppt/theme/theme2.xml><?xml version="1.0" encoding="utf-8"?>
+<a:theme xmlns:a="http://schemas.openxmlformats.org/drawingml/2006/main" name="Office Theme">
+  <a:themeElements>
+    <a:clrScheme name="Office">
+      <a:dk1>
+        <a:sysClr val="windowText" lastClr="000000"/>
+      </a:dk1>
+      <a:lt1>
+        <a:sysClr val="window" lastClr="FFFFFF"/>
+      </a:lt1>
+      <a:dk2>
+        <a:srgbClr val="0E2841"/>
+      </a:dk2>
+      <a:lt2>
+        <a:srgbClr val="E8E8E8"/>
+      </a:lt2>
+      <a:accent1>
+        <a:srgbClr val="156082"/>
+      </a:accent1>
+      <a:accent2>
+        <a:srgbClr val="E97132"/>
+      </a:accent2>
+      <a:accent3>
+        <a:srgbClr val="196B24"/>
+      </a:accent3>
+      <a:accent4>
+        <a:srgbClr val="0F9ED5"/>
+      </a:accent4>
+      <a:accent5>
+        <a:srgbClr val="A02B93"/>
+      </a:accent5>
+      <a:accent6>
+        <a:srgbClr val="4EA72E"/>
+      </a:accent6>
+      <a:hlink>
+        <a:srgbClr val="467886"/>
+      </a:hlink>
+      <a:folHlink>
+        <a:srgbClr val="96607D"/>
+      </a:folHlink>
+    </a:clrScheme>
+    <a:fontScheme name="Office">
+      <a:majorFont>
+        <a:latin typeface="Aptos Display" panose="02110004020202020204"/>
+        <a:ea typeface=""/>
+        <a:cs typeface=""/>
+        <a:font script="Jpan" typeface="游ゴシック Light"/>
+        <a:font script="Hang" typeface="맑은 고딕"/>
+        <a:font script="Hans" typeface="等线 Light"/>
+        <a:font script="Hant" typeface="新細明體"/>
+        <a:font script="Arab" typeface="Times New Roman"/>
+        <a:font script="Hebr" typeface="Times New Roman"/>
+        <a:font script="Thai" typeface="Angsana New"/>
+        <a:font script="Ethi" typeface="Nyala"/>
+        <a:font script="Beng" typeface="Vrinda"/>
+        <a:font script="Gujr" typeface="Shruti"/>
+        <a:font script="Khmr" typeface="MoolBoran"/>
+        <a:font script="Knda" typeface="Tunga"/>
+        <a:font script="Guru" typeface="Raavi"/>
+        <a:font script="Cans" typeface="Euphemia"/>
+        <a:font script="Cher" typeface="Plantagenet Cherokee"/>
+        <a:font script="Yiii" typeface="Microsoft Yi Baiti"/>
+        <a:font script="Tibt" typeface="Microsoft Himalaya"/>
+        <a:font script="Thaa" typeface="MV Boli"/>
+        <a:font script="Deva" typeface="Mangal"/>
+        <a:font script="Telu" typeface="Gautami"/>
+        <a:font script="Taml" typeface="Latha"/>
+        <a:font script="Syrc" typeface="Estrangelo Edessa"/>
+        <a:font script="Orya" typeface="Kalinga"/>
+        <a:font script="Mlym" typeface="Kartika"/>
+        <a:font script="Laoo" typeface="DokChampa"/>
+        <a:font script="Sinh" typeface="Iskoola Pota"/>
+        <a:font script="Mong" typeface="Mongolian Baiti"/>
+        <a:font script="Viet" typeface="Times New Roman"/>
+        <a:font script="Uigh" typeface="Microsoft Uighur"/>
+        <a:font script="Geor" typeface="Sylfaen"/>
+        <a:font script="Armn" typeface="Arial"/>
+        <a:font script="Bugi" typeface="Leelawadee UI"/>
+        <a:font script="Bopo" typeface="Microsoft JhengHei"/>
+        <a:font script="Java" typeface="Javanese Text"/>
+        <a:font script="Lisu" typeface="Segoe UI"/>
+        <a:font script="Mymr" typeface="Myanmar Text"/>
+        <a:font script="Nkoo" typeface="Ebrima"/>
+        <a:font script="Olck" typeface="Nirmala UI"/>
+        <a:font script="Osma" typeface="Ebrima"/>
+        <a:font script="Phag" typeface="Phagspa"/>
+        <a:font script="Syrn" typeface="Estrangelo Edessa"/>
+        <a:font script="Syrj" typeface="Estrangelo Edessa"/>
+        <a:font script="Syre" typeface="Estrangelo Edessa"/>
+        <a:font script="Sora" typeface="Nirmala UI"/>
+        <a:font script="Tale" typeface="Microsoft Tai Le"/>
+        <a:font script="Talu" typeface="Microsoft New Tai Lue"/>
+        <a:font script="Tfng" typeface="Ebrima"/>
+      </a:majorFont>
+      <a:minorFont>
+        <a:latin typeface="Aptos" panose="02110004020202020204"/>
+        <a:ea typeface=""/>
+        <a:cs typeface=""/>
+        <a:font script="Jpan" typeface="游ゴシック"/>
+        <a:font script="Hang" typeface="맑은 고딕"/>
+        <a:font script="Hans" typeface="等线"/>
+        <a:font script="Hant" typeface="新細明體"/>
+        <a:font script="Arab" typeface="Arial"/>
+        <a:font script="Hebr" typeface="Arial"/>
+        <a:font script="Thai" typeface="Cordia New"/>
+        <a:font script="Ethi" typeface="Nyala"/>
+        <a:font script="Beng" typeface="Vrinda"/>
+        <a:font script="Gujr" typeface="Shruti"/>
+        <a:font script="Khmr" typeface="DaunPenh"/>
+        <a:font script="Knda" typeface="Tunga"/>
+        <a:font script="Guru" typeface="Raavi"/>
+        <a:font script="Cans" typeface="Euphemia"/>
+        <a:font script="Cher" typeface="Plantagenet Cherokee"/>
+        <a:font script="Yiii" typeface="Microsoft Yi Baiti"/>
+        <a:font script="Tibt" typeface="Microsoft Himalaya"/>
+        <a:font script="Thaa" typeface="MV Boli"/>
+        <a:font script="Deva" typeface="Mangal"/>
+        <a:font script="Telu" typeface="Gautami"/>
+        <a:font script="Taml" typeface="Latha"/>
+        <a:font script="Syrc" typeface="Estrangelo Edessa"/>
+        <a:font script="Orya" typeface="Kalinga"/>
+        <a:font script="Mlym" typeface="Kartika"/>
+        <a:font script="Laoo" typeface="DokChampa"/>
+        <a:font script="Sinh" typeface="Iskoola Pota"/>
+        <a:font script="Mong" typeface="Mongolian Baiti"/>
+        <a:font script="Viet" typeface="Arial"/>
+        <a:font script="Uigh" typeface="Microsoft Uighur"/>
+        <a:font script="Geor" typeface="Sylfaen"/>
+        <a:font script="Armn" typeface="Arial"/>
+        <a:font script="Bugi" typeface="Leelawadee UI"/>
+        <a:font script="Bopo" typeface="Microsoft JhengHei"/>
+        <a:font script="Java" typeface="Javanese Text"/>
+        <a:font script="Lisu" typeface="Segoe UI"/>
+        <a:font script="Mymr" typeface="Myanmar Text"/>
+        <a:font script="Nkoo" typeface="Ebrima"/>
+        <a:font script="Olck" typeface="Nirmala UI"/>
+        <a:font script="Osma" typeface="Ebrima"/>
+        <a:font script="Phag" typeface="Phagspa"/>
+        <a:font script="Syrn" typeface="Estrangelo Edessa"/>
+        <a:font script="Syrj" typeface="Estrangelo Edessa"/>
+        <a:font script="Syre" typeface="Estrangelo Edessa"/>
+        <a:font script="Sora" typeface="Nirmala UI"/>
+        <a:font script="Tale" typeface="Microsoft Tai Le"/>
+        <a:font script="Talu" typeface="Microsoft New Tai Lue"/>
+        <a:font script="Tfng" typeface="Ebrima"/>
+      </a:minorFont>
+    </a:fontScheme>
+    <a:fmtScheme name="Office">
+      <a:fillStyleLst>
+        <a:solidFill>
+          <a:schemeClr val="phClr"/>
+        </a:solidFill>
+        <a:gradFill rotWithShape="1">
+          <a:gsLst>
+            <a:gs pos="0">
+              <a:schemeClr val="phClr">
+                <a:lumMod val="110000"/>
+                <a:satMod val="105000"/>
+                <a:tint val="67000"/>
+              </a:schemeClr>
+            </a:gs>
+            <a:gs pos="50000">
+              <a:schemeClr val="phClr">
+                <a:lumMod val="105000"/>
+                <a:satMod val="103000"/>
+                <a:tint val="73000"/>
+              </a:schemeClr>
+            </a:gs>
+            <a:gs pos="100000">
+              <a:schemeClr val="phClr">
+                <a:lumMod val="105000"/>
+                <a:satMod val="109000"/>
+                <a:tint val="81000"/>
+              </a:schemeClr>
+            </a:gs>
+          </a:gsLst>
+          <a:lin ang="5400000" scaled="0"/>
+        </a:gradFill>
+        <a:gradFill rotWithShape="1">
+          <a:gsLst>
+            <a:gs pos="0">
+              <a:schemeClr val="phClr">
+                <a:satMod val="103000"/>
+                <a:lumMod val="102000"/>
+                <a:tint val="94000"/>
+              </a:schemeClr>
+            </a:gs>
+            <a:gs pos="50000">
+              <a:schemeClr val="phClr">
+                <a:satMod val="110000"/>
+                <a:lumMod val="100000"/>
+                <a:shade val="100000"/>
+              </a:schemeClr>
+            </a:gs>
+            <a:gs pos="100000">
+              <a:schemeClr val="phClr">
+                <a:lumMod val="99000"/>
+                <a:satMod val="120000"/>
+                <a:shade val="78000"/>
+              </a:schemeClr>
+            </a:gs>
+          </a:gsLst>
+          <a:lin ang="5400000" scaled="0"/>
+        </a:gradFill>
+      </a:fillStyleLst>
+      <a:lnStyleLst>
+        <a:ln w="12700" cap="flat" cmpd="sng" algn="ctr">
+          <a:solidFill>
+            <a:schemeClr val="phClr"/>
+          </a:solidFill>
+          <a:prstDash val="solid"/>
+          <a:miter lim="800000"/>
+        </a:ln>
+        <a:ln w="19050" cap="flat" cmpd="sng" algn="ctr">
+          <a:solidFill>
+            <a:schemeClr val="phClr"/>
+          </a:solidFill>
+          <a:prstDash val="solid"/>
+          <a:miter lim="800000"/>
+        </a:ln>
+        <a:ln w="25400" cap="flat" cmpd="sng" algn="ctr">
+          <a:solidFill>
+            <a:schemeClr val="phClr"/>
+          </a:solidFill>
+          <a:prstDash val="solid"/>
+          <a:miter lim="800000"/>
+        </a:ln>
+      </a:lnStyleLst>
+      <a:effectStyleLst>
+        <a:effectStyle>
+          <a:effectLst/>
+        </a:effectStyle>
+        <a:effectStyle>
+          <a:effectLst/>
+        </a:effectStyle>
+        <a:effectStyle>
+          <a:effectLst>
+            <a:outerShdw blurRad="57150" dist="19050" dir="5400000" algn="ctr" rotWithShape="0">
+              <a:srgbClr val="000000">
+                <a:alpha val="63000"/>
+              </a:srgbClr>
+            </a:outerShdw>
+          </a:effectLst>
+        </a:effectStyle>
+      </a:effectStyleLst>
+      <a:bgFillStyleLst>
+        <a:solidFill>
+          <a:schemeClr val="phClr"/>
+        </a:solidFill>
+        <a:solidFill>
+          <a:schemeClr val="phClr">
+            <a:tint val="95000"/>
+            <a:satMod val="170000"/>
+          </a:schemeClr>
+        </a:solidFill>
+        <a:gradFill rotWithShape="1">
+          <a:gsLst>
+            <a:gs pos="0">
+              <a:schemeClr val="phClr">
+                <a:tint val="93000"/>
+                <a:satMod val="150000"/>
+                <a:shade val="98000"/>
+                <a:lumMod val="102000"/>
+              </a:schemeClr>
+            </a:gs>
+            <a:gs pos="50000">
+              <a:schemeClr val="phClr">
+                <a:tint val="98000"/>
+                <a:satMod val="130000"/>
+                <a:shade val="90000"/>
+                <a:lumMod val="103000"/>
+              </a:schemeClr>
+            </a:gs>
+            <a:gs pos="100000">
+              <a:schemeClr val="phClr">
+                <a:shade val="63000"/>
+                <a:satMod val="120000"/>
+              </a:schemeClr>
+            </a:gs>
+          </a:gsLst>
+          <a:lin ang="5400000" scaled="0"/>
+        </a:gradFill>
+      </a:bgFillStyleLst>
+    </a:fmtScheme>
+  </a:themeElements>
+  <a:objectDefaults>
+    <a:lnDef>
+      <a:spPr/>
+      <a:bodyPr/>
+      <a:lstStyle/>
+      <a:style>
+        <a:lnRef idx="2">
+          <a:schemeClr val="accent1"/>
+        </a:lnRef>
+        <a:fillRef idx="0">
+          <a:schemeClr val="accent1"/>
+        </a:fillRef>
+        <a:effectRef idx="1">
+          <a:schemeClr val="accent1"/>
+        </a:effectRef>
+        <a:fontRef idx="minor">
+          <a:schemeClr val="tx1"/>
+        </a:fontRef>
+      </a:style>
+    </a:lnDef>
+  </a:objectDefaults>
+  <a:extraClrSchemeLst/>
+  <a:extLst>
+    <a:ext uri="{05A4C25C-085E-4340-85A3-A5531E510DB2}">
+      <thm15:themeFamily xmlns:thm15="http://schemas.microsoft.com/office/thememl/2012/main" name="Office Theme" id="{2E142A2C-CD16-42D6-873A-C26D2A0506FA}" vid="{1BDDFF52-6CD6-40A5-AB3C-68EB2F1E4D0A}"/>
+    </a:ext>
+  </a:extLst>
 </a:theme>
 </file>